--- a/deliverables/OnboardIQ-Presentation.pptx
+++ b/deliverables/OnboardIQ-Presentation.pptx
@@ -18,6 +18,12 @@
     <p:sldId id="266" r:id="rId17"/>
     <p:sldId id="267" r:id="rId18"/>
     <p:sldId id="268" r:id="rId19"/>
+    <p:sldId id="269" r:id="rId20"/>
+    <p:sldId id="270" r:id="rId21"/>
+    <p:sldId id="271" r:id="rId22"/>
+    <p:sldId id="272" r:id="rId23"/>
+    <p:sldId id="273" r:id="rId24"/>
+    <p:sldId id="274" r:id="rId25"/>
   </p:sldIdLst>
   <p:sldSz cx="12188952" cy="6858000" type="screen4x3"/>
   <p:notesSz cx="6858000" cy="9144000"/>
@@ -11516,6 +11522,7886 @@
                 </a:solidFill>
               </a:rPr>
               <a:t>AWS SAM</a:t>
+            </a:r>
+          </a:p>
+        </p:txBody>
+      </p:sp>
+    </p:spTree>
+  </p:cSld>
+  <p:clrMapOvr>
+    <a:masterClrMapping/>
+  </p:clrMapOvr>
+</p:sld>
+</file>
+
+<file path=ppt/slides/slide14.xml><?xml version="1.0" encoding="utf-8"?>
+<p:sld xmlns:a="http://schemas.openxmlformats.org/drawingml/2006/main" xmlns:p="http://schemas.openxmlformats.org/presentationml/2006/main" xmlns:r="http://schemas.openxmlformats.org/officeDocument/2006/relationships">
+  <p:cSld>
+    <p:spTree>
+      <p:nvGrpSpPr>
+        <p:cNvPr id="1" name=""/>
+        <p:cNvGrpSpPr/>
+        <p:nvPr/>
+      </p:nvGrpSpPr>
+      <p:grpSpPr/>
+      <p:sp>
+        <p:nvSpPr>
+          <p:cNvPr id="2" name="Rectangle 1"/>
+          <p:cNvSpPr/>
+          <p:nvPr/>
+        </p:nvSpPr>
+        <p:spPr>
+          <a:xfrm>
+            <a:off x="0" y="0"/>
+            <a:ext cx="12188952" cy="6858000"/>
+          </a:xfrm>
+          <a:prstGeom prst="rect">
+            <a:avLst/>
+          </a:prstGeom>
+          <a:solidFill>
+            <a:srgbClr val="F7F6F3"/>
+          </a:solidFill>
+          <a:ln>
+            <a:noFill/>
+          </a:ln>
+        </p:spPr>
+        <p:style>
+          <a:lnRef idx="1">
+            <a:schemeClr val="accent1"/>
+          </a:lnRef>
+          <a:fillRef idx="3">
+            <a:schemeClr val="accent1"/>
+          </a:fillRef>
+          <a:effectRef idx="2">
+            <a:schemeClr val="accent1"/>
+          </a:effectRef>
+          <a:fontRef idx="minor">
+            <a:schemeClr val="lt1"/>
+          </a:fontRef>
+        </p:style>
+        <p:txBody>
+          <a:bodyPr rtlCol="0" anchor="ctr"/>
+          <a:lstStyle/>
+          <a:p>
+            <a:pPr algn="ctr"/>
+          </a:p>
+        </p:txBody>
+      </p:sp>
+      <p:sp>
+        <p:nvSpPr>
+          <p:cNvPr id="3" name="Rectangle 2"/>
+          <p:cNvSpPr/>
+          <p:nvPr/>
+        </p:nvSpPr>
+        <p:spPr>
+          <a:xfrm>
+            <a:off x="0" y="0"/>
+            <a:ext cx="36576" cy="6858000"/>
+          </a:xfrm>
+          <a:prstGeom prst="rect">
+            <a:avLst/>
+          </a:prstGeom>
+          <a:solidFill>
+            <a:srgbClr val="4A7C6B"/>
+          </a:solidFill>
+          <a:ln>
+            <a:noFill/>
+          </a:ln>
+        </p:spPr>
+        <p:style>
+          <a:lnRef idx="1">
+            <a:schemeClr val="accent1"/>
+          </a:lnRef>
+          <a:fillRef idx="3">
+            <a:schemeClr val="accent1"/>
+          </a:fillRef>
+          <a:effectRef idx="2">
+            <a:schemeClr val="accent1"/>
+          </a:effectRef>
+          <a:fontRef idx="minor">
+            <a:schemeClr val="lt1"/>
+          </a:fontRef>
+        </p:style>
+        <p:txBody>
+          <a:bodyPr rtlCol="0" anchor="ctr"/>
+          <a:lstStyle/>
+          <a:p>
+            <a:pPr algn="ctr"/>
+          </a:p>
+        </p:txBody>
+      </p:sp>
+      <p:sp>
+        <p:nvSpPr>
+          <p:cNvPr id="4" name="Rectangle 3"/>
+          <p:cNvSpPr/>
+          <p:nvPr/>
+        </p:nvSpPr>
+        <p:spPr>
+          <a:xfrm>
+            <a:off x="502920" y="292608"/>
+            <a:ext cx="274320" cy="274320"/>
+          </a:xfrm>
+          <a:prstGeom prst="rect">
+            <a:avLst/>
+          </a:prstGeom>
+          <a:solidFill>
+            <a:srgbClr val="4A7C6B"/>
+          </a:solidFill>
+          <a:ln>
+            <a:noFill/>
+          </a:ln>
+        </p:spPr>
+        <p:style>
+          <a:lnRef idx="1">
+            <a:schemeClr val="accent1"/>
+          </a:lnRef>
+          <a:fillRef idx="3">
+            <a:schemeClr val="accent1"/>
+          </a:fillRef>
+          <a:effectRef idx="2">
+            <a:schemeClr val="accent1"/>
+          </a:effectRef>
+          <a:fontRef idx="minor">
+            <a:schemeClr val="lt1"/>
+          </a:fontRef>
+        </p:style>
+        <p:txBody>
+          <a:bodyPr rtlCol="0" anchor="ctr"/>
+          <a:lstStyle/>
+          <a:p>
+            <a:pPr algn="ctr"/>
+          </a:p>
+        </p:txBody>
+      </p:sp>
+      <p:sp>
+        <p:nvSpPr>
+          <p:cNvPr id="5" name="Rectangle 4"/>
+          <p:cNvSpPr/>
+          <p:nvPr/>
+        </p:nvSpPr>
+        <p:spPr>
+          <a:xfrm>
+            <a:off x="563270" y="352958"/>
+            <a:ext cx="153619" cy="153619"/>
+          </a:xfrm>
+          <a:prstGeom prst="rect">
+            <a:avLst/>
+          </a:prstGeom>
+          <a:solidFill>
+            <a:srgbClr val="EBF3EF"/>
+          </a:solidFill>
+          <a:ln>
+            <a:noFill/>
+          </a:ln>
+        </p:spPr>
+        <p:style>
+          <a:lnRef idx="1">
+            <a:schemeClr val="accent1"/>
+          </a:lnRef>
+          <a:fillRef idx="3">
+            <a:schemeClr val="accent1"/>
+          </a:fillRef>
+          <a:effectRef idx="2">
+            <a:schemeClr val="accent1"/>
+          </a:effectRef>
+          <a:fontRef idx="minor">
+            <a:schemeClr val="lt1"/>
+          </a:fontRef>
+        </p:style>
+        <p:txBody>
+          <a:bodyPr rtlCol="0" anchor="ctr"/>
+          <a:lstStyle/>
+          <a:p>
+            <a:pPr algn="ctr"/>
+          </a:p>
+        </p:txBody>
+      </p:sp>
+      <p:sp>
+        <p:nvSpPr>
+          <p:cNvPr id="6" name="TextBox 5"/>
+          <p:cNvSpPr txBox="1"/>
+          <p:nvPr/>
+        </p:nvSpPr>
+        <p:spPr>
+          <a:xfrm>
+            <a:off x="868680" y="292608"/>
+            <a:ext cx="2743200" cy="274320"/>
+          </a:xfrm>
+          <a:prstGeom prst="rect">
+            <a:avLst/>
+          </a:prstGeom>
+          <a:noFill/>
+        </p:spPr>
+        <p:txBody>
+          <a:bodyPr wrap="square">
+            <a:spAutoFit/>
+          </a:bodyPr>
+          <a:lstStyle/>
+          <a:p>
+            <a:pPr algn="l"/>
+            <a:r>
+              <a:rPr sz="1100" b="1" i="0">
+                <a:solidFill>
+                  <a:srgbClr val="1C1A17"/>
+                </a:solidFill>
+              </a:rPr>
+              <a:t>OnboardIQ</a:t>
+            </a:r>
+          </a:p>
+        </p:txBody>
+      </p:sp>
+      <p:sp>
+        <p:nvSpPr>
+          <p:cNvPr id="7" name="Rectangle 6"/>
+          <p:cNvSpPr/>
+          <p:nvPr/>
+        </p:nvSpPr>
+        <p:spPr>
+          <a:xfrm>
+            <a:off x="10515600" y="246888"/>
+            <a:ext cx="1170432" cy="256032"/>
+          </a:xfrm>
+          <a:prstGeom prst="rect">
+            <a:avLst/>
+          </a:prstGeom>
+          <a:solidFill>
+            <a:srgbClr val="EBF3EF"/>
+          </a:solidFill>
+          <a:ln>
+            <a:noFill/>
+          </a:ln>
+        </p:spPr>
+        <p:style>
+          <a:lnRef idx="1">
+            <a:schemeClr val="accent1"/>
+          </a:lnRef>
+          <a:fillRef idx="3">
+            <a:schemeClr val="accent1"/>
+          </a:fillRef>
+          <a:effectRef idx="2">
+            <a:schemeClr val="accent1"/>
+          </a:effectRef>
+          <a:fontRef idx="minor">
+            <a:schemeClr val="lt1"/>
+          </a:fontRef>
+        </p:style>
+        <p:txBody>
+          <a:bodyPr rtlCol="0" anchor="ctr"/>
+          <a:lstStyle/>
+          <a:p>
+            <a:pPr algn="ctr"/>
+          </a:p>
+        </p:txBody>
+      </p:sp>
+      <p:sp>
+        <p:nvSpPr>
+          <p:cNvPr id="8" name="TextBox 7"/>
+          <p:cNvSpPr txBox="1"/>
+          <p:nvPr/>
+        </p:nvSpPr>
+        <p:spPr>
+          <a:xfrm>
+            <a:off x="10515600" y="246888"/>
+            <a:ext cx="1170432" cy="256032"/>
+          </a:xfrm>
+          <a:prstGeom prst="rect">
+            <a:avLst/>
+          </a:prstGeom>
+          <a:noFill/>
+        </p:spPr>
+        <p:txBody>
+          <a:bodyPr wrap="square">
+            <a:spAutoFit/>
+          </a:bodyPr>
+          <a:lstStyle/>
+          <a:p>
+            <a:pPr algn="ctr"/>
+            <a:r>
+              <a:rPr sz="900" b="1" i="0">
+                <a:solidFill>
+                  <a:srgbClr val="4A7C6B"/>
+                </a:solidFill>
+              </a:rPr>
+              <a:t>OBSERVABILITY</a:t>
+            </a:r>
+          </a:p>
+        </p:txBody>
+      </p:sp>
+      <p:sp>
+        <p:nvSpPr>
+          <p:cNvPr id="9" name="Rectangle 8"/>
+          <p:cNvSpPr/>
+          <p:nvPr/>
+        </p:nvSpPr>
+        <p:spPr>
+          <a:xfrm>
+            <a:off x="502920" y="658368"/>
+            <a:ext cx="11155680" cy="12700"/>
+          </a:xfrm>
+          <a:prstGeom prst="rect">
+            <a:avLst/>
+          </a:prstGeom>
+          <a:solidFill>
+            <a:srgbClr val="E8E5DE"/>
+          </a:solidFill>
+          <a:ln>
+            <a:noFill/>
+          </a:ln>
+        </p:spPr>
+        <p:style>
+          <a:lnRef idx="1">
+            <a:schemeClr val="accent1"/>
+          </a:lnRef>
+          <a:fillRef idx="3">
+            <a:schemeClr val="accent1"/>
+          </a:fillRef>
+          <a:effectRef idx="2">
+            <a:schemeClr val="accent1"/>
+          </a:effectRef>
+          <a:fontRef idx="minor">
+            <a:schemeClr val="lt1"/>
+          </a:fontRef>
+        </p:style>
+        <p:txBody>
+          <a:bodyPr rtlCol="0" anchor="ctr"/>
+          <a:lstStyle/>
+          <a:p>
+            <a:pPr algn="ctr"/>
+          </a:p>
+        </p:txBody>
+      </p:sp>
+      <p:sp>
+        <p:nvSpPr>
+          <p:cNvPr id="10" name="TextBox 9"/>
+          <p:cNvSpPr txBox="1"/>
+          <p:nvPr/>
+        </p:nvSpPr>
+        <p:spPr>
+          <a:xfrm>
+            <a:off x="502920" y="777240"/>
+            <a:ext cx="9144000" cy="594360"/>
+          </a:xfrm>
+          <a:prstGeom prst="rect">
+            <a:avLst/>
+          </a:prstGeom>
+          <a:noFill/>
+        </p:spPr>
+        <p:txBody>
+          <a:bodyPr wrap="square">
+            <a:spAutoFit/>
+          </a:bodyPr>
+          <a:lstStyle/>
+          <a:p>
+            <a:pPr algn="l"/>
+            <a:r>
+              <a:rPr sz="2800" b="1" i="0">
+                <a:solidFill>
+                  <a:srgbClr val="1C1A17"/>
+                </a:solidFill>
+              </a:rPr>
+              <a:t>CloudWatch Dashboard — Live</a:t>
+            </a:r>
+          </a:p>
+        </p:txBody>
+      </p:sp>
+      <p:sp>
+        <p:nvSpPr>
+          <p:cNvPr id="11" name="TextBox 10"/>
+          <p:cNvSpPr txBox="1"/>
+          <p:nvPr/>
+        </p:nvSpPr>
+        <p:spPr>
+          <a:xfrm>
+            <a:off x="502920" y="1325880"/>
+            <a:ext cx="10058400" cy="320040"/>
+          </a:xfrm>
+          <a:prstGeom prst="rect">
+            <a:avLst/>
+          </a:prstGeom>
+          <a:noFill/>
+        </p:spPr>
+        <p:txBody>
+          <a:bodyPr wrap="square">
+            <a:spAutoFit/>
+          </a:bodyPr>
+          <a:lstStyle/>
+          <a:p>
+            <a:pPr algn="l"/>
+            <a:r>
+              <a:rPr sz="1300" b="0" i="0">
+                <a:solidFill>
+                  <a:srgbClr val="5C5852"/>
+                </a:solidFill>
+              </a:rPr>
+              <a:t>hrms-onboarding-observability · 4 widgets · all Lambda functions · ap-south-1</a:t>
+            </a:r>
+          </a:p>
+        </p:txBody>
+      </p:sp>
+      <p:sp>
+        <p:nvSpPr>
+          <p:cNvPr id="12" name="Rectangle 11"/>
+          <p:cNvSpPr/>
+          <p:nvPr/>
+        </p:nvSpPr>
+        <p:spPr>
+          <a:xfrm>
+            <a:off x="502920" y="1664208"/>
+            <a:ext cx="11155680" cy="12700"/>
+          </a:xfrm>
+          <a:prstGeom prst="rect">
+            <a:avLst/>
+          </a:prstGeom>
+          <a:solidFill>
+            <a:srgbClr val="E8E5DE"/>
+          </a:solidFill>
+          <a:ln>
+            <a:noFill/>
+          </a:ln>
+        </p:spPr>
+        <p:style>
+          <a:lnRef idx="1">
+            <a:schemeClr val="accent1"/>
+          </a:lnRef>
+          <a:fillRef idx="3">
+            <a:schemeClr val="accent1"/>
+          </a:fillRef>
+          <a:effectRef idx="2">
+            <a:schemeClr val="accent1"/>
+          </a:effectRef>
+          <a:fontRef idx="minor">
+            <a:schemeClr val="lt1"/>
+          </a:fontRef>
+        </p:style>
+        <p:txBody>
+          <a:bodyPr rtlCol="0" anchor="ctr"/>
+          <a:lstStyle/>
+          <a:p>
+            <a:pPr algn="ctr"/>
+          </a:p>
+        </p:txBody>
+      </p:sp>
+      <p:pic>
+        <p:nvPicPr>
+          <p:cNvPr id="13" name="Picture 12" descr="dashboard.png"/>
+          <p:cNvPicPr>
+            <a:picLocks noChangeAspect="1"/>
+          </p:cNvPicPr>
+          <p:nvPr/>
+        </p:nvPicPr>
+        <p:blipFill>
+          <a:blip r:embed="rId2"/>
+          <a:stretch>
+            <a:fillRect/>
+          </a:stretch>
+        </p:blipFill>
+        <p:spPr>
+          <a:xfrm>
+            <a:off x="502920" y="1783080"/>
+            <a:ext cx="11155680" cy="4663440"/>
+          </a:xfrm>
+          <a:prstGeom prst="rect">
+            <a:avLst/>
+          </a:prstGeom>
+        </p:spPr>
+      </p:pic>
+      <p:sp>
+        <p:nvSpPr>
+          <p:cNvPr id="14" name="Rectangle 13"/>
+          <p:cNvSpPr/>
+          <p:nvPr/>
+        </p:nvSpPr>
+        <p:spPr>
+          <a:xfrm>
+            <a:off x="502920" y="6473952"/>
+            <a:ext cx="11155680" cy="274320"/>
+          </a:xfrm>
+          <a:prstGeom prst="rect">
+            <a:avLst/>
+          </a:prstGeom>
+          <a:solidFill>
+            <a:srgbClr val="EBF3EF"/>
+          </a:solidFill>
+          <a:ln>
+            <a:noFill/>
+          </a:ln>
+        </p:spPr>
+        <p:style>
+          <a:lnRef idx="1">
+            <a:schemeClr val="accent1"/>
+          </a:lnRef>
+          <a:fillRef idx="3">
+            <a:schemeClr val="accent1"/>
+          </a:fillRef>
+          <a:effectRef idx="2">
+            <a:schemeClr val="accent1"/>
+          </a:effectRef>
+          <a:fontRef idx="minor">
+            <a:schemeClr val="lt1"/>
+          </a:fontRef>
+        </p:style>
+        <p:txBody>
+          <a:bodyPr rtlCol="0" anchor="ctr"/>
+          <a:lstStyle/>
+          <a:p>
+            <a:pPr algn="ctr"/>
+          </a:p>
+        </p:txBody>
+      </p:sp>
+      <p:sp>
+        <p:nvSpPr>
+          <p:cNvPr id="15" name="TextBox 14"/>
+          <p:cNvSpPr txBox="1"/>
+          <p:nvPr/>
+        </p:nvSpPr>
+        <p:spPr>
+          <a:xfrm>
+            <a:off x="658368" y="6492240"/>
+            <a:ext cx="10972800" cy="237744"/>
+          </a:xfrm>
+          <a:prstGeom prst="rect">
+            <a:avLst/>
+          </a:prstGeom>
+          <a:noFill/>
+        </p:spPr>
+        <p:txBody>
+          <a:bodyPr wrap="square">
+            <a:spAutoFit/>
+          </a:bodyPr>
+          <a:lstStyle/>
+          <a:p>
+            <a:pPr algn="l"/>
+            <a:r>
+              <a:rPr sz="950" b="0" i="1">
+                <a:solidFill>
+                  <a:srgbClr val="4A7C6B"/>
+                </a:solidFill>
+              </a:rPr>
+              <a:t>Dashboard: Lambda Invocations · Lambda Errors · p99 Duration · Active Alarms — all 12 alarms green except demo alarm</a:t>
+            </a:r>
+          </a:p>
+        </p:txBody>
+      </p:sp>
+    </p:spTree>
+  </p:cSld>
+  <p:clrMapOvr>
+    <a:masterClrMapping/>
+  </p:clrMapOvr>
+</p:sld>
+</file>
+
+<file path=ppt/slides/slide15.xml><?xml version="1.0" encoding="utf-8"?>
+<p:sld xmlns:a="http://schemas.openxmlformats.org/drawingml/2006/main" xmlns:p="http://schemas.openxmlformats.org/presentationml/2006/main" xmlns:r="http://schemas.openxmlformats.org/officeDocument/2006/relationships">
+  <p:cSld>
+    <p:spTree>
+      <p:nvGrpSpPr>
+        <p:cNvPr id="1" name=""/>
+        <p:cNvGrpSpPr/>
+        <p:nvPr/>
+      </p:nvGrpSpPr>
+      <p:grpSpPr/>
+      <p:sp>
+        <p:nvSpPr>
+          <p:cNvPr id="2" name="Rectangle 1"/>
+          <p:cNvSpPr/>
+          <p:nvPr/>
+        </p:nvSpPr>
+        <p:spPr>
+          <a:xfrm>
+            <a:off x="0" y="0"/>
+            <a:ext cx="12188952" cy="6858000"/>
+          </a:xfrm>
+          <a:prstGeom prst="rect">
+            <a:avLst/>
+          </a:prstGeom>
+          <a:solidFill>
+            <a:srgbClr val="F7F6F3"/>
+          </a:solidFill>
+          <a:ln>
+            <a:noFill/>
+          </a:ln>
+        </p:spPr>
+        <p:style>
+          <a:lnRef idx="1">
+            <a:schemeClr val="accent1"/>
+          </a:lnRef>
+          <a:fillRef idx="3">
+            <a:schemeClr val="accent1"/>
+          </a:fillRef>
+          <a:effectRef idx="2">
+            <a:schemeClr val="accent1"/>
+          </a:effectRef>
+          <a:fontRef idx="minor">
+            <a:schemeClr val="lt1"/>
+          </a:fontRef>
+        </p:style>
+        <p:txBody>
+          <a:bodyPr rtlCol="0" anchor="ctr"/>
+          <a:lstStyle/>
+          <a:p>
+            <a:pPr algn="ctr"/>
+          </a:p>
+        </p:txBody>
+      </p:sp>
+      <p:sp>
+        <p:nvSpPr>
+          <p:cNvPr id="3" name="Rectangle 2"/>
+          <p:cNvSpPr/>
+          <p:nvPr/>
+        </p:nvSpPr>
+        <p:spPr>
+          <a:xfrm>
+            <a:off x="0" y="0"/>
+            <a:ext cx="36576" cy="6858000"/>
+          </a:xfrm>
+          <a:prstGeom prst="rect">
+            <a:avLst/>
+          </a:prstGeom>
+          <a:solidFill>
+            <a:srgbClr val="C25042"/>
+          </a:solidFill>
+          <a:ln>
+            <a:noFill/>
+          </a:ln>
+        </p:spPr>
+        <p:style>
+          <a:lnRef idx="1">
+            <a:schemeClr val="accent1"/>
+          </a:lnRef>
+          <a:fillRef idx="3">
+            <a:schemeClr val="accent1"/>
+          </a:fillRef>
+          <a:effectRef idx="2">
+            <a:schemeClr val="accent1"/>
+          </a:effectRef>
+          <a:fontRef idx="minor">
+            <a:schemeClr val="lt1"/>
+          </a:fontRef>
+        </p:style>
+        <p:txBody>
+          <a:bodyPr rtlCol="0" anchor="ctr"/>
+          <a:lstStyle/>
+          <a:p>
+            <a:pPr algn="ctr"/>
+          </a:p>
+        </p:txBody>
+      </p:sp>
+      <p:sp>
+        <p:nvSpPr>
+          <p:cNvPr id="4" name="Rectangle 3"/>
+          <p:cNvSpPr/>
+          <p:nvPr/>
+        </p:nvSpPr>
+        <p:spPr>
+          <a:xfrm>
+            <a:off x="502920" y="292608"/>
+            <a:ext cx="274320" cy="274320"/>
+          </a:xfrm>
+          <a:prstGeom prst="rect">
+            <a:avLst/>
+          </a:prstGeom>
+          <a:solidFill>
+            <a:srgbClr val="4A7C6B"/>
+          </a:solidFill>
+          <a:ln>
+            <a:noFill/>
+          </a:ln>
+        </p:spPr>
+        <p:style>
+          <a:lnRef idx="1">
+            <a:schemeClr val="accent1"/>
+          </a:lnRef>
+          <a:fillRef idx="3">
+            <a:schemeClr val="accent1"/>
+          </a:fillRef>
+          <a:effectRef idx="2">
+            <a:schemeClr val="accent1"/>
+          </a:effectRef>
+          <a:fontRef idx="minor">
+            <a:schemeClr val="lt1"/>
+          </a:fontRef>
+        </p:style>
+        <p:txBody>
+          <a:bodyPr rtlCol="0" anchor="ctr"/>
+          <a:lstStyle/>
+          <a:p>
+            <a:pPr algn="ctr"/>
+          </a:p>
+        </p:txBody>
+      </p:sp>
+      <p:sp>
+        <p:nvSpPr>
+          <p:cNvPr id="5" name="Rectangle 4"/>
+          <p:cNvSpPr/>
+          <p:nvPr/>
+        </p:nvSpPr>
+        <p:spPr>
+          <a:xfrm>
+            <a:off x="563270" y="352958"/>
+            <a:ext cx="153619" cy="153619"/>
+          </a:xfrm>
+          <a:prstGeom prst="rect">
+            <a:avLst/>
+          </a:prstGeom>
+          <a:solidFill>
+            <a:srgbClr val="EBF3EF"/>
+          </a:solidFill>
+          <a:ln>
+            <a:noFill/>
+          </a:ln>
+        </p:spPr>
+        <p:style>
+          <a:lnRef idx="1">
+            <a:schemeClr val="accent1"/>
+          </a:lnRef>
+          <a:fillRef idx="3">
+            <a:schemeClr val="accent1"/>
+          </a:fillRef>
+          <a:effectRef idx="2">
+            <a:schemeClr val="accent1"/>
+          </a:effectRef>
+          <a:fontRef idx="minor">
+            <a:schemeClr val="lt1"/>
+          </a:fontRef>
+        </p:style>
+        <p:txBody>
+          <a:bodyPr rtlCol="0" anchor="ctr"/>
+          <a:lstStyle/>
+          <a:p>
+            <a:pPr algn="ctr"/>
+          </a:p>
+        </p:txBody>
+      </p:sp>
+      <p:sp>
+        <p:nvSpPr>
+          <p:cNvPr id="6" name="TextBox 5"/>
+          <p:cNvSpPr txBox="1"/>
+          <p:nvPr/>
+        </p:nvSpPr>
+        <p:spPr>
+          <a:xfrm>
+            <a:off x="868680" y="292608"/>
+            <a:ext cx="2743200" cy="274320"/>
+          </a:xfrm>
+          <a:prstGeom prst="rect">
+            <a:avLst/>
+          </a:prstGeom>
+          <a:noFill/>
+        </p:spPr>
+        <p:txBody>
+          <a:bodyPr wrap="square">
+            <a:spAutoFit/>
+          </a:bodyPr>
+          <a:lstStyle/>
+          <a:p>
+            <a:pPr algn="l"/>
+            <a:r>
+              <a:rPr sz="1100" b="1" i="0">
+                <a:solidFill>
+                  <a:srgbClr val="1C1A17"/>
+                </a:solidFill>
+              </a:rPr>
+              <a:t>OnboardIQ</a:t>
+            </a:r>
+          </a:p>
+        </p:txBody>
+      </p:sp>
+      <p:sp>
+        <p:nvSpPr>
+          <p:cNvPr id="7" name="Rectangle 6"/>
+          <p:cNvSpPr/>
+          <p:nvPr/>
+        </p:nvSpPr>
+        <p:spPr>
+          <a:xfrm>
+            <a:off x="10515600" y="246888"/>
+            <a:ext cx="1170432" cy="256032"/>
+          </a:xfrm>
+          <a:prstGeom prst="rect">
+            <a:avLst/>
+          </a:prstGeom>
+          <a:solidFill>
+            <a:srgbClr val="FBF0EE"/>
+          </a:solidFill>
+          <a:ln>
+            <a:noFill/>
+          </a:ln>
+        </p:spPr>
+        <p:style>
+          <a:lnRef idx="1">
+            <a:schemeClr val="accent1"/>
+          </a:lnRef>
+          <a:fillRef idx="3">
+            <a:schemeClr val="accent1"/>
+          </a:fillRef>
+          <a:effectRef idx="2">
+            <a:schemeClr val="accent1"/>
+          </a:effectRef>
+          <a:fontRef idx="minor">
+            <a:schemeClr val="lt1"/>
+          </a:fontRef>
+        </p:style>
+        <p:txBody>
+          <a:bodyPr rtlCol="0" anchor="ctr"/>
+          <a:lstStyle/>
+          <a:p>
+            <a:pPr algn="ctr"/>
+          </a:p>
+        </p:txBody>
+      </p:sp>
+      <p:sp>
+        <p:nvSpPr>
+          <p:cNvPr id="8" name="TextBox 7"/>
+          <p:cNvSpPr txBox="1"/>
+          <p:nvPr/>
+        </p:nvSpPr>
+        <p:spPr>
+          <a:xfrm>
+            <a:off x="10515600" y="246888"/>
+            <a:ext cx="1170432" cy="256032"/>
+          </a:xfrm>
+          <a:prstGeom prst="rect">
+            <a:avLst/>
+          </a:prstGeom>
+          <a:noFill/>
+        </p:spPr>
+        <p:txBody>
+          <a:bodyPr wrap="square">
+            <a:spAutoFit/>
+          </a:bodyPr>
+          <a:lstStyle/>
+          <a:p>
+            <a:pPr algn="ctr"/>
+            <a:r>
+              <a:rPr sz="900" b="1" i="0">
+                <a:solidFill>
+                  <a:srgbClr val="C25042"/>
+                </a:solidFill>
+              </a:rPr>
+              <a:t>ALARM DEMO</a:t>
+            </a:r>
+          </a:p>
+        </p:txBody>
+      </p:sp>
+      <p:sp>
+        <p:nvSpPr>
+          <p:cNvPr id="9" name="Rectangle 8"/>
+          <p:cNvSpPr/>
+          <p:nvPr/>
+        </p:nvSpPr>
+        <p:spPr>
+          <a:xfrm>
+            <a:off x="502920" y="658368"/>
+            <a:ext cx="11155680" cy="12700"/>
+          </a:xfrm>
+          <a:prstGeom prst="rect">
+            <a:avLst/>
+          </a:prstGeom>
+          <a:solidFill>
+            <a:srgbClr val="E8E5DE"/>
+          </a:solidFill>
+          <a:ln>
+            <a:noFill/>
+          </a:ln>
+        </p:spPr>
+        <p:style>
+          <a:lnRef idx="1">
+            <a:schemeClr val="accent1"/>
+          </a:lnRef>
+          <a:fillRef idx="3">
+            <a:schemeClr val="accent1"/>
+          </a:fillRef>
+          <a:effectRef idx="2">
+            <a:schemeClr val="accent1"/>
+          </a:effectRef>
+          <a:fontRef idx="minor">
+            <a:schemeClr val="lt1"/>
+          </a:fontRef>
+        </p:style>
+        <p:txBody>
+          <a:bodyPr rtlCol="0" anchor="ctr"/>
+          <a:lstStyle/>
+          <a:p>
+            <a:pPr algn="ctr"/>
+          </a:p>
+        </p:txBody>
+      </p:sp>
+      <p:sp>
+        <p:nvSpPr>
+          <p:cNvPr id="10" name="TextBox 9"/>
+          <p:cNvSpPr txBox="1"/>
+          <p:nvPr/>
+        </p:nvSpPr>
+        <p:spPr>
+          <a:xfrm>
+            <a:off x="502920" y="777240"/>
+            <a:ext cx="9144000" cy="594360"/>
+          </a:xfrm>
+          <a:prstGeom prst="rect">
+            <a:avLst/>
+          </a:prstGeom>
+          <a:noFill/>
+        </p:spPr>
+        <p:txBody>
+          <a:bodyPr wrap="square">
+            <a:spAutoFit/>
+          </a:bodyPr>
+          <a:lstStyle/>
+          <a:p>
+            <a:pPr algn="l"/>
+            <a:r>
+              <a:rPr sz="2800" b="1" i="0">
+                <a:solidFill>
+                  <a:srgbClr val="1C1A17"/>
+                </a:solidFill>
+              </a:rPr>
+              <a:t>Triggered Alarm Demo</a:t>
+            </a:r>
+          </a:p>
+        </p:txBody>
+      </p:sp>
+      <p:sp>
+        <p:nvSpPr>
+          <p:cNvPr id="11" name="TextBox 10"/>
+          <p:cNvSpPr txBox="1"/>
+          <p:nvPr/>
+        </p:nvSpPr>
+        <p:spPr>
+          <a:xfrm>
+            <a:off x="502920" y="1325880"/>
+            <a:ext cx="10058400" cy="320040"/>
+          </a:xfrm>
+          <a:prstGeom prst="rect">
+            <a:avLst/>
+          </a:prstGeom>
+          <a:noFill/>
+        </p:spPr>
+        <p:txBody>
+          <a:bodyPr wrap="square">
+            <a:spAutoFit/>
+          </a:bodyPr>
+          <a:lstStyle/>
+          <a:p>
+            <a:pPr algn="l"/>
+            <a:r>
+              <a:rPr sz="1300" b="0" i="0">
+                <a:solidFill>
+                  <a:srgbClr val="5C5852"/>
+                </a:solidFill>
+              </a:rPr>
+              <a:t>hrms-alarm-simulation-error-rate · ALARM state · 6 deliberate errors fired</a:t>
+            </a:r>
+          </a:p>
+        </p:txBody>
+      </p:sp>
+      <p:sp>
+        <p:nvSpPr>
+          <p:cNvPr id="12" name="Rectangle 11"/>
+          <p:cNvSpPr/>
+          <p:nvPr/>
+        </p:nvSpPr>
+        <p:spPr>
+          <a:xfrm>
+            <a:off x="502920" y="1664208"/>
+            <a:ext cx="11155680" cy="12700"/>
+          </a:xfrm>
+          <a:prstGeom prst="rect">
+            <a:avLst/>
+          </a:prstGeom>
+          <a:solidFill>
+            <a:srgbClr val="E8E5DE"/>
+          </a:solidFill>
+          <a:ln>
+            <a:noFill/>
+          </a:ln>
+        </p:spPr>
+        <p:style>
+          <a:lnRef idx="1">
+            <a:schemeClr val="accent1"/>
+          </a:lnRef>
+          <a:fillRef idx="3">
+            <a:schemeClr val="accent1"/>
+          </a:fillRef>
+          <a:effectRef idx="2">
+            <a:schemeClr val="accent1"/>
+          </a:effectRef>
+          <a:fontRef idx="minor">
+            <a:schemeClr val="lt1"/>
+          </a:fontRef>
+        </p:style>
+        <p:txBody>
+          <a:bodyPr rtlCol="0" anchor="ctr"/>
+          <a:lstStyle/>
+          <a:p>
+            <a:pPr algn="ctr"/>
+          </a:p>
+        </p:txBody>
+      </p:sp>
+      <p:pic>
+        <p:nvPicPr>
+          <p:cNvPr id="13" name="Picture 12" descr="alarm.png"/>
+          <p:cNvPicPr>
+            <a:picLocks noChangeAspect="1"/>
+          </p:cNvPicPr>
+          <p:nvPr/>
+        </p:nvPicPr>
+        <p:blipFill>
+          <a:blip r:embed="rId2"/>
+          <a:stretch>
+            <a:fillRect/>
+          </a:stretch>
+        </p:blipFill>
+        <p:spPr>
+          <a:xfrm>
+            <a:off x="502920" y="1783080"/>
+            <a:ext cx="11155680" cy="4663440"/>
+          </a:xfrm>
+          <a:prstGeom prst="rect">
+            <a:avLst/>
+          </a:prstGeom>
+        </p:spPr>
+      </p:pic>
+      <p:sp>
+        <p:nvSpPr>
+          <p:cNvPr id="14" name="Rectangle 13"/>
+          <p:cNvSpPr/>
+          <p:nvPr/>
+        </p:nvSpPr>
+        <p:spPr>
+          <a:xfrm>
+            <a:off x="502920" y="6473952"/>
+            <a:ext cx="11155680" cy="274320"/>
+          </a:xfrm>
+          <a:prstGeom prst="rect">
+            <a:avLst/>
+          </a:prstGeom>
+          <a:solidFill>
+            <a:srgbClr val="FBF0EE"/>
+          </a:solidFill>
+          <a:ln>
+            <a:noFill/>
+          </a:ln>
+        </p:spPr>
+        <p:style>
+          <a:lnRef idx="1">
+            <a:schemeClr val="accent1"/>
+          </a:lnRef>
+          <a:fillRef idx="3">
+            <a:schemeClr val="accent1"/>
+          </a:fillRef>
+          <a:effectRef idx="2">
+            <a:schemeClr val="accent1"/>
+          </a:effectRef>
+          <a:fontRef idx="minor">
+            <a:schemeClr val="lt1"/>
+          </a:fontRef>
+        </p:style>
+        <p:txBody>
+          <a:bodyPr rtlCol="0" anchor="ctr"/>
+          <a:lstStyle/>
+          <a:p>
+            <a:pPr algn="ctr"/>
+          </a:p>
+        </p:txBody>
+      </p:sp>
+      <p:sp>
+        <p:nvSpPr>
+          <p:cNvPr id="15" name="TextBox 14"/>
+          <p:cNvSpPr txBox="1"/>
+          <p:nvPr/>
+        </p:nvSpPr>
+        <p:spPr>
+          <a:xfrm>
+            <a:off x="658368" y="6492240"/>
+            <a:ext cx="10972800" cy="237744"/>
+          </a:xfrm>
+          <a:prstGeom prst="rect">
+            <a:avLst/>
+          </a:prstGeom>
+          <a:noFill/>
+        </p:spPr>
+        <p:txBody>
+          <a:bodyPr wrap="square">
+            <a:spAutoFit/>
+          </a:bodyPr>
+          <a:lstStyle/>
+          <a:p>
+            <a:pPr algn="l"/>
+            <a:r>
+              <a:rPr sz="950" b="0" i="1">
+                <a:solidFill>
+                  <a:srgbClr val="C25042"/>
+                </a:solidFill>
+              </a:rPr>
+              <a:t>Alarm triggered at 21:30 IST · 6 errors &gt; threshold of 1 · state: OK → ALARM · SNS email dispatched automatically</a:t>
+            </a:r>
+          </a:p>
+        </p:txBody>
+      </p:sp>
+    </p:spTree>
+  </p:cSld>
+  <p:clrMapOvr>
+    <a:masterClrMapping/>
+  </p:clrMapOvr>
+</p:sld>
+</file>
+
+<file path=ppt/slides/slide16.xml><?xml version="1.0" encoding="utf-8"?>
+<p:sld xmlns:a="http://schemas.openxmlformats.org/drawingml/2006/main" xmlns:p="http://schemas.openxmlformats.org/presentationml/2006/main" xmlns:r="http://schemas.openxmlformats.org/officeDocument/2006/relationships">
+  <p:cSld>
+    <p:spTree>
+      <p:nvGrpSpPr>
+        <p:cNvPr id="1" name=""/>
+        <p:cNvGrpSpPr/>
+        <p:nvPr/>
+      </p:nvGrpSpPr>
+      <p:grpSpPr/>
+      <p:sp>
+        <p:nvSpPr>
+          <p:cNvPr id="2" name="Rectangle 1"/>
+          <p:cNvSpPr/>
+          <p:nvPr/>
+        </p:nvSpPr>
+        <p:spPr>
+          <a:xfrm>
+            <a:off x="0" y="0"/>
+            <a:ext cx="12188952" cy="6858000"/>
+          </a:xfrm>
+          <a:prstGeom prst="rect">
+            <a:avLst/>
+          </a:prstGeom>
+          <a:solidFill>
+            <a:srgbClr val="F7F6F3"/>
+          </a:solidFill>
+          <a:ln>
+            <a:noFill/>
+          </a:ln>
+        </p:spPr>
+        <p:style>
+          <a:lnRef idx="1">
+            <a:schemeClr val="accent1"/>
+          </a:lnRef>
+          <a:fillRef idx="3">
+            <a:schemeClr val="accent1"/>
+          </a:fillRef>
+          <a:effectRef idx="2">
+            <a:schemeClr val="accent1"/>
+          </a:effectRef>
+          <a:fontRef idx="minor">
+            <a:schemeClr val="lt1"/>
+          </a:fontRef>
+        </p:style>
+        <p:txBody>
+          <a:bodyPr rtlCol="0" anchor="ctr"/>
+          <a:lstStyle/>
+          <a:p>
+            <a:pPr algn="ctr"/>
+          </a:p>
+        </p:txBody>
+      </p:sp>
+      <p:sp>
+        <p:nvSpPr>
+          <p:cNvPr id="3" name="Rectangle 2"/>
+          <p:cNvSpPr/>
+          <p:nvPr/>
+        </p:nvSpPr>
+        <p:spPr>
+          <a:xfrm>
+            <a:off x="0" y="0"/>
+            <a:ext cx="36576" cy="6858000"/>
+          </a:xfrm>
+          <a:prstGeom prst="rect">
+            <a:avLst/>
+          </a:prstGeom>
+          <a:solidFill>
+            <a:srgbClr val="C97B2E"/>
+          </a:solidFill>
+          <a:ln>
+            <a:noFill/>
+          </a:ln>
+        </p:spPr>
+        <p:style>
+          <a:lnRef idx="1">
+            <a:schemeClr val="accent1"/>
+          </a:lnRef>
+          <a:fillRef idx="3">
+            <a:schemeClr val="accent1"/>
+          </a:fillRef>
+          <a:effectRef idx="2">
+            <a:schemeClr val="accent1"/>
+          </a:effectRef>
+          <a:fontRef idx="minor">
+            <a:schemeClr val="lt1"/>
+          </a:fontRef>
+        </p:style>
+        <p:txBody>
+          <a:bodyPr rtlCol="0" anchor="ctr"/>
+          <a:lstStyle/>
+          <a:p>
+            <a:pPr algn="ctr"/>
+          </a:p>
+        </p:txBody>
+      </p:sp>
+      <p:sp>
+        <p:nvSpPr>
+          <p:cNvPr id="4" name="Rectangle 3"/>
+          <p:cNvSpPr/>
+          <p:nvPr/>
+        </p:nvSpPr>
+        <p:spPr>
+          <a:xfrm>
+            <a:off x="502920" y="292608"/>
+            <a:ext cx="274320" cy="274320"/>
+          </a:xfrm>
+          <a:prstGeom prst="rect">
+            <a:avLst/>
+          </a:prstGeom>
+          <a:solidFill>
+            <a:srgbClr val="4A7C6B"/>
+          </a:solidFill>
+          <a:ln>
+            <a:noFill/>
+          </a:ln>
+        </p:spPr>
+        <p:style>
+          <a:lnRef idx="1">
+            <a:schemeClr val="accent1"/>
+          </a:lnRef>
+          <a:fillRef idx="3">
+            <a:schemeClr val="accent1"/>
+          </a:fillRef>
+          <a:effectRef idx="2">
+            <a:schemeClr val="accent1"/>
+          </a:effectRef>
+          <a:fontRef idx="minor">
+            <a:schemeClr val="lt1"/>
+          </a:fontRef>
+        </p:style>
+        <p:txBody>
+          <a:bodyPr rtlCol="0" anchor="ctr"/>
+          <a:lstStyle/>
+          <a:p>
+            <a:pPr algn="ctr"/>
+          </a:p>
+        </p:txBody>
+      </p:sp>
+      <p:sp>
+        <p:nvSpPr>
+          <p:cNvPr id="5" name="Rectangle 4"/>
+          <p:cNvSpPr/>
+          <p:nvPr/>
+        </p:nvSpPr>
+        <p:spPr>
+          <a:xfrm>
+            <a:off x="563270" y="352958"/>
+            <a:ext cx="153619" cy="153619"/>
+          </a:xfrm>
+          <a:prstGeom prst="rect">
+            <a:avLst/>
+          </a:prstGeom>
+          <a:solidFill>
+            <a:srgbClr val="EBF3EF"/>
+          </a:solidFill>
+          <a:ln>
+            <a:noFill/>
+          </a:ln>
+        </p:spPr>
+        <p:style>
+          <a:lnRef idx="1">
+            <a:schemeClr val="accent1"/>
+          </a:lnRef>
+          <a:fillRef idx="3">
+            <a:schemeClr val="accent1"/>
+          </a:fillRef>
+          <a:effectRef idx="2">
+            <a:schemeClr val="accent1"/>
+          </a:effectRef>
+          <a:fontRef idx="minor">
+            <a:schemeClr val="lt1"/>
+          </a:fontRef>
+        </p:style>
+        <p:txBody>
+          <a:bodyPr rtlCol="0" anchor="ctr"/>
+          <a:lstStyle/>
+          <a:p>
+            <a:pPr algn="ctr"/>
+          </a:p>
+        </p:txBody>
+      </p:sp>
+      <p:sp>
+        <p:nvSpPr>
+          <p:cNvPr id="6" name="TextBox 5"/>
+          <p:cNvSpPr txBox="1"/>
+          <p:nvPr/>
+        </p:nvSpPr>
+        <p:spPr>
+          <a:xfrm>
+            <a:off x="868680" y="292608"/>
+            <a:ext cx="2743200" cy="274320"/>
+          </a:xfrm>
+          <a:prstGeom prst="rect">
+            <a:avLst/>
+          </a:prstGeom>
+          <a:noFill/>
+        </p:spPr>
+        <p:txBody>
+          <a:bodyPr wrap="square">
+            <a:spAutoFit/>
+          </a:bodyPr>
+          <a:lstStyle/>
+          <a:p>
+            <a:pPr algn="l"/>
+            <a:r>
+              <a:rPr sz="1100" b="1" i="0">
+                <a:solidFill>
+                  <a:srgbClr val="1C1A17"/>
+                </a:solidFill>
+              </a:rPr>
+              <a:t>OnboardIQ</a:t>
+            </a:r>
+          </a:p>
+        </p:txBody>
+      </p:sp>
+      <p:sp>
+        <p:nvSpPr>
+          <p:cNvPr id="7" name="Rectangle 6"/>
+          <p:cNvSpPr/>
+          <p:nvPr/>
+        </p:nvSpPr>
+        <p:spPr>
+          <a:xfrm>
+            <a:off x="10515600" y="246888"/>
+            <a:ext cx="1170432" cy="256032"/>
+          </a:xfrm>
+          <a:prstGeom prst="rect">
+            <a:avLst/>
+          </a:prstGeom>
+          <a:solidFill>
+            <a:srgbClr val="FDF3E5"/>
+          </a:solidFill>
+          <a:ln>
+            <a:noFill/>
+          </a:ln>
+        </p:spPr>
+        <p:style>
+          <a:lnRef idx="1">
+            <a:schemeClr val="accent1"/>
+          </a:lnRef>
+          <a:fillRef idx="3">
+            <a:schemeClr val="accent1"/>
+          </a:fillRef>
+          <a:effectRef idx="2">
+            <a:schemeClr val="accent1"/>
+          </a:effectRef>
+          <a:fontRef idx="minor">
+            <a:schemeClr val="lt1"/>
+          </a:fontRef>
+        </p:style>
+        <p:txBody>
+          <a:bodyPr rtlCol="0" anchor="ctr"/>
+          <a:lstStyle/>
+          <a:p>
+            <a:pPr algn="ctr"/>
+          </a:p>
+        </p:txBody>
+      </p:sp>
+      <p:sp>
+        <p:nvSpPr>
+          <p:cNvPr id="8" name="TextBox 7"/>
+          <p:cNvSpPr txBox="1"/>
+          <p:nvPr/>
+        </p:nvSpPr>
+        <p:spPr>
+          <a:xfrm>
+            <a:off x="10515600" y="246888"/>
+            <a:ext cx="1170432" cy="256032"/>
+          </a:xfrm>
+          <a:prstGeom prst="rect">
+            <a:avLst/>
+          </a:prstGeom>
+          <a:noFill/>
+        </p:spPr>
+        <p:txBody>
+          <a:bodyPr wrap="square">
+            <a:spAutoFit/>
+          </a:bodyPr>
+          <a:lstStyle/>
+          <a:p>
+            <a:pPr algn="ctr"/>
+            <a:r>
+              <a:rPr sz="900" b="1" i="0">
+                <a:solidFill>
+                  <a:srgbClr val="C97B2E"/>
+                </a:solidFill>
+              </a:rPr>
+              <a:t>ALERT EMAIL</a:t>
+            </a:r>
+          </a:p>
+        </p:txBody>
+      </p:sp>
+      <p:sp>
+        <p:nvSpPr>
+          <p:cNvPr id="9" name="Rectangle 8"/>
+          <p:cNvSpPr/>
+          <p:nvPr/>
+        </p:nvSpPr>
+        <p:spPr>
+          <a:xfrm>
+            <a:off x="502920" y="658368"/>
+            <a:ext cx="11155680" cy="12700"/>
+          </a:xfrm>
+          <a:prstGeom prst="rect">
+            <a:avLst/>
+          </a:prstGeom>
+          <a:solidFill>
+            <a:srgbClr val="E8E5DE"/>
+          </a:solidFill>
+          <a:ln>
+            <a:noFill/>
+          </a:ln>
+        </p:spPr>
+        <p:style>
+          <a:lnRef idx="1">
+            <a:schemeClr val="accent1"/>
+          </a:lnRef>
+          <a:fillRef idx="3">
+            <a:schemeClr val="accent1"/>
+          </a:fillRef>
+          <a:effectRef idx="2">
+            <a:schemeClr val="accent1"/>
+          </a:effectRef>
+          <a:fontRef idx="minor">
+            <a:schemeClr val="lt1"/>
+          </a:fontRef>
+        </p:style>
+        <p:txBody>
+          <a:bodyPr rtlCol="0" anchor="ctr"/>
+          <a:lstStyle/>
+          <a:p>
+            <a:pPr algn="ctr"/>
+          </a:p>
+        </p:txBody>
+      </p:sp>
+      <p:sp>
+        <p:nvSpPr>
+          <p:cNvPr id="10" name="TextBox 9"/>
+          <p:cNvSpPr txBox="1"/>
+          <p:nvPr/>
+        </p:nvSpPr>
+        <p:spPr>
+          <a:xfrm>
+            <a:off x="502920" y="777240"/>
+            <a:ext cx="9144000" cy="594360"/>
+          </a:xfrm>
+          <a:prstGeom prst="rect">
+            <a:avLst/>
+          </a:prstGeom>
+          <a:noFill/>
+        </p:spPr>
+        <p:txBody>
+          <a:bodyPr wrap="square">
+            <a:spAutoFit/>
+          </a:bodyPr>
+          <a:lstStyle/>
+          <a:p>
+            <a:pPr algn="l"/>
+            <a:r>
+              <a:rPr sz="2800" b="1" i="0">
+                <a:solidFill>
+                  <a:srgbClr val="1C1A17"/>
+                </a:solidFill>
+              </a:rPr>
+              <a:t>SNS Alarm Email — Received</a:t>
+            </a:r>
+          </a:p>
+        </p:txBody>
+      </p:sp>
+      <p:sp>
+        <p:nvSpPr>
+          <p:cNvPr id="11" name="TextBox 10"/>
+          <p:cNvSpPr txBox="1"/>
+          <p:nvPr/>
+        </p:nvSpPr>
+        <p:spPr>
+          <a:xfrm>
+            <a:off x="502920" y="1325880"/>
+            <a:ext cx="10058400" cy="320040"/>
+          </a:xfrm>
+          <a:prstGeom prst="rect">
+            <a:avLst/>
+          </a:prstGeom>
+          <a:noFill/>
+        </p:spPr>
+        <p:txBody>
+          <a:bodyPr wrap="square">
+            <a:spAutoFit/>
+          </a:bodyPr>
+          <a:lstStyle/>
+          <a:p>
+            <a:pPr algn="l"/>
+            <a:r>
+              <a:rPr sz="1300" b="0" i="0">
+                <a:solidFill>
+                  <a:srgbClr val="5C5852"/>
+                </a:solidFill>
+              </a:rPr>
+              <a:t>AWS CloudWatch → SNS → adilk81054@gmail.com · state change OK → ALARM</a:t>
+            </a:r>
+          </a:p>
+        </p:txBody>
+      </p:sp>
+      <p:sp>
+        <p:nvSpPr>
+          <p:cNvPr id="12" name="Rectangle 11"/>
+          <p:cNvSpPr/>
+          <p:nvPr/>
+        </p:nvSpPr>
+        <p:spPr>
+          <a:xfrm>
+            <a:off x="502920" y="1664208"/>
+            <a:ext cx="11155680" cy="12700"/>
+          </a:xfrm>
+          <a:prstGeom prst="rect">
+            <a:avLst/>
+          </a:prstGeom>
+          <a:solidFill>
+            <a:srgbClr val="E8E5DE"/>
+          </a:solidFill>
+          <a:ln>
+            <a:noFill/>
+          </a:ln>
+        </p:spPr>
+        <p:style>
+          <a:lnRef idx="1">
+            <a:schemeClr val="accent1"/>
+          </a:lnRef>
+          <a:fillRef idx="3">
+            <a:schemeClr val="accent1"/>
+          </a:fillRef>
+          <a:effectRef idx="2">
+            <a:schemeClr val="accent1"/>
+          </a:effectRef>
+          <a:fontRef idx="minor">
+            <a:schemeClr val="lt1"/>
+          </a:fontRef>
+        </p:style>
+        <p:txBody>
+          <a:bodyPr rtlCol="0" anchor="ctr"/>
+          <a:lstStyle/>
+          <a:p>
+            <a:pPr algn="ctr"/>
+          </a:p>
+        </p:txBody>
+      </p:sp>
+      <p:pic>
+        <p:nvPicPr>
+          <p:cNvPr id="13" name="Picture 12" descr="email.png"/>
+          <p:cNvPicPr>
+            <a:picLocks noChangeAspect="1"/>
+          </p:cNvPicPr>
+          <p:nvPr/>
+        </p:nvPicPr>
+        <p:blipFill>
+          <a:blip r:embed="rId2"/>
+          <a:stretch>
+            <a:fillRect/>
+          </a:stretch>
+        </p:blipFill>
+        <p:spPr>
+          <a:xfrm>
+            <a:off x="502920" y="1783080"/>
+            <a:ext cx="11155680" cy="4663440"/>
+          </a:xfrm>
+          <a:prstGeom prst="rect">
+            <a:avLst/>
+          </a:prstGeom>
+        </p:spPr>
+      </p:pic>
+      <p:sp>
+        <p:nvSpPr>
+          <p:cNvPr id="14" name="Rectangle 13"/>
+          <p:cNvSpPr/>
+          <p:nvPr/>
+        </p:nvSpPr>
+        <p:spPr>
+          <a:xfrm>
+            <a:off x="502920" y="6473952"/>
+            <a:ext cx="11155680" cy="274320"/>
+          </a:xfrm>
+          <a:prstGeom prst="rect">
+            <a:avLst/>
+          </a:prstGeom>
+          <a:solidFill>
+            <a:srgbClr val="FDF3E5"/>
+          </a:solidFill>
+          <a:ln>
+            <a:noFill/>
+          </a:ln>
+        </p:spPr>
+        <p:style>
+          <a:lnRef idx="1">
+            <a:schemeClr val="accent1"/>
+          </a:lnRef>
+          <a:fillRef idx="3">
+            <a:schemeClr val="accent1"/>
+          </a:fillRef>
+          <a:effectRef idx="2">
+            <a:schemeClr val="accent1"/>
+          </a:effectRef>
+          <a:fontRef idx="minor">
+            <a:schemeClr val="lt1"/>
+          </a:fontRef>
+        </p:style>
+        <p:txBody>
+          <a:bodyPr rtlCol="0" anchor="ctr"/>
+          <a:lstStyle/>
+          <a:p>
+            <a:pPr algn="ctr"/>
+          </a:p>
+        </p:txBody>
+      </p:sp>
+      <p:sp>
+        <p:nvSpPr>
+          <p:cNvPr id="15" name="TextBox 14"/>
+          <p:cNvSpPr txBox="1"/>
+          <p:nvPr/>
+        </p:nvSpPr>
+        <p:spPr>
+          <a:xfrm>
+            <a:off x="658368" y="6492240"/>
+            <a:ext cx="10972800" cy="237744"/>
+          </a:xfrm>
+          <a:prstGeom prst="rect">
+            <a:avLst/>
+          </a:prstGeom>
+          <a:noFill/>
+        </p:spPr>
+        <p:txBody>
+          <a:bodyPr wrap="square">
+            <a:spAutoFit/>
+          </a:bodyPr>
+          <a:lstStyle/>
+          <a:p>
+            <a:pPr algn="l"/>
+            <a:r>
+              <a:rPr sz="950" b="0" i="1">
+                <a:solidFill>
+                  <a:srgbClr val="C97B2E"/>
+                </a:solidFill>
+              </a:rPr>
+              <a:t>Email received at 16:24:21 UTC · Alarm: hrms-alarm-simulation-error-rate · SNS Topic: hrms-hr-notifications · Account: 736786104206</a:t>
+            </a:r>
+          </a:p>
+        </p:txBody>
+      </p:sp>
+    </p:spTree>
+  </p:cSld>
+  <p:clrMapOvr>
+    <a:masterClrMapping/>
+  </p:clrMapOvr>
+</p:sld>
+</file>
+
+<file path=ppt/slides/slide17.xml><?xml version="1.0" encoding="utf-8"?>
+<p:sld xmlns:a="http://schemas.openxmlformats.org/drawingml/2006/main" xmlns:p="http://schemas.openxmlformats.org/presentationml/2006/main" xmlns:r="http://schemas.openxmlformats.org/officeDocument/2006/relationships">
+  <p:cSld>
+    <p:spTree>
+      <p:nvGrpSpPr>
+        <p:cNvPr id="1" name=""/>
+        <p:cNvGrpSpPr/>
+        <p:nvPr/>
+      </p:nvGrpSpPr>
+      <p:grpSpPr/>
+      <p:sp>
+        <p:nvSpPr>
+          <p:cNvPr id="2" name="Rectangle 1"/>
+          <p:cNvSpPr/>
+          <p:nvPr/>
+        </p:nvSpPr>
+        <p:spPr>
+          <a:xfrm>
+            <a:off x="0" y="0"/>
+            <a:ext cx="12188952" cy="6858000"/>
+          </a:xfrm>
+          <a:prstGeom prst="rect">
+            <a:avLst/>
+          </a:prstGeom>
+          <a:solidFill>
+            <a:srgbClr val="F7F6F3"/>
+          </a:solidFill>
+          <a:ln>
+            <a:noFill/>
+          </a:ln>
+        </p:spPr>
+        <p:style>
+          <a:lnRef idx="1">
+            <a:schemeClr val="accent1"/>
+          </a:lnRef>
+          <a:fillRef idx="3">
+            <a:schemeClr val="accent1"/>
+          </a:fillRef>
+          <a:effectRef idx="2">
+            <a:schemeClr val="accent1"/>
+          </a:effectRef>
+          <a:fontRef idx="minor">
+            <a:schemeClr val="lt1"/>
+          </a:fontRef>
+        </p:style>
+        <p:txBody>
+          <a:bodyPr rtlCol="0" anchor="ctr"/>
+          <a:lstStyle/>
+          <a:p>
+            <a:pPr algn="ctr"/>
+          </a:p>
+        </p:txBody>
+      </p:sp>
+      <p:sp>
+        <p:nvSpPr>
+          <p:cNvPr id="3" name="Rectangle 2"/>
+          <p:cNvSpPr/>
+          <p:nvPr/>
+        </p:nvSpPr>
+        <p:spPr>
+          <a:xfrm>
+            <a:off x="0" y="0"/>
+            <a:ext cx="36576" cy="6858000"/>
+          </a:xfrm>
+          <a:prstGeom prst="rect">
+            <a:avLst/>
+          </a:prstGeom>
+          <a:solidFill>
+            <a:srgbClr val="4A7C6B"/>
+          </a:solidFill>
+          <a:ln>
+            <a:noFill/>
+          </a:ln>
+        </p:spPr>
+        <p:style>
+          <a:lnRef idx="1">
+            <a:schemeClr val="accent1"/>
+          </a:lnRef>
+          <a:fillRef idx="3">
+            <a:schemeClr val="accent1"/>
+          </a:fillRef>
+          <a:effectRef idx="2">
+            <a:schemeClr val="accent1"/>
+          </a:effectRef>
+          <a:fontRef idx="minor">
+            <a:schemeClr val="lt1"/>
+          </a:fontRef>
+        </p:style>
+        <p:txBody>
+          <a:bodyPr rtlCol="0" anchor="ctr"/>
+          <a:lstStyle/>
+          <a:p>
+            <a:pPr algn="ctr"/>
+          </a:p>
+        </p:txBody>
+      </p:sp>
+      <p:sp>
+        <p:nvSpPr>
+          <p:cNvPr id="4" name="Rectangle 3"/>
+          <p:cNvSpPr/>
+          <p:nvPr/>
+        </p:nvSpPr>
+        <p:spPr>
+          <a:xfrm>
+            <a:off x="502920" y="292608"/>
+            <a:ext cx="274320" cy="274320"/>
+          </a:xfrm>
+          <a:prstGeom prst="rect">
+            <a:avLst/>
+          </a:prstGeom>
+          <a:solidFill>
+            <a:srgbClr val="4A7C6B"/>
+          </a:solidFill>
+          <a:ln>
+            <a:noFill/>
+          </a:ln>
+        </p:spPr>
+        <p:style>
+          <a:lnRef idx="1">
+            <a:schemeClr val="accent1"/>
+          </a:lnRef>
+          <a:fillRef idx="3">
+            <a:schemeClr val="accent1"/>
+          </a:fillRef>
+          <a:effectRef idx="2">
+            <a:schemeClr val="accent1"/>
+          </a:effectRef>
+          <a:fontRef idx="minor">
+            <a:schemeClr val="lt1"/>
+          </a:fontRef>
+        </p:style>
+        <p:txBody>
+          <a:bodyPr rtlCol="0" anchor="ctr"/>
+          <a:lstStyle/>
+          <a:p>
+            <a:pPr algn="ctr"/>
+          </a:p>
+        </p:txBody>
+      </p:sp>
+      <p:sp>
+        <p:nvSpPr>
+          <p:cNvPr id="5" name="Rectangle 4"/>
+          <p:cNvSpPr/>
+          <p:nvPr/>
+        </p:nvSpPr>
+        <p:spPr>
+          <a:xfrm>
+            <a:off x="563270" y="352958"/>
+            <a:ext cx="153619" cy="153619"/>
+          </a:xfrm>
+          <a:prstGeom prst="rect">
+            <a:avLst/>
+          </a:prstGeom>
+          <a:solidFill>
+            <a:srgbClr val="EBF3EF"/>
+          </a:solidFill>
+          <a:ln>
+            <a:noFill/>
+          </a:ln>
+        </p:spPr>
+        <p:style>
+          <a:lnRef idx="1">
+            <a:schemeClr val="accent1"/>
+          </a:lnRef>
+          <a:fillRef idx="3">
+            <a:schemeClr val="accent1"/>
+          </a:fillRef>
+          <a:effectRef idx="2">
+            <a:schemeClr val="accent1"/>
+          </a:effectRef>
+          <a:fontRef idx="minor">
+            <a:schemeClr val="lt1"/>
+          </a:fontRef>
+        </p:style>
+        <p:txBody>
+          <a:bodyPr rtlCol="0" anchor="ctr"/>
+          <a:lstStyle/>
+          <a:p>
+            <a:pPr algn="ctr"/>
+          </a:p>
+        </p:txBody>
+      </p:sp>
+      <p:sp>
+        <p:nvSpPr>
+          <p:cNvPr id="6" name="TextBox 5"/>
+          <p:cNvSpPr txBox="1"/>
+          <p:nvPr/>
+        </p:nvSpPr>
+        <p:spPr>
+          <a:xfrm>
+            <a:off x="868680" y="292608"/>
+            <a:ext cx="2743200" cy="274320"/>
+          </a:xfrm>
+          <a:prstGeom prst="rect">
+            <a:avLst/>
+          </a:prstGeom>
+          <a:noFill/>
+        </p:spPr>
+        <p:txBody>
+          <a:bodyPr wrap="square">
+            <a:spAutoFit/>
+          </a:bodyPr>
+          <a:lstStyle/>
+          <a:p>
+            <a:pPr algn="l"/>
+            <a:r>
+              <a:rPr sz="1100" b="1" i="0">
+                <a:solidFill>
+                  <a:srgbClr val="1C1A17"/>
+                </a:solidFill>
+              </a:rPr>
+              <a:t>OnboardIQ</a:t>
+            </a:r>
+          </a:p>
+        </p:txBody>
+      </p:sp>
+      <p:sp>
+        <p:nvSpPr>
+          <p:cNvPr id="7" name="Rectangle 6"/>
+          <p:cNvSpPr/>
+          <p:nvPr/>
+        </p:nvSpPr>
+        <p:spPr>
+          <a:xfrm>
+            <a:off x="10515600" y="246888"/>
+            <a:ext cx="1170432" cy="256032"/>
+          </a:xfrm>
+          <a:prstGeom prst="rect">
+            <a:avLst/>
+          </a:prstGeom>
+          <a:solidFill>
+            <a:srgbClr val="EBF3EF"/>
+          </a:solidFill>
+          <a:ln>
+            <a:noFill/>
+          </a:ln>
+        </p:spPr>
+        <p:style>
+          <a:lnRef idx="1">
+            <a:schemeClr val="accent1"/>
+          </a:lnRef>
+          <a:fillRef idx="3">
+            <a:schemeClr val="accent1"/>
+          </a:fillRef>
+          <a:effectRef idx="2">
+            <a:schemeClr val="accent1"/>
+          </a:effectRef>
+          <a:fontRef idx="minor">
+            <a:schemeClr val="lt1"/>
+          </a:fontRef>
+        </p:style>
+        <p:txBody>
+          <a:bodyPr rtlCol="0" anchor="ctr"/>
+          <a:lstStyle/>
+          <a:p>
+            <a:pPr algn="ctr"/>
+          </a:p>
+        </p:txBody>
+      </p:sp>
+      <p:sp>
+        <p:nvSpPr>
+          <p:cNvPr id="8" name="TextBox 7"/>
+          <p:cNvSpPr txBox="1"/>
+          <p:nvPr/>
+        </p:nvSpPr>
+        <p:spPr>
+          <a:xfrm>
+            <a:off x="10515600" y="246888"/>
+            <a:ext cx="1170432" cy="256032"/>
+          </a:xfrm>
+          <a:prstGeom prst="rect">
+            <a:avLst/>
+          </a:prstGeom>
+          <a:noFill/>
+        </p:spPr>
+        <p:txBody>
+          <a:bodyPr wrap="square">
+            <a:spAutoFit/>
+          </a:bodyPr>
+          <a:lstStyle/>
+          <a:p>
+            <a:pPr algn="ctr"/>
+            <a:r>
+              <a:rPr sz="900" b="1" i="0">
+                <a:solidFill>
+                  <a:srgbClr val="4A7C6B"/>
+                </a:solidFill>
+              </a:rPr>
+              <a:t>SECURITY</a:t>
+            </a:r>
+          </a:p>
+        </p:txBody>
+      </p:sp>
+      <p:sp>
+        <p:nvSpPr>
+          <p:cNvPr id="9" name="Rectangle 8"/>
+          <p:cNvSpPr/>
+          <p:nvPr/>
+        </p:nvSpPr>
+        <p:spPr>
+          <a:xfrm>
+            <a:off x="502920" y="658368"/>
+            <a:ext cx="11155680" cy="12700"/>
+          </a:xfrm>
+          <a:prstGeom prst="rect">
+            <a:avLst/>
+          </a:prstGeom>
+          <a:solidFill>
+            <a:srgbClr val="E8E5DE"/>
+          </a:solidFill>
+          <a:ln>
+            <a:noFill/>
+          </a:ln>
+        </p:spPr>
+        <p:style>
+          <a:lnRef idx="1">
+            <a:schemeClr val="accent1"/>
+          </a:lnRef>
+          <a:fillRef idx="3">
+            <a:schemeClr val="accent1"/>
+          </a:fillRef>
+          <a:effectRef idx="2">
+            <a:schemeClr val="accent1"/>
+          </a:effectRef>
+          <a:fontRef idx="minor">
+            <a:schemeClr val="lt1"/>
+          </a:fontRef>
+        </p:style>
+        <p:txBody>
+          <a:bodyPr rtlCol="0" anchor="ctr"/>
+          <a:lstStyle/>
+          <a:p>
+            <a:pPr algn="ctr"/>
+          </a:p>
+        </p:txBody>
+      </p:sp>
+      <p:sp>
+        <p:nvSpPr>
+          <p:cNvPr id="10" name="TextBox 9"/>
+          <p:cNvSpPr txBox="1"/>
+          <p:nvPr/>
+        </p:nvSpPr>
+        <p:spPr>
+          <a:xfrm>
+            <a:off x="502920" y="777240"/>
+            <a:ext cx="9144000" cy="594360"/>
+          </a:xfrm>
+          <a:prstGeom prst="rect">
+            <a:avLst/>
+          </a:prstGeom>
+          <a:noFill/>
+        </p:spPr>
+        <p:txBody>
+          <a:bodyPr wrap="square">
+            <a:spAutoFit/>
+          </a:bodyPr>
+          <a:lstStyle/>
+          <a:p>
+            <a:pPr algn="l"/>
+            <a:r>
+              <a:rPr sz="2800" b="1" i="0">
+                <a:solidFill>
+                  <a:srgbClr val="1C1A17"/>
+                </a:solidFill>
+              </a:rPr>
+              <a:t>AWS Trusted Advisor</a:t>
+            </a:r>
+          </a:p>
+        </p:txBody>
+      </p:sp>
+      <p:sp>
+        <p:nvSpPr>
+          <p:cNvPr id="11" name="TextBox 10"/>
+          <p:cNvSpPr txBox="1"/>
+          <p:nvPr/>
+        </p:nvSpPr>
+        <p:spPr>
+          <a:xfrm>
+            <a:off x="502920" y="1325880"/>
+            <a:ext cx="10058400" cy="320040"/>
+          </a:xfrm>
+          <a:prstGeom prst="rect">
+            <a:avLst/>
+          </a:prstGeom>
+          <a:noFill/>
+        </p:spPr>
+        <p:txBody>
+          <a:bodyPr wrap="square">
+            <a:spAutoFit/>
+          </a:bodyPr>
+          <a:lstStyle/>
+          <a:p>
+            <a:pPr algn="l"/>
+            <a:r>
+              <a:rPr sz="1300" b="0" i="0">
+                <a:solidFill>
+                  <a:srgbClr val="5C5852"/>
+                </a:solidFill>
+              </a:rPr>
+              <a:t>Free checks run — 0 critical findings · all security posture checks passed</a:t>
+            </a:r>
+          </a:p>
+        </p:txBody>
+      </p:sp>
+      <p:sp>
+        <p:nvSpPr>
+          <p:cNvPr id="12" name="Rectangle 11"/>
+          <p:cNvSpPr/>
+          <p:nvPr/>
+        </p:nvSpPr>
+        <p:spPr>
+          <a:xfrm>
+            <a:off x="502920" y="1664208"/>
+            <a:ext cx="11155680" cy="12700"/>
+          </a:xfrm>
+          <a:prstGeom prst="rect">
+            <a:avLst/>
+          </a:prstGeom>
+          <a:solidFill>
+            <a:srgbClr val="E8E5DE"/>
+          </a:solidFill>
+          <a:ln>
+            <a:noFill/>
+          </a:ln>
+        </p:spPr>
+        <p:style>
+          <a:lnRef idx="1">
+            <a:schemeClr val="accent1"/>
+          </a:lnRef>
+          <a:fillRef idx="3">
+            <a:schemeClr val="accent1"/>
+          </a:fillRef>
+          <a:effectRef idx="2">
+            <a:schemeClr val="accent1"/>
+          </a:effectRef>
+          <a:fontRef idx="minor">
+            <a:schemeClr val="lt1"/>
+          </a:fontRef>
+        </p:style>
+        <p:txBody>
+          <a:bodyPr rtlCol="0" anchor="ctr"/>
+          <a:lstStyle/>
+          <a:p>
+            <a:pPr algn="ctr"/>
+          </a:p>
+        </p:txBody>
+      </p:sp>
+      <p:pic>
+        <p:nvPicPr>
+          <p:cNvPr id="13" name="Picture 12" descr="trusted.png"/>
+          <p:cNvPicPr>
+            <a:picLocks noChangeAspect="1"/>
+          </p:cNvPicPr>
+          <p:nvPr/>
+        </p:nvPicPr>
+        <p:blipFill>
+          <a:blip r:embed="rId2"/>
+          <a:stretch>
+            <a:fillRect/>
+          </a:stretch>
+        </p:blipFill>
+        <p:spPr>
+          <a:xfrm>
+            <a:off x="502920" y="1783080"/>
+            <a:ext cx="11155680" cy="4663440"/>
+          </a:xfrm>
+          <a:prstGeom prst="rect">
+            <a:avLst/>
+          </a:prstGeom>
+        </p:spPr>
+      </p:pic>
+      <p:sp>
+        <p:nvSpPr>
+          <p:cNvPr id="14" name="Rectangle 13"/>
+          <p:cNvSpPr/>
+          <p:nvPr/>
+        </p:nvSpPr>
+        <p:spPr>
+          <a:xfrm>
+            <a:off x="502920" y="6473952"/>
+            <a:ext cx="11155680" cy="274320"/>
+          </a:xfrm>
+          <a:prstGeom prst="rect">
+            <a:avLst/>
+          </a:prstGeom>
+          <a:solidFill>
+            <a:srgbClr val="EBF3EF"/>
+          </a:solidFill>
+          <a:ln>
+            <a:noFill/>
+          </a:ln>
+        </p:spPr>
+        <p:style>
+          <a:lnRef idx="1">
+            <a:schemeClr val="accent1"/>
+          </a:lnRef>
+          <a:fillRef idx="3">
+            <a:schemeClr val="accent1"/>
+          </a:fillRef>
+          <a:effectRef idx="2">
+            <a:schemeClr val="accent1"/>
+          </a:effectRef>
+          <a:fontRef idx="minor">
+            <a:schemeClr val="lt1"/>
+          </a:fontRef>
+        </p:style>
+        <p:txBody>
+          <a:bodyPr rtlCol="0" anchor="ctr"/>
+          <a:lstStyle/>
+          <a:p>
+            <a:pPr algn="ctr"/>
+          </a:p>
+        </p:txBody>
+      </p:sp>
+      <p:sp>
+        <p:nvSpPr>
+          <p:cNvPr id="15" name="TextBox 14"/>
+          <p:cNvSpPr txBox="1"/>
+          <p:nvPr/>
+        </p:nvSpPr>
+        <p:spPr>
+          <a:xfrm>
+            <a:off x="658368" y="6492240"/>
+            <a:ext cx="10972800" cy="237744"/>
+          </a:xfrm>
+          <a:prstGeom prst="rect">
+            <a:avLst/>
+          </a:prstGeom>
+          <a:noFill/>
+        </p:spPr>
+        <p:txBody>
+          <a:bodyPr wrap="square">
+            <a:spAutoFit/>
+          </a:bodyPr>
+          <a:lstStyle/>
+          <a:p>
+            <a:pPr algn="l"/>
+            <a:r>
+              <a:rPr sz="950" b="0" i="1">
+                <a:solidFill>
+                  <a:srgbClr val="4A7C6B"/>
+                </a:solidFill>
+              </a:rPr>
+              <a:t>Basic support plan: full check suite requires Business/Enterprise plan · S3 public access blocked · DynamoDB SSE enabled · IAM scoped</a:t>
+            </a:r>
+          </a:p>
+        </p:txBody>
+      </p:sp>
+    </p:spTree>
+  </p:cSld>
+  <p:clrMapOvr>
+    <a:masterClrMapping/>
+  </p:clrMapOvr>
+</p:sld>
+</file>
+
+<file path=ppt/slides/slide18.xml><?xml version="1.0" encoding="utf-8"?>
+<p:sld xmlns:a="http://schemas.openxmlformats.org/drawingml/2006/main" xmlns:p="http://schemas.openxmlformats.org/presentationml/2006/main" xmlns:r="http://schemas.openxmlformats.org/officeDocument/2006/relationships">
+  <p:cSld>
+    <p:spTree>
+      <p:nvGrpSpPr>
+        <p:cNvPr id="1" name=""/>
+        <p:cNvGrpSpPr/>
+        <p:nvPr/>
+      </p:nvGrpSpPr>
+      <p:grpSpPr/>
+      <p:sp>
+        <p:nvSpPr>
+          <p:cNvPr id="2" name="Rectangle 1"/>
+          <p:cNvSpPr/>
+          <p:nvPr/>
+        </p:nvSpPr>
+        <p:spPr>
+          <a:xfrm>
+            <a:off x="0" y="0"/>
+            <a:ext cx="12188952" cy="6858000"/>
+          </a:xfrm>
+          <a:prstGeom prst="rect">
+            <a:avLst/>
+          </a:prstGeom>
+          <a:solidFill>
+            <a:srgbClr val="F7F6F3"/>
+          </a:solidFill>
+          <a:ln>
+            <a:noFill/>
+          </a:ln>
+        </p:spPr>
+        <p:style>
+          <a:lnRef idx="1">
+            <a:schemeClr val="accent1"/>
+          </a:lnRef>
+          <a:fillRef idx="3">
+            <a:schemeClr val="accent1"/>
+          </a:fillRef>
+          <a:effectRef idx="2">
+            <a:schemeClr val="accent1"/>
+          </a:effectRef>
+          <a:fontRef idx="minor">
+            <a:schemeClr val="lt1"/>
+          </a:fontRef>
+        </p:style>
+        <p:txBody>
+          <a:bodyPr rtlCol="0" anchor="ctr"/>
+          <a:lstStyle/>
+          <a:p>
+            <a:pPr algn="ctr"/>
+          </a:p>
+        </p:txBody>
+      </p:sp>
+      <p:sp>
+        <p:nvSpPr>
+          <p:cNvPr id="3" name="Rectangle 2"/>
+          <p:cNvSpPr/>
+          <p:nvPr/>
+        </p:nvSpPr>
+        <p:spPr>
+          <a:xfrm>
+            <a:off x="0" y="0"/>
+            <a:ext cx="36576" cy="6858000"/>
+          </a:xfrm>
+          <a:prstGeom prst="rect">
+            <a:avLst/>
+          </a:prstGeom>
+          <a:solidFill>
+            <a:srgbClr val="C25042"/>
+          </a:solidFill>
+          <a:ln>
+            <a:noFill/>
+          </a:ln>
+        </p:spPr>
+        <p:style>
+          <a:lnRef idx="1">
+            <a:schemeClr val="accent1"/>
+          </a:lnRef>
+          <a:fillRef idx="3">
+            <a:schemeClr val="accent1"/>
+          </a:fillRef>
+          <a:effectRef idx="2">
+            <a:schemeClr val="accent1"/>
+          </a:effectRef>
+          <a:fontRef idx="minor">
+            <a:schemeClr val="lt1"/>
+          </a:fontRef>
+        </p:style>
+        <p:txBody>
+          <a:bodyPr rtlCol="0" anchor="ctr"/>
+          <a:lstStyle/>
+          <a:p>
+            <a:pPr algn="ctr"/>
+          </a:p>
+        </p:txBody>
+      </p:sp>
+      <p:sp>
+        <p:nvSpPr>
+          <p:cNvPr id="4" name="Rectangle 3"/>
+          <p:cNvSpPr/>
+          <p:nvPr/>
+        </p:nvSpPr>
+        <p:spPr>
+          <a:xfrm>
+            <a:off x="502920" y="292608"/>
+            <a:ext cx="274320" cy="274320"/>
+          </a:xfrm>
+          <a:prstGeom prst="rect">
+            <a:avLst/>
+          </a:prstGeom>
+          <a:solidFill>
+            <a:srgbClr val="4A7C6B"/>
+          </a:solidFill>
+          <a:ln>
+            <a:noFill/>
+          </a:ln>
+        </p:spPr>
+        <p:style>
+          <a:lnRef idx="1">
+            <a:schemeClr val="accent1"/>
+          </a:lnRef>
+          <a:fillRef idx="3">
+            <a:schemeClr val="accent1"/>
+          </a:fillRef>
+          <a:effectRef idx="2">
+            <a:schemeClr val="accent1"/>
+          </a:effectRef>
+          <a:fontRef idx="minor">
+            <a:schemeClr val="lt1"/>
+          </a:fontRef>
+        </p:style>
+        <p:txBody>
+          <a:bodyPr rtlCol="0" anchor="ctr"/>
+          <a:lstStyle/>
+          <a:p>
+            <a:pPr algn="ctr"/>
+          </a:p>
+        </p:txBody>
+      </p:sp>
+      <p:sp>
+        <p:nvSpPr>
+          <p:cNvPr id="5" name="Rectangle 4"/>
+          <p:cNvSpPr/>
+          <p:nvPr/>
+        </p:nvSpPr>
+        <p:spPr>
+          <a:xfrm>
+            <a:off x="563270" y="352958"/>
+            <a:ext cx="153619" cy="153619"/>
+          </a:xfrm>
+          <a:prstGeom prst="rect">
+            <a:avLst/>
+          </a:prstGeom>
+          <a:solidFill>
+            <a:srgbClr val="EBF3EF"/>
+          </a:solidFill>
+          <a:ln>
+            <a:noFill/>
+          </a:ln>
+        </p:spPr>
+        <p:style>
+          <a:lnRef idx="1">
+            <a:schemeClr val="accent1"/>
+          </a:lnRef>
+          <a:fillRef idx="3">
+            <a:schemeClr val="accent1"/>
+          </a:fillRef>
+          <a:effectRef idx="2">
+            <a:schemeClr val="accent1"/>
+          </a:effectRef>
+          <a:fontRef idx="minor">
+            <a:schemeClr val="lt1"/>
+          </a:fontRef>
+        </p:style>
+        <p:txBody>
+          <a:bodyPr rtlCol="0" anchor="ctr"/>
+          <a:lstStyle/>
+          <a:p>
+            <a:pPr algn="ctr"/>
+          </a:p>
+        </p:txBody>
+      </p:sp>
+      <p:sp>
+        <p:nvSpPr>
+          <p:cNvPr id="6" name="TextBox 5"/>
+          <p:cNvSpPr txBox="1"/>
+          <p:nvPr/>
+        </p:nvSpPr>
+        <p:spPr>
+          <a:xfrm>
+            <a:off x="868680" y="292608"/>
+            <a:ext cx="2743200" cy="274320"/>
+          </a:xfrm>
+          <a:prstGeom prst="rect">
+            <a:avLst/>
+          </a:prstGeom>
+          <a:noFill/>
+        </p:spPr>
+        <p:txBody>
+          <a:bodyPr wrap="square">
+            <a:spAutoFit/>
+          </a:bodyPr>
+          <a:lstStyle/>
+          <a:p>
+            <a:pPr algn="l"/>
+            <a:r>
+              <a:rPr sz="1100" b="1" i="0">
+                <a:solidFill>
+                  <a:srgbClr val="1C1A17"/>
+                </a:solidFill>
+              </a:rPr>
+              <a:t>OnboardIQ</a:t>
+            </a:r>
+          </a:p>
+        </p:txBody>
+      </p:sp>
+      <p:sp>
+        <p:nvSpPr>
+          <p:cNvPr id="7" name="Rectangle 6"/>
+          <p:cNvSpPr/>
+          <p:nvPr/>
+        </p:nvSpPr>
+        <p:spPr>
+          <a:xfrm>
+            <a:off x="10515600" y="246888"/>
+            <a:ext cx="1170432" cy="256032"/>
+          </a:xfrm>
+          <a:prstGeom prst="rect">
+            <a:avLst/>
+          </a:prstGeom>
+          <a:solidFill>
+            <a:srgbClr val="FBF0EE"/>
+          </a:solidFill>
+          <a:ln>
+            <a:noFill/>
+          </a:ln>
+        </p:spPr>
+        <p:style>
+          <a:lnRef idx="1">
+            <a:schemeClr val="accent1"/>
+          </a:lnRef>
+          <a:fillRef idx="3">
+            <a:schemeClr val="accent1"/>
+          </a:fillRef>
+          <a:effectRef idx="2">
+            <a:schemeClr val="accent1"/>
+          </a:effectRef>
+          <a:fontRef idx="minor">
+            <a:schemeClr val="lt1"/>
+          </a:fontRef>
+        </p:style>
+        <p:txBody>
+          <a:bodyPr rtlCol="0" anchor="ctr"/>
+          <a:lstStyle/>
+          <a:p>
+            <a:pPr algn="ctr"/>
+          </a:p>
+        </p:txBody>
+      </p:sp>
+      <p:sp>
+        <p:nvSpPr>
+          <p:cNvPr id="8" name="TextBox 7"/>
+          <p:cNvSpPr txBox="1"/>
+          <p:nvPr/>
+        </p:nvSpPr>
+        <p:spPr>
+          <a:xfrm>
+            <a:off x="10515600" y="246888"/>
+            <a:ext cx="1170432" cy="256032"/>
+          </a:xfrm>
+          <a:prstGeom prst="rect">
+            <a:avLst/>
+          </a:prstGeom>
+          <a:noFill/>
+        </p:spPr>
+        <p:txBody>
+          <a:bodyPr wrap="square">
+            <a:spAutoFit/>
+          </a:bodyPr>
+          <a:lstStyle/>
+          <a:p>
+            <a:pPr algn="ctr"/>
+            <a:r>
+              <a:rPr sz="900" b="1" i="0">
+                <a:solidFill>
+                  <a:srgbClr val="C25042"/>
+                </a:solidFill>
+              </a:rPr>
+              <a:t>IAM AUDIT</a:t>
+            </a:r>
+          </a:p>
+        </p:txBody>
+      </p:sp>
+      <p:sp>
+        <p:nvSpPr>
+          <p:cNvPr id="9" name="Rectangle 8"/>
+          <p:cNvSpPr/>
+          <p:nvPr/>
+        </p:nvSpPr>
+        <p:spPr>
+          <a:xfrm>
+            <a:off x="502920" y="658368"/>
+            <a:ext cx="11155680" cy="12700"/>
+          </a:xfrm>
+          <a:prstGeom prst="rect">
+            <a:avLst/>
+          </a:prstGeom>
+          <a:solidFill>
+            <a:srgbClr val="E8E5DE"/>
+          </a:solidFill>
+          <a:ln>
+            <a:noFill/>
+          </a:ln>
+        </p:spPr>
+        <p:style>
+          <a:lnRef idx="1">
+            <a:schemeClr val="accent1"/>
+          </a:lnRef>
+          <a:fillRef idx="3">
+            <a:schemeClr val="accent1"/>
+          </a:fillRef>
+          <a:effectRef idx="2">
+            <a:schemeClr val="accent1"/>
+          </a:effectRef>
+          <a:fontRef idx="minor">
+            <a:schemeClr val="lt1"/>
+          </a:fontRef>
+        </p:style>
+        <p:txBody>
+          <a:bodyPr rtlCol="0" anchor="ctr"/>
+          <a:lstStyle/>
+          <a:p>
+            <a:pPr algn="ctr"/>
+          </a:p>
+        </p:txBody>
+      </p:sp>
+      <p:sp>
+        <p:nvSpPr>
+          <p:cNvPr id="10" name="TextBox 9"/>
+          <p:cNvSpPr txBox="1"/>
+          <p:nvPr/>
+        </p:nvSpPr>
+        <p:spPr>
+          <a:xfrm>
+            <a:off x="502920" y="777240"/>
+            <a:ext cx="9144000" cy="594360"/>
+          </a:xfrm>
+          <a:prstGeom prst="rect">
+            <a:avLst/>
+          </a:prstGeom>
+          <a:noFill/>
+        </p:spPr>
+        <p:txBody>
+          <a:bodyPr wrap="square">
+            <a:spAutoFit/>
+          </a:bodyPr>
+          <a:lstStyle/>
+          <a:p>
+            <a:pPr algn="l"/>
+            <a:r>
+              <a:rPr sz="2800" b="1" i="0">
+                <a:solidFill>
+                  <a:srgbClr val="1C1A17"/>
+                </a:solidFill>
+              </a:rPr>
+              <a:t>IAM Security Hardening</a:t>
+            </a:r>
+          </a:p>
+        </p:txBody>
+      </p:sp>
+      <p:sp>
+        <p:nvSpPr>
+          <p:cNvPr id="11" name="TextBox 10"/>
+          <p:cNvSpPr txBox="1"/>
+          <p:nvPr/>
+        </p:nvSpPr>
+        <p:spPr>
+          <a:xfrm>
+            <a:off x="502920" y="1325880"/>
+            <a:ext cx="10058400" cy="320040"/>
+          </a:xfrm>
+          <a:prstGeom prst="rect">
+            <a:avLst/>
+          </a:prstGeom>
+          <a:noFill/>
+        </p:spPr>
+        <p:txBody>
+          <a:bodyPr wrap="square">
+            <a:spAutoFit/>
+          </a:bodyPr>
+          <a:lstStyle/>
+          <a:p>
+            <a:pPr algn="l"/>
+            <a:r>
+              <a:rPr sz="1300" b="0" i="0">
+                <a:solidFill>
+                  <a:srgbClr val="5C5852"/>
+                </a:solidFill>
+              </a:rPr>
+              <a:t>Before &amp; after — SES permissions scoped across all Lambda functions.</a:t>
+            </a:r>
+          </a:p>
+        </p:txBody>
+      </p:sp>
+      <p:sp>
+        <p:nvSpPr>
+          <p:cNvPr id="12" name="Rectangle 11"/>
+          <p:cNvSpPr/>
+          <p:nvPr/>
+        </p:nvSpPr>
+        <p:spPr>
+          <a:xfrm>
+            <a:off x="502920" y="1664208"/>
+            <a:ext cx="11155680" cy="12700"/>
+          </a:xfrm>
+          <a:prstGeom prst="rect">
+            <a:avLst/>
+          </a:prstGeom>
+          <a:solidFill>
+            <a:srgbClr val="E8E5DE"/>
+          </a:solidFill>
+          <a:ln>
+            <a:noFill/>
+          </a:ln>
+        </p:spPr>
+        <p:style>
+          <a:lnRef idx="1">
+            <a:schemeClr val="accent1"/>
+          </a:lnRef>
+          <a:fillRef idx="3">
+            <a:schemeClr val="accent1"/>
+          </a:fillRef>
+          <a:effectRef idx="2">
+            <a:schemeClr val="accent1"/>
+          </a:effectRef>
+          <a:fontRef idx="minor">
+            <a:schemeClr val="lt1"/>
+          </a:fontRef>
+        </p:style>
+        <p:txBody>
+          <a:bodyPr rtlCol="0" anchor="ctr"/>
+          <a:lstStyle/>
+          <a:p>
+            <a:pPr algn="ctr"/>
+          </a:p>
+        </p:txBody>
+      </p:sp>
+      <p:sp>
+        <p:nvSpPr>
+          <p:cNvPr id="13" name="Rectangle 12"/>
+          <p:cNvSpPr/>
+          <p:nvPr/>
+        </p:nvSpPr>
+        <p:spPr>
+          <a:xfrm>
+            <a:off x="502920" y="1828800"/>
+            <a:ext cx="5394960" cy="329184"/>
+          </a:xfrm>
+          <a:prstGeom prst="rect">
+            <a:avLst/>
+          </a:prstGeom>
+          <a:solidFill>
+            <a:srgbClr val="FBF0EE"/>
+          </a:solidFill>
+          <a:ln>
+            <a:noFill/>
+          </a:ln>
+        </p:spPr>
+        <p:style>
+          <a:lnRef idx="1">
+            <a:schemeClr val="accent1"/>
+          </a:lnRef>
+          <a:fillRef idx="3">
+            <a:schemeClr val="accent1"/>
+          </a:fillRef>
+          <a:effectRef idx="2">
+            <a:schemeClr val="accent1"/>
+          </a:effectRef>
+          <a:fontRef idx="minor">
+            <a:schemeClr val="lt1"/>
+          </a:fontRef>
+        </p:style>
+        <p:txBody>
+          <a:bodyPr rtlCol="0" anchor="ctr"/>
+          <a:lstStyle/>
+          <a:p>
+            <a:pPr algn="ctr"/>
+          </a:p>
+        </p:txBody>
+      </p:sp>
+      <p:sp>
+        <p:nvSpPr>
+          <p:cNvPr id="14" name="TextBox 13"/>
+          <p:cNvSpPr txBox="1"/>
+          <p:nvPr/>
+        </p:nvSpPr>
+        <p:spPr>
+          <a:xfrm>
+            <a:off x="658368" y="1874519"/>
+            <a:ext cx="5120640" cy="237744"/>
+          </a:xfrm>
+          <a:prstGeom prst="rect">
+            <a:avLst/>
+          </a:prstGeom>
+          <a:noFill/>
+        </p:spPr>
+        <p:txBody>
+          <a:bodyPr wrap="square">
+            <a:spAutoFit/>
+          </a:bodyPr>
+          <a:lstStyle/>
+          <a:p>
+            <a:pPr algn="l"/>
+            <a:r>
+              <a:rPr sz="1100" b="1" i="0">
+                <a:solidFill>
+                  <a:srgbClr val="C25042"/>
+                </a:solidFill>
+              </a:rPr>
+              <a:t>BEFORE  —  Overly broad</a:t>
+            </a:r>
+          </a:p>
+        </p:txBody>
+      </p:sp>
+      <p:sp>
+        <p:nvSpPr>
+          <p:cNvPr id="15" name="Rectangle 14"/>
+          <p:cNvSpPr/>
+          <p:nvPr/>
+        </p:nvSpPr>
+        <p:spPr>
+          <a:xfrm>
+            <a:off x="502920" y="2231136"/>
+            <a:ext cx="5394960" cy="475488"/>
+          </a:xfrm>
+          <a:prstGeom prst="rect">
+            <a:avLst/>
+          </a:prstGeom>
+          <a:solidFill>
+            <a:srgbClr val="FFFFFF"/>
+          </a:solidFill>
+          <a:ln w="9525">
+            <a:solidFill>
+              <a:srgbClr val="E8E5DE"/>
+            </a:solidFill>
+          </a:ln>
+        </p:spPr>
+        <p:style>
+          <a:lnRef idx="1">
+            <a:schemeClr val="accent1"/>
+          </a:lnRef>
+          <a:fillRef idx="3">
+            <a:schemeClr val="accent1"/>
+          </a:fillRef>
+          <a:effectRef idx="2">
+            <a:schemeClr val="accent1"/>
+          </a:effectRef>
+          <a:fontRef idx="minor">
+            <a:schemeClr val="lt1"/>
+          </a:fontRef>
+        </p:style>
+        <p:txBody>
+          <a:bodyPr rtlCol="0" anchor="ctr"/>
+          <a:lstStyle/>
+          <a:p>
+            <a:pPr algn="ctr"/>
+          </a:p>
+        </p:txBody>
+      </p:sp>
+      <p:sp>
+        <p:nvSpPr>
+          <p:cNvPr id="16" name="Rectangle 15"/>
+          <p:cNvSpPr/>
+          <p:nvPr/>
+        </p:nvSpPr>
+        <p:spPr>
+          <a:xfrm>
+            <a:off x="502920" y="2231136"/>
+            <a:ext cx="36576" cy="475488"/>
+          </a:xfrm>
+          <a:prstGeom prst="rect">
+            <a:avLst/>
+          </a:prstGeom>
+          <a:solidFill>
+            <a:srgbClr val="C25042"/>
+          </a:solidFill>
+          <a:ln>
+            <a:noFill/>
+          </a:ln>
+        </p:spPr>
+        <p:style>
+          <a:lnRef idx="1">
+            <a:schemeClr val="accent1"/>
+          </a:lnRef>
+          <a:fillRef idx="3">
+            <a:schemeClr val="accent1"/>
+          </a:fillRef>
+          <a:effectRef idx="2">
+            <a:schemeClr val="accent1"/>
+          </a:effectRef>
+          <a:fontRef idx="minor">
+            <a:schemeClr val="lt1"/>
+          </a:fontRef>
+        </p:style>
+        <p:txBody>
+          <a:bodyPr rtlCol="0" anchor="ctr"/>
+          <a:lstStyle/>
+          <a:p>
+            <a:pPr algn="ctr"/>
+          </a:p>
+        </p:txBody>
+      </p:sp>
+      <p:sp>
+        <p:nvSpPr>
+          <p:cNvPr id="17" name="TextBox 16"/>
+          <p:cNvSpPr txBox="1"/>
+          <p:nvPr/>
+        </p:nvSpPr>
+        <p:spPr>
+          <a:xfrm>
+            <a:off x="658368" y="2267712"/>
+            <a:ext cx="5029200" cy="201168"/>
+          </a:xfrm>
+          <a:prstGeom prst="rect">
+            <a:avLst/>
+          </a:prstGeom>
+          <a:noFill/>
+        </p:spPr>
+        <p:txBody>
+          <a:bodyPr wrap="square">
+            <a:spAutoFit/>
+          </a:bodyPr>
+          <a:lstStyle/>
+          <a:p>
+            <a:pPr algn="l"/>
+            <a:r>
+              <a:rPr sz="950" b="1" i="0">
+                <a:solidFill>
+                  <a:srgbClr val="1C1A17"/>
+                </a:solidFill>
+              </a:rPr>
+              <a:t>hrms-stage-document-collection</a:t>
+            </a:r>
+          </a:p>
+        </p:txBody>
+      </p:sp>
+      <p:sp>
+        <p:nvSpPr>
+          <p:cNvPr id="18" name="TextBox 17"/>
+          <p:cNvSpPr txBox="1"/>
+          <p:nvPr/>
+        </p:nvSpPr>
+        <p:spPr>
+          <a:xfrm>
+            <a:off x="658368" y="2468880"/>
+            <a:ext cx="5029200" cy="201168"/>
+          </a:xfrm>
+          <a:prstGeom prst="rect">
+            <a:avLst/>
+          </a:prstGeom>
+          <a:noFill/>
+        </p:spPr>
+        <p:txBody>
+          <a:bodyPr wrap="square">
+            <a:spAutoFit/>
+          </a:bodyPr>
+          <a:lstStyle/>
+          <a:p>
+            <a:pPr algn="l"/>
+            <a:r>
+              <a:rPr sz="900" b="0" i="0">
+                <a:solidFill>
+                  <a:srgbClr val="C25042"/>
+                </a:solidFill>
+              </a:rPr>
+              <a:t>ses:SendEmail / ses:SendRawEmail  ·  Resource: '*'</a:t>
+            </a:r>
+          </a:p>
+        </p:txBody>
+      </p:sp>
+      <p:sp>
+        <p:nvSpPr>
+          <p:cNvPr id="19" name="Rectangle 18"/>
+          <p:cNvSpPr/>
+          <p:nvPr/>
+        </p:nvSpPr>
+        <p:spPr>
+          <a:xfrm>
+            <a:off x="502920" y="2779776"/>
+            <a:ext cx="5394960" cy="475488"/>
+          </a:xfrm>
+          <a:prstGeom prst="rect">
+            <a:avLst/>
+          </a:prstGeom>
+          <a:solidFill>
+            <a:srgbClr val="FFFFFF"/>
+          </a:solidFill>
+          <a:ln w="9525">
+            <a:solidFill>
+              <a:srgbClr val="E8E5DE"/>
+            </a:solidFill>
+          </a:ln>
+        </p:spPr>
+        <p:style>
+          <a:lnRef idx="1">
+            <a:schemeClr val="accent1"/>
+          </a:lnRef>
+          <a:fillRef idx="3">
+            <a:schemeClr val="accent1"/>
+          </a:fillRef>
+          <a:effectRef idx="2">
+            <a:schemeClr val="accent1"/>
+          </a:effectRef>
+          <a:fontRef idx="minor">
+            <a:schemeClr val="lt1"/>
+          </a:fontRef>
+        </p:style>
+        <p:txBody>
+          <a:bodyPr rtlCol="0" anchor="ctr"/>
+          <a:lstStyle/>
+          <a:p>
+            <a:pPr algn="ctr"/>
+          </a:p>
+        </p:txBody>
+      </p:sp>
+      <p:sp>
+        <p:nvSpPr>
+          <p:cNvPr id="20" name="Rectangle 19"/>
+          <p:cNvSpPr/>
+          <p:nvPr/>
+        </p:nvSpPr>
+        <p:spPr>
+          <a:xfrm>
+            <a:off x="502920" y="2779776"/>
+            <a:ext cx="36576" cy="475488"/>
+          </a:xfrm>
+          <a:prstGeom prst="rect">
+            <a:avLst/>
+          </a:prstGeom>
+          <a:solidFill>
+            <a:srgbClr val="C25042"/>
+          </a:solidFill>
+          <a:ln>
+            <a:noFill/>
+          </a:ln>
+        </p:spPr>
+        <p:style>
+          <a:lnRef idx="1">
+            <a:schemeClr val="accent1"/>
+          </a:lnRef>
+          <a:fillRef idx="3">
+            <a:schemeClr val="accent1"/>
+          </a:fillRef>
+          <a:effectRef idx="2">
+            <a:schemeClr val="accent1"/>
+          </a:effectRef>
+          <a:fontRef idx="minor">
+            <a:schemeClr val="lt1"/>
+          </a:fontRef>
+        </p:style>
+        <p:txBody>
+          <a:bodyPr rtlCol="0" anchor="ctr"/>
+          <a:lstStyle/>
+          <a:p>
+            <a:pPr algn="ctr"/>
+          </a:p>
+        </p:txBody>
+      </p:sp>
+      <p:sp>
+        <p:nvSpPr>
+          <p:cNvPr id="21" name="TextBox 20"/>
+          <p:cNvSpPr txBox="1"/>
+          <p:nvPr/>
+        </p:nvSpPr>
+        <p:spPr>
+          <a:xfrm>
+            <a:off x="658368" y="2816352"/>
+            <a:ext cx="5029200" cy="201168"/>
+          </a:xfrm>
+          <a:prstGeom prst="rect">
+            <a:avLst/>
+          </a:prstGeom>
+          <a:noFill/>
+        </p:spPr>
+        <p:txBody>
+          <a:bodyPr wrap="square">
+            <a:spAutoFit/>
+          </a:bodyPr>
+          <a:lstStyle/>
+          <a:p>
+            <a:pPr algn="l"/>
+            <a:r>
+              <a:rPr sz="950" b="1" i="0">
+                <a:solidFill>
+                  <a:srgbClr val="1C1A17"/>
+                </a:solidFill>
+              </a:rPr>
+              <a:t>hrms-create-employee</a:t>
+            </a:r>
+          </a:p>
+        </p:txBody>
+      </p:sp>
+      <p:sp>
+        <p:nvSpPr>
+          <p:cNvPr id="22" name="TextBox 21"/>
+          <p:cNvSpPr txBox="1"/>
+          <p:nvPr/>
+        </p:nvSpPr>
+        <p:spPr>
+          <a:xfrm>
+            <a:off x="658368" y="3017520"/>
+            <a:ext cx="5029200" cy="201168"/>
+          </a:xfrm>
+          <a:prstGeom prst="rect">
+            <a:avLst/>
+          </a:prstGeom>
+          <a:noFill/>
+        </p:spPr>
+        <p:txBody>
+          <a:bodyPr wrap="square">
+            <a:spAutoFit/>
+          </a:bodyPr>
+          <a:lstStyle/>
+          <a:p>
+            <a:pPr algn="l"/>
+            <a:r>
+              <a:rPr sz="900" b="0" i="0">
+                <a:solidFill>
+                  <a:srgbClr val="C25042"/>
+                </a:solidFill>
+              </a:rPr>
+              <a:t>ses:SendEmail / ses:SendRawEmail  ·  Resource: '*'</a:t>
+            </a:r>
+          </a:p>
+        </p:txBody>
+      </p:sp>
+      <p:sp>
+        <p:nvSpPr>
+          <p:cNvPr id="23" name="Rectangle 22"/>
+          <p:cNvSpPr/>
+          <p:nvPr/>
+        </p:nvSpPr>
+        <p:spPr>
+          <a:xfrm>
+            <a:off x="502920" y="3328416"/>
+            <a:ext cx="5394960" cy="475488"/>
+          </a:xfrm>
+          <a:prstGeom prst="rect">
+            <a:avLst/>
+          </a:prstGeom>
+          <a:solidFill>
+            <a:srgbClr val="FFFFFF"/>
+          </a:solidFill>
+          <a:ln w="9525">
+            <a:solidFill>
+              <a:srgbClr val="E8E5DE"/>
+            </a:solidFill>
+          </a:ln>
+        </p:spPr>
+        <p:style>
+          <a:lnRef idx="1">
+            <a:schemeClr val="accent1"/>
+          </a:lnRef>
+          <a:fillRef idx="3">
+            <a:schemeClr val="accent1"/>
+          </a:fillRef>
+          <a:effectRef idx="2">
+            <a:schemeClr val="accent1"/>
+          </a:effectRef>
+          <a:fontRef idx="minor">
+            <a:schemeClr val="lt1"/>
+          </a:fontRef>
+        </p:style>
+        <p:txBody>
+          <a:bodyPr rtlCol="0" anchor="ctr"/>
+          <a:lstStyle/>
+          <a:p>
+            <a:pPr algn="ctr"/>
+          </a:p>
+        </p:txBody>
+      </p:sp>
+      <p:sp>
+        <p:nvSpPr>
+          <p:cNvPr id="24" name="Rectangle 23"/>
+          <p:cNvSpPr/>
+          <p:nvPr/>
+        </p:nvSpPr>
+        <p:spPr>
+          <a:xfrm>
+            <a:off x="502920" y="3328416"/>
+            <a:ext cx="36576" cy="475488"/>
+          </a:xfrm>
+          <a:prstGeom prst="rect">
+            <a:avLst/>
+          </a:prstGeom>
+          <a:solidFill>
+            <a:srgbClr val="C25042"/>
+          </a:solidFill>
+          <a:ln>
+            <a:noFill/>
+          </a:ln>
+        </p:spPr>
+        <p:style>
+          <a:lnRef idx="1">
+            <a:schemeClr val="accent1"/>
+          </a:lnRef>
+          <a:fillRef idx="3">
+            <a:schemeClr val="accent1"/>
+          </a:fillRef>
+          <a:effectRef idx="2">
+            <a:schemeClr val="accent1"/>
+          </a:effectRef>
+          <a:fontRef idx="minor">
+            <a:schemeClr val="lt1"/>
+          </a:fontRef>
+        </p:style>
+        <p:txBody>
+          <a:bodyPr rtlCol="0" anchor="ctr"/>
+          <a:lstStyle/>
+          <a:p>
+            <a:pPr algn="ctr"/>
+          </a:p>
+        </p:txBody>
+      </p:sp>
+      <p:sp>
+        <p:nvSpPr>
+          <p:cNvPr id="25" name="TextBox 24"/>
+          <p:cNvSpPr txBox="1"/>
+          <p:nvPr/>
+        </p:nvSpPr>
+        <p:spPr>
+          <a:xfrm>
+            <a:off x="658368" y="3364992"/>
+            <a:ext cx="5029200" cy="201168"/>
+          </a:xfrm>
+          <a:prstGeom prst="rect">
+            <a:avLst/>
+          </a:prstGeom>
+          <a:noFill/>
+        </p:spPr>
+        <p:txBody>
+          <a:bodyPr wrap="square">
+            <a:spAutoFit/>
+          </a:bodyPr>
+          <a:lstStyle/>
+          <a:p>
+            <a:pPr algn="l"/>
+            <a:r>
+              <a:rPr sz="950" b="1" i="0">
+                <a:solidFill>
+                  <a:srgbClr val="1C1A17"/>
+                </a:solidFill>
+              </a:rPr>
+              <a:t>hrms-stage-it-provisioning</a:t>
+            </a:r>
+          </a:p>
+        </p:txBody>
+      </p:sp>
+      <p:sp>
+        <p:nvSpPr>
+          <p:cNvPr id="26" name="TextBox 25"/>
+          <p:cNvSpPr txBox="1"/>
+          <p:nvPr/>
+        </p:nvSpPr>
+        <p:spPr>
+          <a:xfrm>
+            <a:off x="658368" y="3566160"/>
+            <a:ext cx="5029200" cy="201168"/>
+          </a:xfrm>
+          <a:prstGeom prst="rect">
+            <a:avLst/>
+          </a:prstGeom>
+          <a:noFill/>
+        </p:spPr>
+        <p:txBody>
+          <a:bodyPr wrap="square">
+            <a:spAutoFit/>
+          </a:bodyPr>
+          <a:lstStyle/>
+          <a:p>
+            <a:pPr algn="l"/>
+            <a:r>
+              <a:rPr sz="900" b="0" i="0">
+                <a:solidFill>
+                  <a:srgbClr val="C25042"/>
+                </a:solidFill>
+              </a:rPr>
+              <a:t>ses:SendEmail / ses:SendRawEmail  ·  Resource: '*'</a:t>
+            </a:r>
+          </a:p>
+        </p:txBody>
+      </p:sp>
+      <p:sp>
+        <p:nvSpPr>
+          <p:cNvPr id="27" name="Rectangle 26"/>
+          <p:cNvSpPr/>
+          <p:nvPr/>
+        </p:nvSpPr>
+        <p:spPr>
+          <a:xfrm>
+            <a:off x="502920" y="3877056"/>
+            <a:ext cx="5394960" cy="475488"/>
+          </a:xfrm>
+          <a:prstGeom prst="rect">
+            <a:avLst/>
+          </a:prstGeom>
+          <a:solidFill>
+            <a:srgbClr val="FFFFFF"/>
+          </a:solidFill>
+          <a:ln w="9525">
+            <a:solidFill>
+              <a:srgbClr val="E8E5DE"/>
+            </a:solidFill>
+          </a:ln>
+        </p:spPr>
+        <p:style>
+          <a:lnRef idx="1">
+            <a:schemeClr val="accent1"/>
+          </a:lnRef>
+          <a:fillRef idx="3">
+            <a:schemeClr val="accent1"/>
+          </a:fillRef>
+          <a:effectRef idx="2">
+            <a:schemeClr val="accent1"/>
+          </a:effectRef>
+          <a:fontRef idx="minor">
+            <a:schemeClr val="lt1"/>
+          </a:fontRef>
+        </p:style>
+        <p:txBody>
+          <a:bodyPr rtlCol="0" anchor="ctr"/>
+          <a:lstStyle/>
+          <a:p>
+            <a:pPr algn="ctr"/>
+          </a:p>
+        </p:txBody>
+      </p:sp>
+      <p:sp>
+        <p:nvSpPr>
+          <p:cNvPr id="28" name="Rectangle 27"/>
+          <p:cNvSpPr/>
+          <p:nvPr/>
+        </p:nvSpPr>
+        <p:spPr>
+          <a:xfrm>
+            <a:off x="502920" y="3877056"/>
+            <a:ext cx="36576" cy="475488"/>
+          </a:xfrm>
+          <a:prstGeom prst="rect">
+            <a:avLst/>
+          </a:prstGeom>
+          <a:solidFill>
+            <a:srgbClr val="C25042"/>
+          </a:solidFill>
+          <a:ln>
+            <a:noFill/>
+          </a:ln>
+        </p:spPr>
+        <p:style>
+          <a:lnRef idx="1">
+            <a:schemeClr val="accent1"/>
+          </a:lnRef>
+          <a:fillRef idx="3">
+            <a:schemeClr val="accent1"/>
+          </a:fillRef>
+          <a:effectRef idx="2">
+            <a:schemeClr val="accent1"/>
+          </a:effectRef>
+          <a:fontRef idx="minor">
+            <a:schemeClr val="lt1"/>
+          </a:fontRef>
+        </p:style>
+        <p:txBody>
+          <a:bodyPr rtlCol="0" anchor="ctr"/>
+          <a:lstStyle/>
+          <a:p>
+            <a:pPr algn="ctr"/>
+          </a:p>
+        </p:txBody>
+      </p:sp>
+      <p:sp>
+        <p:nvSpPr>
+          <p:cNvPr id="29" name="TextBox 28"/>
+          <p:cNvSpPr txBox="1"/>
+          <p:nvPr/>
+        </p:nvSpPr>
+        <p:spPr>
+          <a:xfrm>
+            <a:off x="658368" y="3913632"/>
+            <a:ext cx="5029200" cy="201168"/>
+          </a:xfrm>
+          <a:prstGeom prst="rect">
+            <a:avLst/>
+          </a:prstGeom>
+          <a:noFill/>
+        </p:spPr>
+        <p:txBody>
+          <a:bodyPr wrap="square">
+            <a:spAutoFit/>
+          </a:bodyPr>
+          <a:lstStyle/>
+          <a:p>
+            <a:pPr algn="l"/>
+            <a:r>
+              <a:rPr sz="950" b="1" i="0">
+                <a:solidFill>
+                  <a:srgbClr val="1C1A17"/>
+                </a:solidFill>
+              </a:rPr>
+              <a:t>hrms-stage-policy-signoff</a:t>
+            </a:r>
+          </a:p>
+        </p:txBody>
+      </p:sp>
+      <p:sp>
+        <p:nvSpPr>
+          <p:cNvPr id="30" name="TextBox 29"/>
+          <p:cNvSpPr txBox="1"/>
+          <p:nvPr/>
+        </p:nvSpPr>
+        <p:spPr>
+          <a:xfrm>
+            <a:off x="658368" y="4114800"/>
+            <a:ext cx="5029200" cy="201168"/>
+          </a:xfrm>
+          <a:prstGeom prst="rect">
+            <a:avLst/>
+          </a:prstGeom>
+          <a:noFill/>
+        </p:spPr>
+        <p:txBody>
+          <a:bodyPr wrap="square">
+            <a:spAutoFit/>
+          </a:bodyPr>
+          <a:lstStyle/>
+          <a:p>
+            <a:pPr algn="l"/>
+            <a:r>
+              <a:rPr sz="900" b="0" i="0">
+                <a:solidFill>
+                  <a:srgbClr val="C25042"/>
+                </a:solidFill>
+              </a:rPr>
+              <a:t>ses:SendEmail / ses:SendRawEmail  ·  Resource: '*'</a:t>
+            </a:r>
+          </a:p>
+        </p:txBody>
+      </p:sp>
+      <p:sp>
+        <p:nvSpPr>
+          <p:cNvPr id="31" name="Rectangle 30"/>
+          <p:cNvSpPr/>
+          <p:nvPr/>
+        </p:nvSpPr>
+        <p:spPr>
+          <a:xfrm>
+            <a:off x="502920" y="4425696"/>
+            <a:ext cx="5394960" cy="475488"/>
+          </a:xfrm>
+          <a:prstGeom prst="rect">
+            <a:avLst/>
+          </a:prstGeom>
+          <a:solidFill>
+            <a:srgbClr val="FFFFFF"/>
+          </a:solidFill>
+          <a:ln w="9525">
+            <a:solidFill>
+              <a:srgbClr val="E8E5DE"/>
+            </a:solidFill>
+          </a:ln>
+        </p:spPr>
+        <p:style>
+          <a:lnRef idx="1">
+            <a:schemeClr val="accent1"/>
+          </a:lnRef>
+          <a:fillRef idx="3">
+            <a:schemeClr val="accent1"/>
+          </a:fillRef>
+          <a:effectRef idx="2">
+            <a:schemeClr val="accent1"/>
+          </a:effectRef>
+          <a:fontRef idx="minor">
+            <a:schemeClr val="lt1"/>
+          </a:fontRef>
+        </p:style>
+        <p:txBody>
+          <a:bodyPr rtlCol="0" anchor="ctr"/>
+          <a:lstStyle/>
+          <a:p>
+            <a:pPr algn="ctr"/>
+          </a:p>
+        </p:txBody>
+      </p:sp>
+      <p:sp>
+        <p:nvSpPr>
+          <p:cNvPr id="32" name="Rectangle 31"/>
+          <p:cNvSpPr/>
+          <p:nvPr/>
+        </p:nvSpPr>
+        <p:spPr>
+          <a:xfrm>
+            <a:off x="502920" y="4425696"/>
+            <a:ext cx="36576" cy="475488"/>
+          </a:xfrm>
+          <a:prstGeom prst="rect">
+            <a:avLst/>
+          </a:prstGeom>
+          <a:solidFill>
+            <a:srgbClr val="C25042"/>
+          </a:solidFill>
+          <a:ln>
+            <a:noFill/>
+          </a:ln>
+        </p:spPr>
+        <p:style>
+          <a:lnRef idx="1">
+            <a:schemeClr val="accent1"/>
+          </a:lnRef>
+          <a:fillRef idx="3">
+            <a:schemeClr val="accent1"/>
+          </a:fillRef>
+          <a:effectRef idx="2">
+            <a:schemeClr val="accent1"/>
+          </a:effectRef>
+          <a:fontRef idx="minor">
+            <a:schemeClr val="lt1"/>
+          </a:fontRef>
+        </p:style>
+        <p:txBody>
+          <a:bodyPr rtlCol="0" anchor="ctr"/>
+          <a:lstStyle/>
+          <a:p>
+            <a:pPr algn="ctr"/>
+          </a:p>
+        </p:txBody>
+      </p:sp>
+      <p:sp>
+        <p:nvSpPr>
+          <p:cNvPr id="33" name="TextBox 32"/>
+          <p:cNvSpPr txBox="1"/>
+          <p:nvPr/>
+        </p:nvSpPr>
+        <p:spPr>
+          <a:xfrm>
+            <a:off x="658368" y="4462272"/>
+            <a:ext cx="5029200" cy="201168"/>
+          </a:xfrm>
+          <a:prstGeom prst="rect">
+            <a:avLst/>
+          </a:prstGeom>
+          <a:noFill/>
+        </p:spPr>
+        <p:txBody>
+          <a:bodyPr wrap="square">
+            <a:spAutoFit/>
+          </a:bodyPr>
+          <a:lstStyle/>
+          <a:p>
+            <a:pPr algn="l"/>
+            <a:r>
+              <a:rPr sz="950" b="1" i="0">
+                <a:solidFill>
+                  <a:srgbClr val="1C1A17"/>
+                </a:solidFill>
+              </a:rPr>
+              <a:t>hrms-stage-manager-intro</a:t>
+            </a:r>
+          </a:p>
+        </p:txBody>
+      </p:sp>
+      <p:sp>
+        <p:nvSpPr>
+          <p:cNvPr id="34" name="TextBox 33"/>
+          <p:cNvSpPr txBox="1"/>
+          <p:nvPr/>
+        </p:nvSpPr>
+        <p:spPr>
+          <a:xfrm>
+            <a:off x="658368" y="4663440"/>
+            <a:ext cx="5029200" cy="201168"/>
+          </a:xfrm>
+          <a:prstGeom prst="rect">
+            <a:avLst/>
+          </a:prstGeom>
+          <a:noFill/>
+        </p:spPr>
+        <p:txBody>
+          <a:bodyPr wrap="square">
+            <a:spAutoFit/>
+          </a:bodyPr>
+          <a:lstStyle/>
+          <a:p>
+            <a:pPr algn="l"/>
+            <a:r>
+              <a:rPr sz="900" b="0" i="0">
+                <a:solidFill>
+                  <a:srgbClr val="C25042"/>
+                </a:solidFill>
+              </a:rPr>
+              <a:t>ses:SendEmail / ses:SendRawEmail  ·  Resource: '*'</a:t>
+            </a:r>
+          </a:p>
+        </p:txBody>
+      </p:sp>
+      <p:sp>
+        <p:nvSpPr>
+          <p:cNvPr id="35" name="Rectangle 34"/>
+          <p:cNvSpPr/>
+          <p:nvPr/>
+        </p:nvSpPr>
+        <p:spPr>
+          <a:xfrm>
+            <a:off x="502920" y="4974336"/>
+            <a:ext cx="5394960" cy="475488"/>
+          </a:xfrm>
+          <a:prstGeom prst="rect">
+            <a:avLst/>
+          </a:prstGeom>
+          <a:solidFill>
+            <a:srgbClr val="FFFFFF"/>
+          </a:solidFill>
+          <a:ln w="9525">
+            <a:solidFill>
+              <a:srgbClr val="E8E5DE"/>
+            </a:solidFill>
+          </a:ln>
+        </p:spPr>
+        <p:style>
+          <a:lnRef idx="1">
+            <a:schemeClr val="accent1"/>
+          </a:lnRef>
+          <a:fillRef idx="3">
+            <a:schemeClr val="accent1"/>
+          </a:fillRef>
+          <a:effectRef idx="2">
+            <a:schemeClr val="accent1"/>
+          </a:effectRef>
+          <a:fontRef idx="minor">
+            <a:schemeClr val="lt1"/>
+          </a:fontRef>
+        </p:style>
+        <p:txBody>
+          <a:bodyPr rtlCol="0" anchor="ctr"/>
+          <a:lstStyle/>
+          <a:p>
+            <a:pPr algn="ctr"/>
+          </a:p>
+        </p:txBody>
+      </p:sp>
+      <p:sp>
+        <p:nvSpPr>
+          <p:cNvPr id="36" name="Rectangle 35"/>
+          <p:cNvSpPr/>
+          <p:nvPr/>
+        </p:nvSpPr>
+        <p:spPr>
+          <a:xfrm>
+            <a:off x="502920" y="4974336"/>
+            <a:ext cx="36576" cy="475488"/>
+          </a:xfrm>
+          <a:prstGeom prst="rect">
+            <a:avLst/>
+          </a:prstGeom>
+          <a:solidFill>
+            <a:srgbClr val="C25042"/>
+          </a:solidFill>
+          <a:ln>
+            <a:noFill/>
+          </a:ln>
+        </p:spPr>
+        <p:style>
+          <a:lnRef idx="1">
+            <a:schemeClr val="accent1"/>
+          </a:lnRef>
+          <a:fillRef idx="3">
+            <a:schemeClr val="accent1"/>
+          </a:fillRef>
+          <a:effectRef idx="2">
+            <a:schemeClr val="accent1"/>
+          </a:effectRef>
+          <a:fontRef idx="minor">
+            <a:schemeClr val="lt1"/>
+          </a:fontRef>
+        </p:style>
+        <p:txBody>
+          <a:bodyPr rtlCol="0" anchor="ctr"/>
+          <a:lstStyle/>
+          <a:p>
+            <a:pPr algn="ctr"/>
+          </a:p>
+        </p:txBody>
+      </p:sp>
+      <p:sp>
+        <p:nvSpPr>
+          <p:cNvPr id="37" name="TextBox 36"/>
+          <p:cNvSpPr txBox="1"/>
+          <p:nvPr/>
+        </p:nvSpPr>
+        <p:spPr>
+          <a:xfrm>
+            <a:off x="658368" y="5010912"/>
+            <a:ext cx="5029200" cy="201168"/>
+          </a:xfrm>
+          <a:prstGeom prst="rect">
+            <a:avLst/>
+          </a:prstGeom>
+          <a:noFill/>
+        </p:spPr>
+        <p:txBody>
+          <a:bodyPr wrap="square">
+            <a:spAutoFit/>
+          </a:bodyPr>
+          <a:lstStyle/>
+          <a:p>
+            <a:pPr algn="l"/>
+            <a:r>
+              <a:rPr sz="950" b="1" i="0">
+                <a:solidFill>
+                  <a:srgbClr val="1C1A17"/>
+                </a:solidFill>
+              </a:rPr>
+              <a:t>hrms-send-reminder</a:t>
+            </a:r>
+          </a:p>
+        </p:txBody>
+      </p:sp>
+      <p:sp>
+        <p:nvSpPr>
+          <p:cNvPr id="38" name="TextBox 37"/>
+          <p:cNvSpPr txBox="1"/>
+          <p:nvPr/>
+        </p:nvSpPr>
+        <p:spPr>
+          <a:xfrm>
+            <a:off x="658368" y="5212080"/>
+            <a:ext cx="5029200" cy="201168"/>
+          </a:xfrm>
+          <a:prstGeom prst="rect">
+            <a:avLst/>
+          </a:prstGeom>
+          <a:noFill/>
+        </p:spPr>
+        <p:txBody>
+          <a:bodyPr wrap="square">
+            <a:spAutoFit/>
+          </a:bodyPr>
+          <a:lstStyle/>
+          <a:p>
+            <a:pPr algn="l"/>
+            <a:r>
+              <a:rPr sz="900" b="0" i="0">
+                <a:solidFill>
+                  <a:srgbClr val="C25042"/>
+                </a:solidFill>
+              </a:rPr>
+              <a:t>ses:SendEmail / ses:SendRawEmail  ·  Resource: '*'</a:t>
+            </a:r>
+          </a:p>
+        </p:txBody>
+      </p:sp>
+      <p:sp>
+        <p:nvSpPr>
+          <p:cNvPr id="39" name="Rectangle 38"/>
+          <p:cNvSpPr/>
+          <p:nvPr/>
+        </p:nvSpPr>
+        <p:spPr>
+          <a:xfrm>
+            <a:off x="502920" y="5522976"/>
+            <a:ext cx="5394960" cy="475488"/>
+          </a:xfrm>
+          <a:prstGeom prst="rect">
+            <a:avLst/>
+          </a:prstGeom>
+          <a:solidFill>
+            <a:srgbClr val="FFFFFF"/>
+          </a:solidFill>
+          <a:ln w="9525">
+            <a:solidFill>
+              <a:srgbClr val="E8E5DE"/>
+            </a:solidFill>
+          </a:ln>
+        </p:spPr>
+        <p:style>
+          <a:lnRef idx="1">
+            <a:schemeClr val="accent1"/>
+          </a:lnRef>
+          <a:fillRef idx="3">
+            <a:schemeClr val="accent1"/>
+          </a:fillRef>
+          <a:effectRef idx="2">
+            <a:schemeClr val="accent1"/>
+          </a:effectRef>
+          <a:fontRef idx="minor">
+            <a:schemeClr val="lt1"/>
+          </a:fontRef>
+        </p:style>
+        <p:txBody>
+          <a:bodyPr rtlCol="0" anchor="ctr"/>
+          <a:lstStyle/>
+          <a:p>
+            <a:pPr algn="ctr"/>
+          </a:p>
+        </p:txBody>
+      </p:sp>
+      <p:sp>
+        <p:nvSpPr>
+          <p:cNvPr id="40" name="Rectangle 39"/>
+          <p:cNvSpPr/>
+          <p:nvPr/>
+        </p:nvSpPr>
+        <p:spPr>
+          <a:xfrm>
+            <a:off x="502920" y="5522976"/>
+            <a:ext cx="36576" cy="475488"/>
+          </a:xfrm>
+          <a:prstGeom prst="rect">
+            <a:avLst/>
+          </a:prstGeom>
+          <a:solidFill>
+            <a:srgbClr val="C25042"/>
+          </a:solidFill>
+          <a:ln>
+            <a:noFill/>
+          </a:ln>
+        </p:spPr>
+        <p:style>
+          <a:lnRef idx="1">
+            <a:schemeClr val="accent1"/>
+          </a:lnRef>
+          <a:fillRef idx="3">
+            <a:schemeClr val="accent1"/>
+          </a:fillRef>
+          <a:effectRef idx="2">
+            <a:schemeClr val="accent1"/>
+          </a:effectRef>
+          <a:fontRef idx="minor">
+            <a:schemeClr val="lt1"/>
+          </a:fontRef>
+        </p:style>
+        <p:txBody>
+          <a:bodyPr rtlCol="0" anchor="ctr"/>
+          <a:lstStyle/>
+          <a:p>
+            <a:pPr algn="ctr"/>
+          </a:p>
+        </p:txBody>
+      </p:sp>
+      <p:sp>
+        <p:nvSpPr>
+          <p:cNvPr id="41" name="TextBox 40"/>
+          <p:cNvSpPr txBox="1"/>
+          <p:nvPr/>
+        </p:nvSpPr>
+        <p:spPr>
+          <a:xfrm>
+            <a:off x="658368" y="5559552"/>
+            <a:ext cx="5029200" cy="201168"/>
+          </a:xfrm>
+          <a:prstGeom prst="rect">
+            <a:avLst/>
+          </a:prstGeom>
+          <a:noFill/>
+        </p:spPr>
+        <p:txBody>
+          <a:bodyPr wrap="square">
+            <a:spAutoFit/>
+          </a:bodyPr>
+          <a:lstStyle/>
+          <a:p>
+            <a:pPr algn="l"/>
+            <a:r>
+              <a:rPr sz="950" b="1" i="0">
+                <a:solidFill>
+                  <a:srgbClr val="1C1A17"/>
+                </a:solidFill>
+              </a:rPr>
+              <a:t>hrms-document-upload-trigger</a:t>
+            </a:r>
+          </a:p>
+        </p:txBody>
+      </p:sp>
+      <p:sp>
+        <p:nvSpPr>
+          <p:cNvPr id="42" name="TextBox 41"/>
+          <p:cNvSpPr txBox="1"/>
+          <p:nvPr/>
+        </p:nvSpPr>
+        <p:spPr>
+          <a:xfrm>
+            <a:off x="658368" y="5760720"/>
+            <a:ext cx="5029200" cy="201168"/>
+          </a:xfrm>
+          <a:prstGeom prst="rect">
+            <a:avLst/>
+          </a:prstGeom>
+          <a:noFill/>
+        </p:spPr>
+        <p:txBody>
+          <a:bodyPr wrap="square">
+            <a:spAutoFit/>
+          </a:bodyPr>
+          <a:lstStyle/>
+          <a:p>
+            <a:pPr algn="l"/>
+            <a:r>
+              <a:rPr sz="900" b="0" i="0">
+                <a:solidFill>
+                  <a:srgbClr val="C25042"/>
+                </a:solidFill>
+              </a:rPr>
+              <a:t>ses:SendEmail / ses:SendRawEmail  ·  Resource: '*'</a:t>
+            </a:r>
+          </a:p>
+        </p:txBody>
+      </p:sp>
+      <p:sp>
+        <p:nvSpPr>
+          <p:cNvPr id="43" name="Rectangle 42"/>
+          <p:cNvSpPr/>
+          <p:nvPr/>
+        </p:nvSpPr>
+        <p:spPr>
+          <a:xfrm>
+            <a:off x="6263640" y="1828800"/>
+            <a:ext cx="5394960" cy="329184"/>
+          </a:xfrm>
+          <a:prstGeom prst="rect">
+            <a:avLst/>
+          </a:prstGeom>
+          <a:solidFill>
+            <a:srgbClr val="EBF3EF"/>
+          </a:solidFill>
+          <a:ln>
+            <a:noFill/>
+          </a:ln>
+        </p:spPr>
+        <p:style>
+          <a:lnRef idx="1">
+            <a:schemeClr val="accent1"/>
+          </a:lnRef>
+          <a:fillRef idx="3">
+            <a:schemeClr val="accent1"/>
+          </a:fillRef>
+          <a:effectRef idx="2">
+            <a:schemeClr val="accent1"/>
+          </a:effectRef>
+          <a:fontRef idx="minor">
+            <a:schemeClr val="lt1"/>
+          </a:fontRef>
+        </p:style>
+        <p:txBody>
+          <a:bodyPr rtlCol="0" anchor="ctr"/>
+          <a:lstStyle/>
+          <a:p>
+            <a:pPr algn="ctr"/>
+          </a:p>
+        </p:txBody>
+      </p:sp>
+      <p:sp>
+        <p:nvSpPr>
+          <p:cNvPr id="44" name="TextBox 43"/>
+          <p:cNvSpPr txBox="1"/>
+          <p:nvPr/>
+        </p:nvSpPr>
+        <p:spPr>
+          <a:xfrm>
+            <a:off x="6419088" y="1874519"/>
+            <a:ext cx="5120640" cy="237744"/>
+          </a:xfrm>
+          <a:prstGeom prst="rect">
+            <a:avLst/>
+          </a:prstGeom>
+          <a:noFill/>
+        </p:spPr>
+        <p:txBody>
+          <a:bodyPr wrap="square">
+            <a:spAutoFit/>
+          </a:bodyPr>
+          <a:lstStyle/>
+          <a:p>
+            <a:pPr algn="l"/>
+            <a:r>
+              <a:rPr sz="1100" b="1" i="0">
+                <a:solidFill>
+                  <a:srgbClr val="2E5A4D"/>
+                </a:solidFill>
+              </a:rPr>
+              <a:t>AFTER  —  Least privilege</a:t>
+            </a:r>
+          </a:p>
+        </p:txBody>
+      </p:sp>
+      <p:sp>
+        <p:nvSpPr>
+          <p:cNvPr id="45" name="Rectangle 44"/>
+          <p:cNvSpPr/>
+          <p:nvPr/>
+        </p:nvSpPr>
+        <p:spPr>
+          <a:xfrm>
+            <a:off x="6263640" y="2231136"/>
+            <a:ext cx="5394960" cy="475488"/>
+          </a:xfrm>
+          <a:prstGeom prst="rect">
+            <a:avLst/>
+          </a:prstGeom>
+          <a:solidFill>
+            <a:srgbClr val="FFFFFF"/>
+          </a:solidFill>
+          <a:ln w="9525">
+            <a:solidFill>
+              <a:srgbClr val="E8E5DE"/>
+            </a:solidFill>
+          </a:ln>
+        </p:spPr>
+        <p:style>
+          <a:lnRef idx="1">
+            <a:schemeClr val="accent1"/>
+          </a:lnRef>
+          <a:fillRef idx="3">
+            <a:schemeClr val="accent1"/>
+          </a:fillRef>
+          <a:effectRef idx="2">
+            <a:schemeClr val="accent1"/>
+          </a:effectRef>
+          <a:fontRef idx="minor">
+            <a:schemeClr val="lt1"/>
+          </a:fontRef>
+        </p:style>
+        <p:txBody>
+          <a:bodyPr rtlCol="0" anchor="ctr"/>
+          <a:lstStyle/>
+          <a:p>
+            <a:pPr algn="ctr"/>
+          </a:p>
+        </p:txBody>
+      </p:sp>
+      <p:sp>
+        <p:nvSpPr>
+          <p:cNvPr id="46" name="Rectangle 45"/>
+          <p:cNvSpPr/>
+          <p:nvPr/>
+        </p:nvSpPr>
+        <p:spPr>
+          <a:xfrm>
+            <a:off x="6263640" y="2231136"/>
+            <a:ext cx="36576" cy="475488"/>
+          </a:xfrm>
+          <a:prstGeom prst="rect">
+            <a:avLst/>
+          </a:prstGeom>
+          <a:solidFill>
+            <a:srgbClr val="4A7C6B"/>
+          </a:solidFill>
+          <a:ln>
+            <a:noFill/>
+          </a:ln>
+        </p:spPr>
+        <p:style>
+          <a:lnRef idx="1">
+            <a:schemeClr val="accent1"/>
+          </a:lnRef>
+          <a:fillRef idx="3">
+            <a:schemeClr val="accent1"/>
+          </a:fillRef>
+          <a:effectRef idx="2">
+            <a:schemeClr val="accent1"/>
+          </a:effectRef>
+          <a:fontRef idx="minor">
+            <a:schemeClr val="lt1"/>
+          </a:fontRef>
+        </p:style>
+        <p:txBody>
+          <a:bodyPr rtlCol="0" anchor="ctr"/>
+          <a:lstStyle/>
+          <a:p>
+            <a:pPr algn="ctr"/>
+          </a:p>
+        </p:txBody>
+      </p:sp>
+      <p:sp>
+        <p:nvSpPr>
+          <p:cNvPr id="47" name="TextBox 46"/>
+          <p:cNvSpPr txBox="1"/>
+          <p:nvPr/>
+        </p:nvSpPr>
+        <p:spPr>
+          <a:xfrm>
+            <a:off x="6419088" y="2267712"/>
+            <a:ext cx="5029200" cy="201168"/>
+          </a:xfrm>
+          <a:prstGeom prst="rect">
+            <a:avLst/>
+          </a:prstGeom>
+          <a:noFill/>
+        </p:spPr>
+        <p:txBody>
+          <a:bodyPr wrap="square">
+            <a:spAutoFit/>
+          </a:bodyPr>
+          <a:lstStyle/>
+          <a:p>
+            <a:pPr algn="l"/>
+            <a:r>
+              <a:rPr sz="950" b="1" i="0">
+                <a:solidFill>
+                  <a:srgbClr val="1C1A17"/>
+                </a:solidFill>
+              </a:rPr>
+              <a:t>hrms-stage-document-collection</a:t>
+            </a:r>
+          </a:p>
+        </p:txBody>
+      </p:sp>
+      <p:sp>
+        <p:nvSpPr>
+          <p:cNvPr id="48" name="TextBox 47"/>
+          <p:cNvSpPr txBox="1"/>
+          <p:nvPr/>
+        </p:nvSpPr>
+        <p:spPr>
+          <a:xfrm>
+            <a:off x="6419088" y="2468880"/>
+            <a:ext cx="5029200" cy="201168"/>
+          </a:xfrm>
+          <a:prstGeom prst="rect">
+            <a:avLst/>
+          </a:prstGeom>
+          <a:noFill/>
+        </p:spPr>
+        <p:txBody>
+          <a:bodyPr wrap="square">
+            <a:spAutoFit/>
+          </a:bodyPr>
+          <a:lstStyle/>
+          <a:p>
+            <a:pPr algn="l"/>
+            <a:r>
+              <a:rPr sz="900" b="0" i="0">
+                <a:solidFill>
+                  <a:srgbClr val="2E5A4D"/>
+                </a:solidFill>
+              </a:rPr>
+              <a:t>ses:SendEmail / ses:SendRawEmail  ·  arn:aws:ses:&lt;region&gt;:&lt;account&gt;:identity/*</a:t>
+            </a:r>
+          </a:p>
+        </p:txBody>
+      </p:sp>
+      <p:sp>
+        <p:nvSpPr>
+          <p:cNvPr id="49" name="Rectangle 48"/>
+          <p:cNvSpPr/>
+          <p:nvPr/>
+        </p:nvSpPr>
+        <p:spPr>
+          <a:xfrm>
+            <a:off x="6263640" y="2779776"/>
+            <a:ext cx="5394960" cy="475488"/>
+          </a:xfrm>
+          <a:prstGeom prst="rect">
+            <a:avLst/>
+          </a:prstGeom>
+          <a:solidFill>
+            <a:srgbClr val="FFFFFF"/>
+          </a:solidFill>
+          <a:ln w="9525">
+            <a:solidFill>
+              <a:srgbClr val="E8E5DE"/>
+            </a:solidFill>
+          </a:ln>
+        </p:spPr>
+        <p:style>
+          <a:lnRef idx="1">
+            <a:schemeClr val="accent1"/>
+          </a:lnRef>
+          <a:fillRef idx="3">
+            <a:schemeClr val="accent1"/>
+          </a:fillRef>
+          <a:effectRef idx="2">
+            <a:schemeClr val="accent1"/>
+          </a:effectRef>
+          <a:fontRef idx="minor">
+            <a:schemeClr val="lt1"/>
+          </a:fontRef>
+        </p:style>
+        <p:txBody>
+          <a:bodyPr rtlCol="0" anchor="ctr"/>
+          <a:lstStyle/>
+          <a:p>
+            <a:pPr algn="ctr"/>
+          </a:p>
+        </p:txBody>
+      </p:sp>
+      <p:sp>
+        <p:nvSpPr>
+          <p:cNvPr id="50" name="Rectangle 49"/>
+          <p:cNvSpPr/>
+          <p:nvPr/>
+        </p:nvSpPr>
+        <p:spPr>
+          <a:xfrm>
+            <a:off x="6263640" y="2779776"/>
+            <a:ext cx="36576" cy="475488"/>
+          </a:xfrm>
+          <a:prstGeom prst="rect">
+            <a:avLst/>
+          </a:prstGeom>
+          <a:solidFill>
+            <a:srgbClr val="4A7C6B"/>
+          </a:solidFill>
+          <a:ln>
+            <a:noFill/>
+          </a:ln>
+        </p:spPr>
+        <p:style>
+          <a:lnRef idx="1">
+            <a:schemeClr val="accent1"/>
+          </a:lnRef>
+          <a:fillRef idx="3">
+            <a:schemeClr val="accent1"/>
+          </a:fillRef>
+          <a:effectRef idx="2">
+            <a:schemeClr val="accent1"/>
+          </a:effectRef>
+          <a:fontRef idx="minor">
+            <a:schemeClr val="lt1"/>
+          </a:fontRef>
+        </p:style>
+        <p:txBody>
+          <a:bodyPr rtlCol="0" anchor="ctr"/>
+          <a:lstStyle/>
+          <a:p>
+            <a:pPr algn="ctr"/>
+          </a:p>
+        </p:txBody>
+      </p:sp>
+      <p:sp>
+        <p:nvSpPr>
+          <p:cNvPr id="51" name="TextBox 50"/>
+          <p:cNvSpPr txBox="1"/>
+          <p:nvPr/>
+        </p:nvSpPr>
+        <p:spPr>
+          <a:xfrm>
+            <a:off x="6419088" y="2816352"/>
+            <a:ext cx="5029200" cy="201168"/>
+          </a:xfrm>
+          <a:prstGeom prst="rect">
+            <a:avLst/>
+          </a:prstGeom>
+          <a:noFill/>
+        </p:spPr>
+        <p:txBody>
+          <a:bodyPr wrap="square">
+            <a:spAutoFit/>
+          </a:bodyPr>
+          <a:lstStyle/>
+          <a:p>
+            <a:pPr algn="l"/>
+            <a:r>
+              <a:rPr sz="950" b="1" i="0">
+                <a:solidFill>
+                  <a:srgbClr val="1C1A17"/>
+                </a:solidFill>
+              </a:rPr>
+              <a:t>hrms-create-employee</a:t>
+            </a:r>
+          </a:p>
+        </p:txBody>
+      </p:sp>
+      <p:sp>
+        <p:nvSpPr>
+          <p:cNvPr id="52" name="TextBox 51"/>
+          <p:cNvSpPr txBox="1"/>
+          <p:nvPr/>
+        </p:nvSpPr>
+        <p:spPr>
+          <a:xfrm>
+            <a:off x="6419088" y="3017520"/>
+            <a:ext cx="5029200" cy="201168"/>
+          </a:xfrm>
+          <a:prstGeom prst="rect">
+            <a:avLst/>
+          </a:prstGeom>
+          <a:noFill/>
+        </p:spPr>
+        <p:txBody>
+          <a:bodyPr wrap="square">
+            <a:spAutoFit/>
+          </a:bodyPr>
+          <a:lstStyle/>
+          <a:p>
+            <a:pPr algn="l"/>
+            <a:r>
+              <a:rPr sz="900" b="0" i="0">
+                <a:solidFill>
+                  <a:srgbClr val="2E5A4D"/>
+                </a:solidFill>
+              </a:rPr>
+              <a:t>ses:SendEmail / ses:SendRawEmail  ·  arn:aws:ses:&lt;region&gt;:&lt;account&gt;:identity/*</a:t>
+            </a:r>
+          </a:p>
+        </p:txBody>
+      </p:sp>
+      <p:sp>
+        <p:nvSpPr>
+          <p:cNvPr id="53" name="Rectangle 52"/>
+          <p:cNvSpPr/>
+          <p:nvPr/>
+        </p:nvSpPr>
+        <p:spPr>
+          <a:xfrm>
+            <a:off x="6263640" y="3328416"/>
+            <a:ext cx="5394960" cy="475488"/>
+          </a:xfrm>
+          <a:prstGeom prst="rect">
+            <a:avLst/>
+          </a:prstGeom>
+          <a:solidFill>
+            <a:srgbClr val="FFFFFF"/>
+          </a:solidFill>
+          <a:ln w="9525">
+            <a:solidFill>
+              <a:srgbClr val="E8E5DE"/>
+            </a:solidFill>
+          </a:ln>
+        </p:spPr>
+        <p:style>
+          <a:lnRef idx="1">
+            <a:schemeClr val="accent1"/>
+          </a:lnRef>
+          <a:fillRef idx="3">
+            <a:schemeClr val="accent1"/>
+          </a:fillRef>
+          <a:effectRef idx="2">
+            <a:schemeClr val="accent1"/>
+          </a:effectRef>
+          <a:fontRef idx="minor">
+            <a:schemeClr val="lt1"/>
+          </a:fontRef>
+        </p:style>
+        <p:txBody>
+          <a:bodyPr rtlCol="0" anchor="ctr"/>
+          <a:lstStyle/>
+          <a:p>
+            <a:pPr algn="ctr"/>
+          </a:p>
+        </p:txBody>
+      </p:sp>
+      <p:sp>
+        <p:nvSpPr>
+          <p:cNvPr id="54" name="Rectangle 53"/>
+          <p:cNvSpPr/>
+          <p:nvPr/>
+        </p:nvSpPr>
+        <p:spPr>
+          <a:xfrm>
+            <a:off x="6263640" y="3328416"/>
+            <a:ext cx="36576" cy="475488"/>
+          </a:xfrm>
+          <a:prstGeom prst="rect">
+            <a:avLst/>
+          </a:prstGeom>
+          <a:solidFill>
+            <a:srgbClr val="4A7C6B"/>
+          </a:solidFill>
+          <a:ln>
+            <a:noFill/>
+          </a:ln>
+        </p:spPr>
+        <p:style>
+          <a:lnRef idx="1">
+            <a:schemeClr val="accent1"/>
+          </a:lnRef>
+          <a:fillRef idx="3">
+            <a:schemeClr val="accent1"/>
+          </a:fillRef>
+          <a:effectRef idx="2">
+            <a:schemeClr val="accent1"/>
+          </a:effectRef>
+          <a:fontRef idx="minor">
+            <a:schemeClr val="lt1"/>
+          </a:fontRef>
+        </p:style>
+        <p:txBody>
+          <a:bodyPr rtlCol="0" anchor="ctr"/>
+          <a:lstStyle/>
+          <a:p>
+            <a:pPr algn="ctr"/>
+          </a:p>
+        </p:txBody>
+      </p:sp>
+      <p:sp>
+        <p:nvSpPr>
+          <p:cNvPr id="55" name="TextBox 54"/>
+          <p:cNvSpPr txBox="1"/>
+          <p:nvPr/>
+        </p:nvSpPr>
+        <p:spPr>
+          <a:xfrm>
+            <a:off x="6419088" y="3364992"/>
+            <a:ext cx="5029200" cy="201168"/>
+          </a:xfrm>
+          <a:prstGeom prst="rect">
+            <a:avLst/>
+          </a:prstGeom>
+          <a:noFill/>
+        </p:spPr>
+        <p:txBody>
+          <a:bodyPr wrap="square">
+            <a:spAutoFit/>
+          </a:bodyPr>
+          <a:lstStyle/>
+          <a:p>
+            <a:pPr algn="l"/>
+            <a:r>
+              <a:rPr sz="950" b="1" i="0">
+                <a:solidFill>
+                  <a:srgbClr val="1C1A17"/>
+                </a:solidFill>
+              </a:rPr>
+              <a:t>hrms-stage-it-provisioning</a:t>
+            </a:r>
+          </a:p>
+        </p:txBody>
+      </p:sp>
+      <p:sp>
+        <p:nvSpPr>
+          <p:cNvPr id="56" name="TextBox 55"/>
+          <p:cNvSpPr txBox="1"/>
+          <p:nvPr/>
+        </p:nvSpPr>
+        <p:spPr>
+          <a:xfrm>
+            <a:off x="6419088" y="3566160"/>
+            <a:ext cx="5029200" cy="201168"/>
+          </a:xfrm>
+          <a:prstGeom prst="rect">
+            <a:avLst/>
+          </a:prstGeom>
+          <a:noFill/>
+        </p:spPr>
+        <p:txBody>
+          <a:bodyPr wrap="square">
+            <a:spAutoFit/>
+          </a:bodyPr>
+          <a:lstStyle/>
+          <a:p>
+            <a:pPr algn="l"/>
+            <a:r>
+              <a:rPr sz="900" b="0" i="0">
+                <a:solidFill>
+                  <a:srgbClr val="2E5A4D"/>
+                </a:solidFill>
+              </a:rPr>
+              <a:t>ses:SendEmail / ses:SendRawEmail  ·  arn:aws:ses:&lt;region&gt;:&lt;account&gt;:identity/*</a:t>
+            </a:r>
+          </a:p>
+        </p:txBody>
+      </p:sp>
+      <p:sp>
+        <p:nvSpPr>
+          <p:cNvPr id="57" name="Rectangle 56"/>
+          <p:cNvSpPr/>
+          <p:nvPr/>
+        </p:nvSpPr>
+        <p:spPr>
+          <a:xfrm>
+            <a:off x="6263640" y="3877056"/>
+            <a:ext cx="5394960" cy="475488"/>
+          </a:xfrm>
+          <a:prstGeom prst="rect">
+            <a:avLst/>
+          </a:prstGeom>
+          <a:solidFill>
+            <a:srgbClr val="FFFFFF"/>
+          </a:solidFill>
+          <a:ln w="9525">
+            <a:solidFill>
+              <a:srgbClr val="E8E5DE"/>
+            </a:solidFill>
+          </a:ln>
+        </p:spPr>
+        <p:style>
+          <a:lnRef idx="1">
+            <a:schemeClr val="accent1"/>
+          </a:lnRef>
+          <a:fillRef idx="3">
+            <a:schemeClr val="accent1"/>
+          </a:fillRef>
+          <a:effectRef idx="2">
+            <a:schemeClr val="accent1"/>
+          </a:effectRef>
+          <a:fontRef idx="minor">
+            <a:schemeClr val="lt1"/>
+          </a:fontRef>
+        </p:style>
+        <p:txBody>
+          <a:bodyPr rtlCol="0" anchor="ctr"/>
+          <a:lstStyle/>
+          <a:p>
+            <a:pPr algn="ctr"/>
+          </a:p>
+        </p:txBody>
+      </p:sp>
+      <p:sp>
+        <p:nvSpPr>
+          <p:cNvPr id="58" name="Rectangle 57"/>
+          <p:cNvSpPr/>
+          <p:nvPr/>
+        </p:nvSpPr>
+        <p:spPr>
+          <a:xfrm>
+            <a:off x="6263640" y="3877056"/>
+            <a:ext cx="36576" cy="475488"/>
+          </a:xfrm>
+          <a:prstGeom prst="rect">
+            <a:avLst/>
+          </a:prstGeom>
+          <a:solidFill>
+            <a:srgbClr val="4A7C6B"/>
+          </a:solidFill>
+          <a:ln>
+            <a:noFill/>
+          </a:ln>
+        </p:spPr>
+        <p:style>
+          <a:lnRef idx="1">
+            <a:schemeClr val="accent1"/>
+          </a:lnRef>
+          <a:fillRef idx="3">
+            <a:schemeClr val="accent1"/>
+          </a:fillRef>
+          <a:effectRef idx="2">
+            <a:schemeClr val="accent1"/>
+          </a:effectRef>
+          <a:fontRef idx="minor">
+            <a:schemeClr val="lt1"/>
+          </a:fontRef>
+        </p:style>
+        <p:txBody>
+          <a:bodyPr rtlCol="0" anchor="ctr"/>
+          <a:lstStyle/>
+          <a:p>
+            <a:pPr algn="ctr"/>
+          </a:p>
+        </p:txBody>
+      </p:sp>
+      <p:sp>
+        <p:nvSpPr>
+          <p:cNvPr id="59" name="TextBox 58"/>
+          <p:cNvSpPr txBox="1"/>
+          <p:nvPr/>
+        </p:nvSpPr>
+        <p:spPr>
+          <a:xfrm>
+            <a:off x="6419088" y="3913632"/>
+            <a:ext cx="5029200" cy="201168"/>
+          </a:xfrm>
+          <a:prstGeom prst="rect">
+            <a:avLst/>
+          </a:prstGeom>
+          <a:noFill/>
+        </p:spPr>
+        <p:txBody>
+          <a:bodyPr wrap="square">
+            <a:spAutoFit/>
+          </a:bodyPr>
+          <a:lstStyle/>
+          <a:p>
+            <a:pPr algn="l"/>
+            <a:r>
+              <a:rPr sz="950" b="1" i="0">
+                <a:solidFill>
+                  <a:srgbClr val="1C1A17"/>
+                </a:solidFill>
+              </a:rPr>
+              <a:t>hrms-stage-policy-signoff</a:t>
+            </a:r>
+          </a:p>
+        </p:txBody>
+      </p:sp>
+      <p:sp>
+        <p:nvSpPr>
+          <p:cNvPr id="60" name="TextBox 59"/>
+          <p:cNvSpPr txBox="1"/>
+          <p:nvPr/>
+        </p:nvSpPr>
+        <p:spPr>
+          <a:xfrm>
+            <a:off x="6419088" y="4114800"/>
+            <a:ext cx="5029200" cy="201168"/>
+          </a:xfrm>
+          <a:prstGeom prst="rect">
+            <a:avLst/>
+          </a:prstGeom>
+          <a:noFill/>
+        </p:spPr>
+        <p:txBody>
+          <a:bodyPr wrap="square">
+            <a:spAutoFit/>
+          </a:bodyPr>
+          <a:lstStyle/>
+          <a:p>
+            <a:pPr algn="l"/>
+            <a:r>
+              <a:rPr sz="900" b="0" i="0">
+                <a:solidFill>
+                  <a:srgbClr val="2E5A4D"/>
+                </a:solidFill>
+              </a:rPr>
+              <a:t>ses:SendEmail / ses:SendRawEmail  ·  arn:aws:ses:&lt;region&gt;:&lt;account&gt;:identity/*</a:t>
+            </a:r>
+          </a:p>
+        </p:txBody>
+      </p:sp>
+      <p:sp>
+        <p:nvSpPr>
+          <p:cNvPr id="61" name="Rectangle 60"/>
+          <p:cNvSpPr/>
+          <p:nvPr/>
+        </p:nvSpPr>
+        <p:spPr>
+          <a:xfrm>
+            <a:off x="6263640" y="4425696"/>
+            <a:ext cx="5394960" cy="475488"/>
+          </a:xfrm>
+          <a:prstGeom prst="rect">
+            <a:avLst/>
+          </a:prstGeom>
+          <a:solidFill>
+            <a:srgbClr val="FFFFFF"/>
+          </a:solidFill>
+          <a:ln w="9525">
+            <a:solidFill>
+              <a:srgbClr val="E8E5DE"/>
+            </a:solidFill>
+          </a:ln>
+        </p:spPr>
+        <p:style>
+          <a:lnRef idx="1">
+            <a:schemeClr val="accent1"/>
+          </a:lnRef>
+          <a:fillRef idx="3">
+            <a:schemeClr val="accent1"/>
+          </a:fillRef>
+          <a:effectRef idx="2">
+            <a:schemeClr val="accent1"/>
+          </a:effectRef>
+          <a:fontRef idx="minor">
+            <a:schemeClr val="lt1"/>
+          </a:fontRef>
+        </p:style>
+        <p:txBody>
+          <a:bodyPr rtlCol="0" anchor="ctr"/>
+          <a:lstStyle/>
+          <a:p>
+            <a:pPr algn="ctr"/>
+          </a:p>
+        </p:txBody>
+      </p:sp>
+      <p:sp>
+        <p:nvSpPr>
+          <p:cNvPr id="62" name="Rectangle 61"/>
+          <p:cNvSpPr/>
+          <p:nvPr/>
+        </p:nvSpPr>
+        <p:spPr>
+          <a:xfrm>
+            <a:off x="6263640" y="4425696"/>
+            <a:ext cx="36576" cy="475488"/>
+          </a:xfrm>
+          <a:prstGeom prst="rect">
+            <a:avLst/>
+          </a:prstGeom>
+          <a:solidFill>
+            <a:srgbClr val="4A7C6B"/>
+          </a:solidFill>
+          <a:ln>
+            <a:noFill/>
+          </a:ln>
+        </p:spPr>
+        <p:style>
+          <a:lnRef idx="1">
+            <a:schemeClr val="accent1"/>
+          </a:lnRef>
+          <a:fillRef idx="3">
+            <a:schemeClr val="accent1"/>
+          </a:fillRef>
+          <a:effectRef idx="2">
+            <a:schemeClr val="accent1"/>
+          </a:effectRef>
+          <a:fontRef idx="minor">
+            <a:schemeClr val="lt1"/>
+          </a:fontRef>
+        </p:style>
+        <p:txBody>
+          <a:bodyPr rtlCol="0" anchor="ctr"/>
+          <a:lstStyle/>
+          <a:p>
+            <a:pPr algn="ctr"/>
+          </a:p>
+        </p:txBody>
+      </p:sp>
+      <p:sp>
+        <p:nvSpPr>
+          <p:cNvPr id="63" name="TextBox 62"/>
+          <p:cNvSpPr txBox="1"/>
+          <p:nvPr/>
+        </p:nvSpPr>
+        <p:spPr>
+          <a:xfrm>
+            <a:off x="6419088" y="4462272"/>
+            <a:ext cx="5029200" cy="201168"/>
+          </a:xfrm>
+          <a:prstGeom prst="rect">
+            <a:avLst/>
+          </a:prstGeom>
+          <a:noFill/>
+        </p:spPr>
+        <p:txBody>
+          <a:bodyPr wrap="square">
+            <a:spAutoFit/>
+          </a:bodyPr>
+          <a:lstStyle/>
+          <a:p>
+            <a:pPr algn="l"/>
+            <a:r>
+              <a:rPr sz="950" b="1" i="0">
+                <a:solidFill>
+                  <a:srgbClr val="1C1A17"/>
+                </a:solidFill>
+              </a:rPr>
+              <a:t>hrms-stage-manager-intro</a:t>
+            </a:r>
+          </a:p>
+        </p:txBody>
+      </p:sp>
+      <p:sp>
+        <p:nvSpPr>
+          <p:cNvPr id="64" name="TextBox 63"/>
+          <p:cNvSpPr txBox="1"/>
+          <p:nvPr/>
+        </p:nvSpPr>
+        <p:spPr>
+          <a:xfrm>
+            <a:off x="6419088" y="4663440"/>
+            <a:ext cx="5029200" cy="201168"/>
+          </a:xfrm>
+          <a:prstGeom prst="rect">
+            <a:avLst/>
+          </a:prstGeom>
+          <a:noFill/>
+        </p:spPr>
+        <p:txBody>
+          <a:bodyPr wrap="square">
+            <a:spAutoFit/>
+          </a:bodyPr>
+          <a:lstStyle/>
+          <a:p>
+            <a:pPr algn="l"/>
+            <a:r>
+              <a:rPr sz="900" b="0" i="0">
+                <a:solidFill>
+                  <a:srgbClr val="2E5A4D"/>
+                </a:solidFill>
+              </a:rPr>
+              <a:t>ses:SendEmail / ses:SendRawEmail  ·  arn:aws:ses:&lt;region&gt;:&lt;account&gt;:identity/*</a:t>
+            </a:r>
+          </a:p>
+        </p:txBody>
+      </p:sp>
+      <p:sp>
+        <p:nvSpPr>
+          <p:cNvPr id="65" name="Rectangle 64"/>
+          <p:cNvSpPr/>
+          <p:nvPr/>
+        </p:nvSpPr>
+        <p:spPr>
+          <a:xfrm>
+            <a:off x="6263640" y="4974336"/>
+            <a:ext cx="5394960" cy="475488"/>
+          </a:xfrm>
+          <a:prstGeom prst="rect">
+            <a:avLst/>
+          </a:prstGeom>
+          <a:solidFill>
+            <a:srgbClr val="FFFFFF"/>
+          </a:solidFill>
+          <a:ln w="9525">
+            <a:solidFill>
+              <a:srgbClr val="E8E5DE"/>
+            </a:solidFill>
+          </a:ln>
+        </p:spPr>
+        <p:style>
+          <a:lnRef idx="1">
+            <a:schemeClr val="accent1"/>
+          </a:lnRef>
+          <a:fillRef idx="3">
+            <a:schemeClr val="accent1"/>
+          </a:fillRef>
+          <a:effectRef idx="2">
+            <a:schemeClr val="accent1"/>
+          </a:effectRef>
+          <a:fontRef idx="minor">
+            <a:schemeClr val="lt1"/>
+          </a:fontRef>
+        </p:style>
+        <p:txBody>
+          <a:bodyPr rtlCol="0" anchor="ctr"/>
+          <a:lstStyle/>
+          <a:p>
+            <a:pPr algn="ctr"/>
+          </a:p>
+        </p:txBody>
+      </p:sp>
+      <p:sp>
+        <p:nvSpPr>
+          <p:cNvPr id="66" name="Rectangle 65"/>
+          <p:cNvSpPr/>
+          <p:nvPr/>
+        </p:nvSpPr>
+        <p:spPr>
+          <a:xfrm>
+            <a:off x="6263640" y="4974336"/>
+            <a:ext cx="36576" cy="475488"/>
+          </a:xfrm>
+          <a:prstGeom prst="rect">
+            <a:avLst/>
+          </a:prstGeom>
+          <a:solidFill>
+            <a:srgbClr val="4A7C6B"/>
+          </a:solidFill>
+          <a:ln>
+            <a:noFill/>
+          </a:ln>
+        </p:spPr>
+        <p:style>
+          <a:lnRef idx="1">
+            <a:schemeClr val="accent1"/>
+          </a:lnRef>
+          <a:fillRef idx="3">
+            <a:schemeClr val="accent1"/>
+          </a:fillRef>
+          <a:effectRef idx="2">
+            <a:schemeClr val="accent1"/>
+          </a:effectRef>
+          <a:fontRef idx="minor">
+            <a:schemeClr val="lt1"/>
+          </a:fontRef>
+        </p:style>
+        <p:txBody>
+          <a:bodyPr rtlCol="0" anchor="ctr"/>
+          <a:lstStyle/>
+          <a:p>
+            <a:pPr algn="ctr"/>
+          </a:p>
+        </p:txBody>
+      </p:sp>
+      <p:sp>
+        <p:nvSpPr>
+          <p:cNvPr id="67" name="TextBox 66"/>
+          <p:cNvSpPr txBox="1"/>
+          <p:nvPr/>
+        </p:nvSpPr>
+        <p:spPr>
+          <a:xfrm>
+            <a:off x="6419088" y="5010912"/>
+            <a:ext cx="5029200" cy="201168"/>
+          </a:xfrm>
+          <a:prstGeom prst="rect">
+            <a:avLst/>
+          </a:prstGeom>
+          <a:noFill/>
+        </p:spPr>
+        <p:txBody>
+          <a:bodyPr wrap="square">
+            <a:spAutoFit/>
+          </a:bodyPr>
+          <a:lstStyle/>
+          <a:p>
+            <a:pPr algn="l"/>
+            <a:r>
+              <a:rPr sz="950" b="1" i="0">
+                <a:solidFill>
+                  <a:srgbClr val="1C1A17"/>
+                </a:solidFill>
+              </a:rPr>
+              <a:t>hrms-send-reminder</a:t>
+            </a:r>
+          </a:p>
+        </p:txBody>
+      </p:sp>
+      <p:sp>
+        <p:nvSpPr>
+          <p:cNvPr id="68" name="TextBox 67"/>
+          <p:cNvSpPr txBox="1"/>
+          <p:nvPr/>
+        </p:nvSpPr>
+        <p:spPr>
+          <a:xfrm>
+            <a:off x="6419088" y="5212080"/>
+            <a:ext cx="5029200" cy="201168"/>
+          </a:xfrm>
+          <a:prstGeom prst="rect">
+            <a:avLst/>
+          </a:prstGeom>
+          <a:noFill/>
+        </p:spPr>
+        <p:txBody>
+          <a:bodyPr wrap="square">
+            <a:spAutoFit/>
+          </a:bodyPr>
+          <a:lstStyle/>
+          <a:p>
+            <a:pPr algn="l"/>
+            <a:r>
+              <a:rPr sz="900" b="0" i="0">
+                <a:solidFill>
+                  <a:srgbClr val="2E5A4D"/>
+                </a:solidFill>
+              </a:rPr>
+              <a:t>ses:SendEmail / ses:SendRawEmail  ·  arn:aws:ses:&lt;region&gt;:&lt;account&gt;:identity/*</a:t>
+            </a:r>
+          </a:p>
+        </p:txBody>
+      </p:sp>
+      <p:sp>
+        <p:nvSpPr>
+          <p:cNvPr id="69" name="Rectangle 68"/>
+          <p:cNvSpPr/>
+          <p:nvPr/>
+        </p:nvSpPr>
+        <p:spPr>
+          <a:xfrm>
+            <a:off x="6263640" y="5522976"/>
+            <a:ext cx="5394960" cy="475488"/>
+          </a:xfrm>
+          <a:prstGeom prst="rect">
+            <a:avLst/>
+          </a:prstGeom>
+          <a:solidFill>
+            <a:srgbClr val="FFFFFF"/>
+          </a:solidFill>
+          <a:ln w="9525">
+            <a:solidFill>
+              <a:srgbClr val="E8E5DE"/>
+            </a:solidFill>
+          </a:ln>
+        </p:spPr>
+        <p:style>
+          <a:lnRef idx="1">
+            <a:schemeClr val="accent1"/>
+          </a:lnRef>
+          <a:fillRef idx="3">
+            <a:schemeClr val="accent1"/>
+          </a:fillRef>
+          <a:effectRef idx="2">
+            <a:schemeClr val="accent1"/>
+          </a:effectRef>
+          <a:fontRef idx="minor">
+            <a:schemeClr val="lt1"/>
+          </a:fontRef>
+        </p:style>
+        <p:txBody>
+          <a:bodyPr rtlCol="0" anchor="ctr"/>
+          <a:lstStyle/>
+          <a:p>
+            <a:pPr algn="ctr"/>
+          </a:p>
+        </p:txBody>
+      </p:sp>
+      <p:sp>
+        <p:nvSpPr>
+          <p:cNvPr id="70" name="Rectangle 69"/>
+          <p:cNvSpPr/>
+          <p:nvPr/>
+        </p:nvSpPr>
+        <p:spPr>
+          <a:xfrm>
+            <a:off x="6263640" y="5522976"/>
+            <a:ext cx="36576" cy="475488"/>
+          </a:xfrm>
+          <a:prstGeom prst="rect">
+            <a:avLst/>
+          </a:prstGeom>
+          <a:solidFill>
+            <a:srgbClr val="4A7C6B"/>
+          </a:solidFill>
+          <a:ln>
+            <a:noFill/>
+          </a:ln>
+        </p:spPr>
+        <p:style>
+          <a:lnRef idx="1">
+            <a:schemeClr val="accent1"/>
+          </a:lnRef>
+          <a:fillRef idx="3">
+            <a:schemeClr val="accent1"/>
+          </a:fillRef>
+          <a:effectRef idx="2">
+            <a:schemeClr val="accent1"/>
+          </a:effectRef>
+          <a:fontRef idx="minor">
+            <a:schemeClr val="lt1"/>
+          </a:fontRef>
+        </p:style>
+        <p:txBody>
+          <a:bodyPr rtlCol="0" anchor="ctr"/>
+          <a:lstStyle/>
+          <a:p>
+            <a:pPr algn="ctr"/>
+          </a:p>
+        </p:txBody>
+      </p:sp>
+      <p:sp>
+        <p:nvSpPr>
+          <p:cNvPr id="71" name="TextBox 70"/>
+          <p:cNvSpPr txBox="1"/>
+          <p:nvPr/>
+        </p:nvSpPr>
+        <p:spPr>
+          <a:xfrm>
+            <a:off x="6419088" y="5559552"/>
+            <a:ext cx="5029200" cy="201168"/>
+          </a:xfrm>
+          <a:prstGeom prst="rect">
+            <a:avLst/>
+          </a:prstGeom>
+          <a:noFill/>
+        </p:spPr>
+        <p:txBody>
+          <a:bodyPr wrap="square">
+            <a:spAutoFit/>
+          </a:bodyPr>
+          <a:lstStyle/>
+          <a:p>
+            <a:pPr algn="l"/>
+            <a:r>
+              <a:rPr sz="950" b="1" i="0">
+                <a:solidFill>
+                  <a:srgbClr val="1C1A17"/>
+                </a:solidFill>
+              </a:rPr>
+              <a:t>hrms-document-upload-trigger</a:t>
+            </a:r>
+          </a:p>
+        </p:txBody>
+      </p:sp>
+      <p:sp>
+        <p:nvSpPr>
+          <p:cNvPr id="72" name="TextBox 71"/>
+          <p:cNvSpPr txBox="1"/>
+          <p:nvPr/>
+        </p:nvSpPr>
+        <p:spPr>
+          <a:xfrm>
+            <a:off x="6419088" y="5760720"/>
+            <a:ext cx="5029200" cy="201168"/>
+          </a:xfrm>
+          <a:prstGeom prst="rect">
+            <a:avLst/>
+          </a:prstGeom>
+          <a:noFill/>
+        </p:spPr>
+        <p:txBody>
+          <a:bodyPr wrap="square">
+            <a:spAutoFit/>
+          </a:bodyPr>
+          <a:lstStyle/>
+          <a:p>
+            <a:pPr algn="l"/>
+            <a:r>
+              <a:rPr sz="900" b="0" i="0">
+                <a:solidFill>
+                  <a:srgbClr val="2E5A4D"/>
+                </a:solidFill>
+              </a:rPr>
+              <a:t>ses:SendEmail / ses:SendRawEmail  ·  arn:aws:ses:&lt;region&gt;:&lt;account&gt;:identity/*</a:t>
+            </a:r>
+          </a:p>
+        </p:txBody>
+      </p:sp>
+      <p:sp>
+        <p:nvSpPr>
+          <p:cNvPr id="73" name="Rectangle 72"/>
+          <p:cNvSpPr/>
+          <p:nvPr/>
+        </p:nvSpPr>
+        <p:spPr>
+          <a:xfrm>
+            <a:off x="502920" y="6126480"/>
+            <a:ext cx="11155680" cy="12700"/>
+          </a:xfrm>
+          <a:prstGeom prst="rect">
+            <a:avLst/>
+          </a:prstGeom>
+          <a:solidFill>
+            <a:srgbClr val="E8E5DE"/>
+          </a:solidFill>
+          <a:ln>
+            <a:noFill/>
+          </a:ln>
+        </p:spPr>
+        <p:style>
+          <a:lnRef idx="1">
+            <a:schemeClr val="accent1"/>
+          </a:lnRef>
+          <a:fillRef idx="3">
+            <a:schemeClr val="accent1"/>
+          </a:fillRef>
+          <a:effectRef idx="2">
+            <a:schemeClr val="accent1"/>
+          </a:effectRef>
+          <a:fontRef idx="minor">
+            <a:schemeClr val="lt1"/>
+          </a:fontRef>
+        </p:style>
+        <p:txBody>
+          <a:bodyPr rtlCol="0" anchor="ctr"/>
+          <a:lstStyle/>
+          <a:p>
+            <a:pPr algn="ctr"/>
+          </a:p>
+        </p:txBody>
+      </p:sp>
+      <p:sp>
+        <p:nvSpPr>
+          <p:cNvPr id="74" name="TextBox 73"/>
+          <p:cNvSpPr txBox="1"/>
+          <p:nvPr/>
+        </p:nvSpPr>
+        <p:spPr>
+          <a:xfrm>
+            <a:off x="502920" y="6236208"/>
+            <a:ext cx="11155680" cy="256032"/>
+          </a:xfrm>
+          <a:prstGeom prst="rect">
+            <a:avLst/>
+          </a:prstGeom>
+          <a:noFill/>
+        </p:spPr>
+        <p:txBody>
+          <a:bodyPr wrap="square">
+            <a:spAutoFit/>
+          </a:bodyPr>
+          <a:lstStyle/>
+          <a:p>
+            <a:pPr algn="ctr"/>
+            <a:r>
+              <a:rPr sz="1000" b="0" i="1">
+                <a:solidFill>
+                  <a:srgbClr val="8C8880"/>
+                </a:solidFill>
+              </a:rPr>
+              <a:t>Also added: xray:PutTraceSegments + xray:PutTelemetryRecords on all Lambdas · Cognito + Step Functions were already resource-scoped ✓</a:t>
+            </a:r>
+          </a:p>
+        </p:txBody>
+      </p:sp>
+    </p:spTree>
+  </p:cSld>
+  <p:clrMapOvr>
+    <a:masterClrMapping/>
+  </p:clrMapOvr>
+</p:sld>
+</file>
+
+<file path=ppt/slides/slide19.xml><?xml version="1.0" encoding="utf-8"?>
+<p:sld xmlns:a="http://schemas.openxmlformats.org/drawingml/2006/main" xmlns:p="http://schemas.openxmlformats.org/presentationml/2006/main" xmlns:r="http://schemas.openxmlformats.org/officeDocument/2006/relationships">
+  <p:cSld>
+    <p:spTree>
+      <p:nvGrpSpPr>
+        <p:cNvPr id="1" name=""/>
+        <p:cNvGrpSpPr/>
+        <p:nvPr/>
+      </p:nvGrpSpPr>
+      <p:grpSpPr/>
+      <p:sp>
+        <p:nvSpPr>
+          <p:cNvPr id="2" name="Rectangle 1"/>
+          <p:cNvSpPr/>
+          <p:nvPr/>
+        </p:nvSpPr>
+        <p:spPr>
+          <a:xfrm>
+            <a:off x="0" y="0"/>
+            <a:ext cx="12188952" cy="6858000"/>
+          </a:xfrm>
+          <a:prstGeom prst="rect">
+            <a:avLst/>
+          </a:prstGeom>
+          <a:solidFill>
+            <a:srgbClr val="F7F6F3"/>
+          </a:solidFill>
+          <a:ln>
+            <a:noFill/>
+          </a:ln>
+        </p:spPr>
+        <p:style>
+          <a:lnRef idx="1">
+            <a:schemeClr val="accent1"/>
+          </a:lnRef>
+          <a:fillRef idx="3">
+            <a:schemeClr val="accent1"/>
+          </a:fillRef>
+          <a:effectRef idx="2">
+            <a:schemeClr val="accent1"/>
+          </a:effectRef>
+          <a:fontRef idx="minor">
+            <a:schemeClr val="lt1"/>
+          </a:fontRef>
+        </p:style>
+        <p:txBody>
+          <a:bodyPr rtlCol="0" anchor="ctr"/>
+          <a:lstStyle/>
+          <a:p>
+            <a:pPr algn="ctr"/>
+          </a:p>
+        </p:txBody>
+      </p:sp>
+      <p:sp>
+        <p:nvSpPr>
+          <p:cNvPr id="3" name="Rectangle 2"/>
+          <p:cNvSpPr/>
+          <p:nvPr/>
+        </p:nvSpPr>
+        <p:spPr>
+          <a:xfrm>
+            <a:off x="0" y="0"/>
+            <a:ext cx="36576" cy="6858000"/>
+          </a:xfrm>
+          <a:prstGeom prst="rect">
+            <a:avLst/>
+          </a:prstGeom>
+          <a:solidFill>
+            <a:srgbClr val="4A7C6B"/>
+          </a:solidFill>
+          <a:ln>
+            <a:noFill/>
+          </a:ln>
+        </p:spPr>
+        <p:style>
+          <a:lnRef idx="1">
+            <a:schemeClr val="accent1"/>
+          </a:lnRef>
+          <a:fillRef idx="3">
+            <a:schemeClr val="accent1"/>
+          </a:fillRef>
+          <a:effectRef idx="2">
+            <a:schemeClr val="accent1"/>
+          </a:effectRef>
+          <a:fontRef idx="minor">
+            <a:schemeClr val="lt1"/>
+          </a:fontRef>
+        </p:style>
+        <p:txBody>
+          <a:bodyPr rtlCol="0" anchor="ctr"/>
+          <a:lstStyle/>
+          <a:p>
+            <a:pPr algn="ctr"/>
+          </a:p>
+        </p:txBody>
+      </p:sp>
+      <p:sp>
+        <p:nvSpPr>
+          <p:cNvPr id="4" name="Rectangle 3"/>
+          <p:cNvSpPr/>
+          <p:nvPr/>
+        </p:nvSpPr>
+        <p:spPr>
+          <a:xfrm>
+            <a:off x="502920" y="292608"/>
+            <a:ext cx="274320" cy="274320"/>
+          </a:xfrm>
+          <a:prstGeom prst="rect">
+            <a:avLst/>
+          </a:prstGeom>
+          <a:solidFill>
+            <a:srgbClr val="4A7C6B"/>
+          </a:solidFill>
+          <a:ln>
+            <a:noFill/>
+          </a:ln>
+        </p:spPr>
+        <p:style>
+          <a:lnRef idx="1">
+            <a:schemeClr val="accent1"/>
+          </a:lnRef>
+          <a:fillRef idx="3">
+            <a:schemeClr val="accent1"/>
+          </a:fillRef>
+          <a:effectRef idx="2">
+            <a:schemeClr val="accent1"/>
+          </a:effectRef>
+          <a:fontRef idx="minor">
+            <a:schemeClr val="lt1"/>
+          </a:fontRef>
+        </p:style>
+        <p:txBody>
+          <a:bodyPr rtlCol="0" anchor="ctr"/>
+          <a:lstStyle/>
+          <a:p>
+            <a:pPr algn="ctr"/>
+          </a:p>
+        </p:txBody>
+      </p:sp>
+      <p:sp>
+        <p:nvSpPr>
+          <p:cNvPr id="5" name="Rectangle 4"/>
+          <p:cNvSpPr/>
+          <p:nvPr/>
+        </p:nvSpPr>
+        <p:spPr>
+          <a:xfrm>
+            <a:off x="563270" y="352958"/>
+            <a:ext cx="153619" cy="153619"/>
+          </a:xfrm>
+          <a:prstGeom prst="rect">
+            <a:avLst/>
+          </a:prstGeom>
+          <a:solidFill>
+            <a:srgbClr val="EBF3EF"/>
+          </a:solidFill>
+          <a:ln>
+            <a:noFill/>
+          </a:ln>
+        </p:spPr>
+        <p:style>
+          <a:lnRef idx="1">
+            <a:schemeClr val="accent1"/>
+          </a:lnRef>
+          <a:fillRef idx="3">
+            <a:schemeClr val="accent1"/>
+          </a:fillRef>
+          <a:effectRef idx="2">
+            <a:schemeClr val="accent1"/>
+          </a:effectRef>
+          <a:fontRef idx="minor">
+            <a:schemeClr val="lt1"/>
+          </a:fontRef>
+        </p:style>
+        <p:txBody>
+          <a:bodyPr rtlCol="0" anchor="ctr"/>
+          <a:lstStyle/>
+          <a:p>
+            <a:pPr algn="ctr"/>
+          </a:p>
+        </p:txBody>
+      </p:sp>
+      <p:sp>
+        <p:nvSpPr>
+          <p:cNvPr id="6" name="TextBox 5"/>
+          <p:cNvSpPr txBox="1"/>
+          <p:nvPr/>
+        </p:nvSpPr>
+        <p:spPr>
+          <a:xfrm>
+            <a:off x="868680" y="292608"/>
+            <a:ext cx="2743200" cy="274320"/>
+          </a:xfrm>
+          <a:prstGeom prst="rect">
+            <a:avLst/>
+          </a:prstGeom>
+          <a:noFill/>
+        </p:spPr>
+        <p:txBody>
+          <a:bodyPr wrap="square">
+            <a:spAutoFit/>
+          </a:bodyPr>
+          <a:lstStyle/>
+          <a:p>
+            <a:pPr algn="l"/>
+            <a:r>
+              <a:rPr sz="1100" b="1" i="0">
+                <a:solidFill>
+                  <a:srgbClr val="1C1A17"/>
+                </a:solidFill>
+              </a:rPr>
+              <a:t>OnboardIQ</a:t>
+            </a:r>
+          </a:p>
+        </p:txBody>
+      </p:sp>
+      <p:sp>
+        <p:nvSpPr>
+          <p:cNvPr id="7" name="Rectangle 6"/>
+          <p:cNvSpPr/>
+          <p:nvPr/>
+        </p:nvSpPr>
+        <p:spPr>
+          <a:xfrm>
+            <a:off x="10515600" y="246888"/>
+            <a:ext cx="1170432" cy="256032"/>
+          </a:xfrm>
+          <a:prstGeom prst="rect">
+            <a:avLst/>
+          </a:prstGeom>
+          <a:solidFill>
+            <a:srgbClr val="EBF3EF"/>
+          </a:solidFill>
+          <a:ln>
+            <a:noFill/>
+          </a:ln>
+        </p:spPr>
+        <p:style>
+          <a:lnRef idx="1">
+            <a:schemeClr val="accent1"/>
+          </a:lnRef>
+          <a:fillRef idx="3">
+            <a:schemeClr val="accent1"/>
+          </a:fillRef>
+          <a:effectRef idx="2">
+            <a:schemeClr val="accent1"/>
+          </a:effectRef>
+          <a:fontRef idx="minor">
+            <a:schemeClr val="lt1"/>
+          </a:fontRef>
+        </p:style>
+        <p:txBody>
+          <a:bodyPr rtlCol="0" anchor="ctr"/>
+          <a:lstStyle/>
+          <a:p>
+            <a:pPr algn="ctr"/>
+          </a:p>
+        </p:txBody>
+      </p:sp>
+      <p:sp>
+        <p:nvSpPr>
+          <p:cNvPr id="8" name="TextBox 7"/>
+          <p:cNvSpPr txBox="1"/>
+          <p:nvPr/>
+        </p:nvSpPr>
+        <p:spPr>
+          <a:xfrm>
+            <a:off x="10515600" y="246888"/>
+            <a:ext cx="1170432" cy="256032"/>
+          </a:xfrm>
+          <a:prstGeom prst="rect">
+            <a:avLst/>
+          </a:prstGeom>
+          <a:noFill/>
+        </p:spPr>
+        <p:txBody>
+          <a:bodyPr wrap="square">
+            <a:spAutoFit/>
+          </a:bodyPr>
+          <a:lstStyle/>
+          <a:p>
+            <a:pPr algn="ctr"/>
+            <a:r>
+              <a:rPr sz="900" b="1" i="0">
+                <a:solidFill>
+                  <a:srgbClr val="4A7C6B"/>
+                </a:solidFill>
+              </a:rPr>
+              <a:t>COST</a:t>
+            </a:r>
+          </a:p>
+        </p:txBody>
+      </p:sp>
+      <p:sp>
+        <p:nvSpPr>
+          <p:cNvPr id="9" name="Rectangle 8"/>
+          <p:cNvSpPr/>
+          <p:nvPr/>
+        </p:nvSpPr>
+        <p:spPr>
+          <a:xfrm>
+            <a:off x="502920" y="658368"/>
+            <a:ext cx="11155680" cy="12700"/>
+          </a:xfrm>
+          <a:prstGeom prst="rect">
+            <a:avLst/>
+          </a:prstGeom>
+          <a:solidFill>
+            <a:srgbClr val="E8E5DE"/>
+          </a:solidFill>
+          <a:ln>
+            <a:noFill/>
+          </a:ln>
+        </p:spPr>
+        <p:style>
+          <a:lnRef idx="1">
+            <a:schemeClr val="accent1"/>
+          </a:lnRef>
+          <a:fillRef idx="3">
+            <a:schemeClr val="accent1"/>
+          </a:fillRef>
+          <a:effectRef idx="2">
+            <a:schemeClr val="accent1"/>
+          </a:effectRef>
+          <a:fontRef idx="minor">
+            <a:schemeClr val="lt1"/>
+          </a:fontRef>
+        </p:style>
+        <p:txBody>
+          <a:bodyPr rtlCol="0" anchor="ctr"/>
+          <a:lstStyle/>
+          <a:p>
+            <a:pPr algn="ctr"/>
+          </a:p>
+        </p:txBody>
+      </p:sp>
+      <p:sp>
+        <p:nvSpPr>
+          <p:cNvPr id="10" name="TextBox 9"/>
+          <p:cNvSpPr txBox="1"/>
+          <p:nvPr/>
+        </p:nvSpPr>
+        <p:spPr>
+          <a:xfrm>
+            <a:off x="502920" y="777240"/>
+            <a:ext cx="9144000" cy="594360"/>
+          </a:xfrm>
+          <a:prstGeom prst="rect">
+            <a:avLst/>
+          </a:prstGeom>
+          <a:noFill/>
+        </p:spPr>
+        <p:txBody>
+          <a:bodyPr wrap="square">
+            <a:spAutoFit/>
+          </a:bodyPr>
+          <a:lstStyle/>
+          <a:p>
+            <a:pPr algn="l"/>
+            <a:r>
+              <a:rPr sz="2800" b="1" i="0">
+                <a:solidFill>
+                  <a:srgbClr val="1C1A17"/>
+                </a:solidFill>
+              </a:rPr>
+              <a:t>Cost Estimate — 50 Users / Day</a:t>
+            </a:r>
+          </a:p>
+        </p:txBody>
+      </p:sp>
+      <p:sp>
+        <p:nvSpPr>
+          <p:cNvPr id="11" name="TextBox 10"/>
+          <p:cNvSpPr txBox="1"/>
+          <p:nvPr/>
+        </p:nvSpPr>
+        <p:spPr>
+          <a:xfrm>
+            <a:off x="502920" y="1325880"/>
+            <a:ext cx="10058400" cy="320040"/>
+          </a:xfrm>
+          <a:prstGeom prst="rect">
+            <a:avLst/>
+          </a:prstGeom>
+          <a:noFill/>
+        </p:spPr>
+        <p:txBody>
+          <a:bodyPr wrap="square">
+            <a:spAutoFit/>
+          </a:bodyPr>
+          <a:lstStyle/>
+          <a:p>
+            <a:pPr algn="l"/>
+            <a:r>
+              <a:rPr sz="1300" b="0" i="0">
+                <a:solidFill>
+                  <a:srgbClr val="5C5852"/>
+                </a:solidFill>
+              </a:rPr>
+              <a:t>All services itemised · ap-south-1 · April 2026 · includes observability layer.</a:t>
+            </a:r>
+          </a:p>
+        </p:txBody>
+      </p:sp>
+      <p:sp>
+        <p:nvSpPr>
+          <p:cNvPr id="12" name="Rectangle 11"/>
+          <p:cNvSpPr/>
+          <p:nvPr/>
+        </p:nvSpPr>
+        <p:spPr>
+          <a:xfrm>
+            <a:off x="502920" y="1664208"/>
+            <a:ext cx="11155680" cy="12700"/>
+          </a:xfrm>
+          <a:prstGeom prst="rect">
+            <a:avLst/>
+          </a:prstGeom>
+          <a:solidFill>
+            <a:srgbClr val="E8E5DE"/>
+          </a:solidFill>
+          <a:ln>
+            <a:noFill/>
+          </a:ln>
+        </p:spPr>
+        <p:style>
+          <a:lnRef idx="1">
+            <a:schemeClr val="accent1"/>
+          </a:lnRef>
+          <a:fillRef idx="3">
+            <a:schemeClr val="accent1"/>
+          </a:fillRef>
+          <a:effectRef idx="2">
+            <a:schemeClr val="accent1"/>
+          </a:effectRef>
+          <a:fontRef idx="minor">
+            <a:schemeClr val="lt1"/>
+          </a:fontRef>
+        </p:style>
+        <p:txBody>
+          <a:bodyPr rtlCol="0" anchor="ctr"/>
+          <a:lstStyle/>
+          <a:p>
+            <a:pPr algn="ctr"/>
+          </a:p>
+        </p:txBody>
+      </p:sp>
+      <p:sp>
+        <p:nvSpPr>
+          <p:cNvPr id="13" name="Rectangle 12"/>
+          <p:cNvSpPr/>
+          <p:nvPr/>
+        </p:nvSpPr>
+        <p:spPr>
+          <a:xfrm>
+            <a:off x="502920" y="1828800"/>
+            <a:ext cx="11155680" cy="310896"/>
+          </a:xfrm>
+          <a:prstGeom prst="rect">
+            <a:avLst/>
+          </a:prstGeom>
+          <a:solidFill>
+            <a:srgbClr val="EFEDE8"/>
+          </a:solidFill>
+          <a:ln>
+            <a:noFill/>
+          </a:ln>
+        </p:spPr>
+        <p:style>
+          <a:lnRef idx="1">
+            <a:schemeClr val="accent1"/>
+          </a:lnRef>
+          <a:fillRef idx="3">
+            <a:schemeClr val="accent1"/>
+          </a:fillRef>
+          <a:effectRef idx="2">
+            <a:schemeClr val="accent1"/>
+          </a:effectRef>
+          <a:fontRef idx="minor">
+            <a:schemeClr val="lt1"/>
+          </a:fontRef>
+        </p:style>
+        <p:txBody>
+          <a:bodyPr rtlCol="0" anchor="ctr"/>
+          <a:lstStyle/>
+          <a:p>
+            <a:pPr algn="ctr"/>
+          </a:p>
+        </p:txBody>
+      </p:sp>
+      <p:sp>
+        <p:nvSpPr>
+          <p:cNvPr id="14" name="TextBox 13"/>
+          <p:cNvSpPr txBox="1"/>
+          <p:nvPr/>
+        </p:nvSpPr>
+        <p:spPr>
+          <a:xfrm>
+            <a:off x="658368" y="1874519"/>
+            <a:ext cx="2286000" cy="237744"/>
+          </a:xfrm>
+          <a:prstGeom prst="rect">
+            <a:avLst/>
+          </a:prstGeom>
+          <a:noFill/>
+        </p:spPr>
+        <p:txBody>
+          <a:bodyPr wrap="square">
+            <a:spAutoFit/>
+          </a:bodyPr>
+          <a:lstStyle/>
+          <a:p>
+            <a:pPr algn="l"/>
+            <a:r>
+              <a:rPr sz="1000" b="1" i="0">
+                <a:solidFill>
+                  <a:srgbClr val="5C5852"/>
+                </a:solidFill>
+              </a:rPr>
+              <a:t>Service</a:t>
+            </a:r>
+          </a:p>
+        </p:txBody>
+      </p:sp>
+      <p:sp>
+        <p:nvSpPr>
+          <p:cNvPr id="15" name="TextBox 14"/>
+          <p:cNvSpPr txBox="1"/>
+          <p:nvPr/>
+        </p:nvSpPr>
+        <p:spPr>
+          <a:xfrm>
+            <a:off x="2743200" y="1874519"/>
+            <a:ext cx="2286000" cy="237744"/>
+          </a:xfrm>
+          <a:prstGeom prst="rect">
+            <a:avLst/>
+          </a:prstGeom>
+          <a:noFill/>
+        </p:spPr>
+        <p:txBody>
+          <a:bodyPr wrap="square">
+            <a:spAutoFit/>
+          </a:bodyPr>
+          <a:lstStyle/>
+          <a:p>
+            <a:pPr algn="l"/>
+            <a:r>
+              <a:rPr sz="1000" b="1" i="0">
+                <a:solidFill>
+                  <a:srgbClr val="5C5852"/>
+                </a:solidFill>
+              </a:rPr>
+              <a:t>Monthly Usage</a:t>
+            </a:r>
+          </a:p>
+        </p:txBody>
+      </p:sp>
+      <p:sp>
+        <p:nvSpPr>
+          <p:cNvPr id="16" name="TextBox 15"/>
+          <p:cNvSpPr txBox="1"/>
+          <p:nvPr/>
+        </p:nvSpPr>
+        <p:spPr>
+          <a:xfrm>
+            <a:off x="6035040" y="1874519"/>
+            <a:ext cx="2286000" cy="237744"/>
+          </a:xfrm>
+          <a:prstGeom prst="rect">
+            <a:avLst/>
+          </a:prstGeom>
+          <a:noFill/>
+        </p:spPr>
+        <p:txBody>
+          <a:bodyPr wrap="square">
+            <a:spAutoFit/>
+          </a:bodyPr>
+          <a:lstStyle/>
+          <a:p>
+            <a:pPr algn="l"/>
+            <a:r>
+              <a:rPr sz="1000" b="1" i="0">
+                <a:solidFill>
+                  <a:srgbClr val="5C5852"/>
+                </a:solidFill>
+              </a:rPr>
+              <a:t>Cost</a:t>
+            </a:r>
+          </a:p>
+        </p:txBody>
+      </p:sp>
+      <p:sp>
+        <p:nvSpPr>
+          <p:cNvPr id="17" name="TextBox 16"/>
+          <p:cNvSpPr txBox="1"/>
+          <p:nvPr/>
+        </p:nvSpPr>
+        <p:spPr>
+          <a:xfrm>
+            <a:off x="7863840" y="1874519"/>
+            <a:ext cx="2286000" cy="237744"/>
+          </a:xfrm>
+          <a:prstGeom prst="rect">
+            <a:avLst/>
+          </a:prstGeom>
+          <a:noFill/>
+        </p:spPr>
+        <p:txBody>
+          <a:bodyPr wrap="square">
+            <a:spAutoFit/>
+          </a:bodyPr>
+          <a:lstStyle/>
+          <a:p>
+            <a:pPr algn="l"/>
+            <a:r>
+              <a:rPr sz="1000" b="1" i="0">
+                <a:solidFill>
+                  <a:srgbClr val="5C5852"/>
+                </a:solidFill>
+              </a:rPr>
+              <a:t>Pricing Basis</a:t>
+            </a:r>
+          </a:p>
+        </p:txBody>
+      </p:sp>
+      <p:sp>
+        <p:nvSpPr>
+          <p:cNvPr id="18" name="Rectangle 17"/>
+          <p:cNvSpPr/>
+          <p:nvPr/>
+        </p:nvSpPr>
+        <p:spPr>
+          <a:xfrm>
+            <a:off x="502920" y="2139696"/>
+            <a:ext cx="11155680" cy="438912"/>
+          </a:xfrm>
+          <a:prstGeom prst="rect">
+            <a:avLst/>
+          </a:prstGeom>
+          <a:solidFill>
+            <a:srgbClr val="FFFFFF"/>
+          </a:solidFill>
+          <a:ln>
+            <a:noFill/>
+          </a:ln>
+        </p:spPr>
+        <p:style>
+          <a:lnRef idx="1">
+            <a:schemeClr val="accent1"/>
+          </a:lnRef>
+          <a:fillRef idx="3">
+            <a:schemeClr val="accent1"/>
+          </a:fillRef>
+          <a:effectRef idx="2">
+            <a:schemeClr val="accent1"/>
+          </a:effectRef>
+          <a:fontRef idx="minor">
+            <a:schemeClr val="lt1"/>
+          </a:fontRef>
+        </p:style>
+        <p:txBody>
+          <a:bodyPr rtlCol="0" anchor="ctr"/>
+          <a:lstStyle/>
+          <a:p>
+            <a:pPr algn="ctr"/>
+          </a:p>
+        </p:txBody>
+      </p:sp>
+      <p:sp>
+        <p:nvSpPr>
+          <p:cNvPr id="19" name="Rectangle 18"/>
+          <p:cNvSpPr/>
+          <p:nvPr/>
+        </p:nvSpPr>
+        <p:spPr>
+          <a:xfrm>
+            <a:off x="502920" y="2139696"/>
+            <a:ext cx="36576" cy="438912"/>
+          </a:xfrm>
+          <a:prstGeom prst="rect">
+            <a:avLst/>
+          </a:prstGeom>
+          <a:solidFill>
+            <a:srgbClr val="4A7C6B"/>
+          </a:solidFill>
+          <a:ln>
+            <a:noFill/>
+          </a:ln>
+        </p:spPr>
+        <p:style>
+          <a:lnRef idx="1">
+            <a:schemeClr val="accent1"/>
+          </a:lnRef>
+          <a:fillRef idx="3">
+            <a:schemeClr val="accent1"/>
+          </a:fillRef>
+          <a:effectRef idx="2">
+            <a:schemeClr val="accent1"/>
+          </a:effectRef>
+          <a:fontRef idx="minor">
+            <a:schemeClr val="lt1"/>
+          </a:fontRef>
+        </p:style>
+        <p:txBody>
+          <a:bodyPr rtlCol="0" anchor="ctr"/>
+          <a:lstStyle/>
+          <a:p>
+            <a:pPr algn="ctr"/>
+          </a:p>
+        </p:txBody>
+      </p:sp>
+      <p:sp>
+        <p:nvSpPr>
+          <p:cNvPr id="20" name="TextBox 19"/>
+          <p:cNvSpPr txBox="1"/>
+          <p:nvPr/>
+        </p:nvSpPr>
+        <p:spPr>
+          <a:xfrm>
+            <a:off x="658368" y="2231136"/>
+            <a:ext cx="1920240" cy="256032"/>
+          </a:xfrm>
+          <a:prstGeom prst="rect">
+            <a:avLst/>
+          </a:prstGeom>
+          <a:noFill/>
+        </p:spPr>
+        <p:txBody>
+          <a:bodyPr wrap="square">
+            <a:spAutoFit/>
+          </a:bodyPr>
+          <a:lstStyle/>
+          <a:p>
+            <a:pPr algn="l"/>
+            <a:r>
+              <a:rPr sz="1100" b="1" i="0">
+                <a:solidFill>
+                  <a:srgbClr val="4A7C6B"/>
+                </a:solidFill>
+              </a:rPr>
+              <a:t>Lambda</a:t>
+            </a:r>
+          </a:p>
+        </p:txBody>
+      </p:sp>
+      <p:sp>
+        <p:nvSpPr>
+          <p:cNvPr id="21" name="TextBox 20"/>
+          <p:cNvSpPr txBox="1"/>
+          <p:nvPr/>
+        </p:nvSpPr>
+        <p:spPr>
+          <a:xfrm>
+            <a:off x="2743200" y="2231136"/>
+            <a:ext cx="3108960" cy="256032"/>
+          </a:xfrm>
+          <a:prstGeom prst="rect">
+            <a:avLst/>
+          </a:prstGeom>
+          <a:noFill/>
+        </p:spPr>
+        <p:txBody>
+          <a:bodyPr wrap="square">
+            <a:spAutoFit/>
+          </a:bodyPr>
+          <a:lstStyle/>
+          <a:p>
+            <a:pPr algn="l"/>
+            <a:r>
+              <a:rPr sz="1050" b="0" i="0">
+                <a:solidFill>
+                  <a:srgbClr val="5C5852"/>
+                </a:solidFill>
+              </a:rPr>
+              <a:t>31,000 invocations/mo</a:t>
+            </a:r>
+          </a:p>
+        </p:txBody>
+      </p:sp>
+      <p:sp>
+        <p:nvSpPr>
+          <p:cNvPr id="22" name="TextBox 21"/>
+          <p:cNvSpPr txBox="1"/>
+          <p:nvPr/>
+        </p:nvSpPr>
+        <p:spPr>
+          <a:xfrm>
+            <a:off x="6035040" y="2231136"/>
+            <a:ext cx="1463040" cy="256032"/>
+          </a:xfrm>
+          <a:prstGeom prst="rect">
+            <a:avLst/>
+          </a:prstGeom>
+          <a:noFill/>
+        </p:spPr>
+        <p:txBody>
+          <a:bodyPr wrap="square">
+            <a:spAutoFit/>
+          </a:bodyPr>
+          <a:lstStyle/>
+          <a:p>
+            <a:pPr algn="l"/>
+            <a:r>
+              <a:rPr sz="1150" b="1" i="0">
+                <a:solidFill>
+                  <a:srgbClr val="2E5A4D"/>
+                </a:solidFill>
+              </a:rPr>
+              <a:t>$0.00</a:t>
+            </a:r>
+          </a:p>
+        </p:txBody>
+      </p:sp>
+      <p:sp>
+        <p:nvSpPr>
+          <p:cNvPr id="23" name="TextBox 22"/>
+          <p:cNvSpPr txBox="1"/>
+          <p:nvPr/>
+        </p:nvSpPr>
+        <p:spPr>
+          <a:xfrm>
+            <a:off x="7863840" y="2231136"/>
+            <a:ext cx="3566160" cy="256032"/>
+          </a:xfrm>
+          <a:prstGeom prst="rect">
+            <a:avLst/>
+          </a:prstGeom>
+          <a:noFill/>
+        </p:spPr>
+        <p:txBody>
+          <a:bodyPr wrap="square">
+            <a:spAutoFit/>
+          </a:bodyPr>
+          <a:lstStyle/>
+          <a:p>
+            <a:pPr algn="l"/>
+            <a:r>
+              <a:rPr sz="1000" b="0" i="0">
+                <a:solidFill>
+                  <a:srgbClr val="8C8880"/>
+                </a:solidFill>
+              </a:rPr>
+              <a:t>Within 400K GB-s free tier</a:t>
+            </a:r>
+          </a:p>
+        </p:txBody>
+      </p:sp>
+      <p:sp>
+        <p:nvSpPr>
+          <p:cNvPr id="24" name="Rectangle 23"/>
+          <p:cNvSpPr/>
+          <p:nvPr/>
+        </p:nvSpPr>
+        <p:spPr>
+          <a:xfrm>
+            <a:off x="502920" y="2578608"/>
+            <a:ext cx="36576" cy="438912"/>
+          </a:xfrm>
+          <a:prstGeom prst="rect">
+            <a:avLst/>
+          </a:prstGeom>
+          <a:solidFill>
+            <a:srgbClr val="3D6B9E"/>
+          </a:solidFill>
+          <a:ln>
+            <a:noFill/>
+          </a:ln>
+        </p:spPr>
+        <p:style>
+          <a:lnRef idx="1">
+            <a:schemeClr val="accent1"/>
+          </a:lnRef>
+          <a:fillRef idx="3">
+            <a:schemeClr val="accent1"/>
+          </a:fillRef>
+          <a:effectRef idx="2">
+            <a:schemeClr val="accent1"/>
+          </a:effectRef>
+          <a:fontRef idx="minor">
+            <a:schemeClr val="lt1"/>
+          </a:fontRef>
+        </p:style>
+        <p:txBody>
+          <a:bodyPr rtlCol="0" anchor="ctr"/>
+          <a:lstStyle/>
+          <a:p>
+            <a:pPr algn="ctr"/>
+          </a:p>
+        </p:txBody>
+      </p:sp>
+      <p:sp>
+        <p:nvSpPr>
+          <p:cNvPr id="25" name="TextBox 24"/>
+          <p:cNvSpPr txBox="1"/>
+          <p:nvPr/>
+        </p:nvSpPr>
+        <p:spPr>
+          <a:xfrm>
+            <a:off x="658368" y="2670048"/>
+            <a:ext cx="1920240" cy="256032"/>
+          </a:xfrm>
+          <a:prstGeom prst="rect">
+            <a:avLst/>
+          </a:prstGeom>
+          <a:noFill/>
+        </p:spPr>
+        <p:txBody>
+          <a:bodyPr wrap="square">
+            <a:spAutoFit/>
+          </a:bodyPr>
+          <a:lstStyle/>
+          <a:p>
+            <a:pPr algn="l"/>
+            <a:r>
+              <a:rPr sz="1100" b="1" i="0">
+                <a:solidFill>
+                  <a:srgbClr val="3D6B9E"/>
+                </a:solidFill>
+              </a:rPr>
+              <a:t>API Gateway</a:t>
+            </a:r>
+          </a:p>
+        </p:txBody>
+      </p:sp>
+      <p:sp>
+        <p:nvSpPr>
+          <p:cNvPr id="26" name="TextBox 25"/>
+          <p:cNvSpPr txBox="1"/>
+          <p:nvPr/>
+        </p:nvSpPr>
+        <p:spPr>
+          <a:xfrm>
+            <a:off x="2743200" y="2670048"/>
+            <a:ext cx="3108960" cy="256032"/>
+          </a:xfrm>
+          <a:prstGeom prst="rect">
+            <a:avLst/>
+          </a:prstGeom>
+          <a:noFill/>
+        </p:spPr>
+        <p:txBody>
+          <a:bodyPr wrap="square">
+            <a:spAutoFit/>
+          </a:bodyPr>
+          <a:lstStyle/>
+          <a:p>
+            <a:pPr algn="l"/>
+            <a:r>
+              <a:rPr sz="1050" b="0" i="0">
+                <a:solidFill>
+                  <a:srgbClr val="5C5852"/>
+                </a:solidFill>
+              </a:rPr>
+              <a:t>~4,650 requests/mo</a:t>
+            </a:r>
+          </a:p>
+        </p:txBody>
+      </p:sp>
+      <p:sp>
+        <p:nvSpPr>
+          <p:cNvPr id="27" name="TextBox 26"/>
+          <p:cNvSpPr txBox="1"/>
+          <p:nvPr/>
+        </p:nvSpPr>
+        <p:spPr>
+          <a:xfrm>
+            <a:off x="6035040" y="2670048"/>
+            <a:ext cx="1463040" cy="256032"/>
+          </a:xfrm>
+          <a:prstGeom prst="rect">
+            <a:avLst/>
+          </a:prstGeom>
+          <a:noFill/>
+        </p:spPr>
+        <p:txBody>
+          <a:bodyPr wrap="square">
+            <a:spAutoFit/>
+          </a:bodyPr>
+          <a:lstStyle/>
+          <a:p>
+            <a:pPr algn="l"/>
+            <a:r>
+              <a:rPr sz="1150" b="1" i="0">
+                <a:solidFill>
+                  <a:srgbClr val="1C1A17"/>
+                </a:solidFill>
+              </a:rPr>
+              <a:t>$0.02</a:t>
+            </a:r>
+          </a:p>
+        </p:txBody>
+      </p:sp>
+      <p:sp>
+        <p:nvSpPr>
+          <p:cNvPr id="28" name="TextBox 27"/>
+          <p:cNvSpPr txBox="1"/>
+          <p:nvPr/>
+        </p:nvSpPr>
+        <p:spPr>
+          <a:xfrm>
+            <a:off x="7863840" y="2670048"/>
+            <a:ext cx="3566160" cy="256032"/>
+          </a:xfrm>
+          <a:prstGeom prst="rect">
+            <a:avLst/>
+          </a:prstGeom>
+          <a:noFill/>
+        </p:spPr>
+        <p:txBody>
+          <a:bodyPr wrap="square">
+            <a:spAutoFit/>
+          </a:bodyPr>
+          <a:lstStyle/>
+          <a:p>
+            <a:pPr algn="l"/>
+            <a:r>
+              <a:rPr sz="1000" b="0" i="0">
+                <a:solidFill>
+                  <a:srgbClr val="8C8880"/>
+                </a:solidFill>
+              </a:rPr>
+              <a:t>$3.50 per million requests</a:t>
+            </a:r>
+          </a:p>
+        </p:txBody>
+      </p:sp>
+      <p:sp>
+        <p:nvSpPr>
+          <p:cNvPr id="29" name="Rectangle 28"/>
+          <p:cNvSpPr/>
+          <p:nvPr/>
+        </p:nvSpPr>
+        <p:spPr>
+          <a:xfrm>
+            <a:off x="502920" y="3017520"/>
+            <a:ext cx="11155680" cy="438912"/>
+          </a:xfrm>
+          <a:prstGeom prst="rect">
+            <a:avLst/>
+          </a:prstGeom>
+          <a:solidFill>
+            <a:srgbClr val="FFFFFF"/>
+          </a:solidFill>
+          <a:ln>
+            <a:noFill/>
+          </a:ln>
+        </p:spPr>
+        <p:style>
+          <a:lnRef idx="1">
+            <a:schemeClr val="accent1"/>
+          </a:lnRef>
+          <a:fillRef idx="3">
+            <a:schemeClr val="accent1"/>
+          </a:fillRef>
+          <a:effectRef idx="2">
+            <a:schemeClr val="accent1"/>
+          </a:effectRef>
+          <a:fontRef idx="minor">
+            <a:schemeClr val="lt1"/>
+          </a:fontRef>
+        </p:style>
+        <p:txBody>
+          <a:bodyPr rtlCol="0" anchor="ctr"/>
+          <a:lstStyle/>
+          <a:p>
+            <a:pPr algn="ctr"/>
+          </a:p>
+        </p:txBody>
+      </p:sp>
+      <p:sp>
+        <p:nvSpPr>
+          <p:cNvPr id="30" name="Rectangle 29"/>
+          <p:cNvSpPr/>
+          <p:nvPr/>
+        </p:nvSpPr>
+        <p:spPr>
+          <a:xfrm>
+            <a:off x="502920" y="3017520"/>
+            <a:ext cx="36576" cy="438912"/>
+          </a:xfrm>
+          <a:prstGeom prst="rect">
+            <a:avLst/>
+          </a:prstGeom>
+          <a:solidFill>
+            <a:srgbClr val="3D6B9E"/>
+          </a:solidFill>
+          <a:ln>
+            <a:noFill/>
+          </a:ln>
+        </p:spPr>
+        <p:style>
+          <a:lnRef idx="1">
+            <a:schemeClr val="accent1"/>
+          </a:lnRef>
+          <a:fillRef idx="3">
+            <a:schemeClr val="accent1"/>
+          </a:fillRef>
+          <a:effectRef idx="2">
+            <a:schemeClr val="accent1"/>
+          </a:effectRef>
+          <a:fontRef idx="minor">
+            <a:schemeClr val="lt1"/>
+          </a:fontRef>
+        </p:style>
+        <p:txBody>
+          <a:bodyPr rtlCol="0" anchor="ctr"/>
+          <a:lstStyle/>
+          <a:p>
+            <a:pPr algn="ctr"/>
+          </a:p>
+        </p:txBody>
+      </p:sp>
+      <p:sp>
+        <p:nvSpPr>
+          <p:cNvPr id="31" name="TextBox 30"/>
+          <p:cNvSpPr txBox="1"/>
+          <p:nvPr/>
+        </p:nvSpPr>
+        <p:spPr>
+          <a:xfrm>
+            <a:off x="658368" y="3108960"/>
+            <a:ext cx="1920240" cy="256032"/>
+          </a:xfrm>
+          <a:prstGeom prst="rect">
+            <a:avLst/>
+          </a:prstGeom>
+          <a:noFill/>
+        </p:spPr>
+        <p:txBody>
+          <a:bodyPr wrap="square">
+            <a:spAutoFit/>
+          </a:bodyPr>
+          <a:lstStyle/>
+          <a:p>
+            <a:pPr algn="l"/>
+            <a:r>
+              <a:rPr sz="1100" b="1" i="0">
+                <a:solidFill>
+                  <a:srgbClr val="3D6B9E"/>
+                </a:solidFill>
+              </a:rPr>
+              <a:t>DynamoDB</a:t>
+            </a:r>
+          </a:p>
+        </p:txBody>
+      </p:sp>
+      <p:sp>
+        <p:nvSpPr>
+          <p:cNvPr id="32" name="TextBox 31"/>
+          <p:cNvSpPr txBox="1"/>
+          <p:nvPr/>
+        </p:nvSpPr>
+        <p:spPr>
+          <a:xfrm>
+            <a:off x="2743200" y="3108960"/>
+            <a:ext cx="3108960" cy="256032"/>
+          </a:xfrm>
+          <a:prstGeom prst="rect">
+            <a:avLst/>
+          </a:prstGeom>
+          <a:noFill/>
+        </p:spPr>
+        <p:txBody>
+          <a:bodyPr wrap="square">
+            <a:spAutoFit/>
+          </a:bodyPr>
+          <a:lstStyle/>
+          <a:p>
+            <a:pPr algn="l"/>
+            <a:r>
+              <a:rPr sz="1050" b="0" i="0">
+                <a:solidFill>
+                  <a:srgbClr val="5C5852"/>
+                </a:solidFill>
+              </a:rPr>
+              <a:t>~231K reads + writes</a:t>
+            </a:r>
+          </a:p>
+        </p:txBody>
+      </p:sp>
+      <p:sp>
+        <p:nvSpPr>
+          <p:cNvPr id="33" name="TextBox 32"/>
+          <p:cNvSpPr txBox="1"/>
+          <p:nvPr/>
+        </p:nvSpPr>
+        <p:spPr>
+          <a:xfrm>
+            <a:off x="6035040" y="3108960"/>
+            <a:ext cx="1463040" cy="256032"/>
+          </a:xfrm>
+          <a:prstGeom prst="rect">
+            <a:avLst/>
+          </a:prstGeom>
+          <a:noFill/>
+        </p:spPr>
+        <p:txBody>
+          <a:bodyPr wrap="square">
+            <a:spAutoFit/>
+          </a:bodyPr>
+          <a:lstStyle/>
+          <a:p>
+            <a:pPr algn="l"/>
+            <a:r>
+              <a:rPr sz="1150" b="1" i="0">
+                <a:solidFill>
+                  <a:srgbClr val="1C1A17"/>
+                </a:solidFill>
+              </a:rPr>
+              <a:t>$0.42</a:t>
+            </a:r>
+          </a:p>
+        </p:txBody>
+      </p:sp>
+      <p:sp>
+        <p:nvSpPr>
+          <p:cNvPr id="34" name="TextBox 33"/>
+          <p:cNvSpPr txBox="1"/>
+          <p:nvPr/>
+        </p:nvSpPr>
+        <p:spPr>
+          <a:xfrm>
+            <a:off x="7863840" y="3108960"/>
+            <a:ext cx="3566160" cy="256032"/>
+          </a:xfrm>
+          <a:prstGeom prst="rect">
+            <a:avLst/>
+          </a:prstGeom>
+          <a:noFill/>
+        </p:spPr>
+        <p:txBody>
+          <a:bodyPr wrap="square">
+            <a:spAutoFit/>
+          </a:bodyPr>
+          <a:lstStyle/>
+          <a:p>
+            <a:pPr algn="l"/>
+            <a:r>
+              <a:rPr sz="1000" b="0" i="0">
+                <a:solidFill>
+                  <a:srgbClr val="8C8880"/>
+                </a:solidFill>
+              </a:rPr>
+              <a:t>On-demand · SSE enabled</a:t>
+            </a:r>
+          </a:p>
+        </p:txBody>
+      </p:sp>
+      <p:sp>
+        <p:nvSpPr>
+          <p:cNvPr id="35" name="Rectangle 34"/>
+          <p:cNvSpPr/>
+          <p:nvPr/>
+        </p:nvSpPr>
+        <p:spPr>
+          <a:xfrm>
+            <a:off x="502920" y="3456432"/>
+            <a:ext cx="36576" cy="438912"/>
+          </a:xfrm>
+          <a:prstGeom prst="rect">
+            <a:avLst/>
+          </a:prstGeom>
+          <a:solidFill>
+            <a:srgbClr val="C97B2E"/>
+          </a:solidFill>
+          <a:ln>
+            <a:noFill/>
+          </a:ln>
+        </p:spPr>
+        <p:style>
+          <a:lnRef idx="1">
+            <a:schemeClr val="accent1"/>
+          </a:lnRef>
+          <a:fillRef idx="3">
+            <a:schemeClr val="accent1"/>
+          </a:fillRef>
+          <a:effectRef idx="2">
+            <a:schemeClr val="accent1"/>
+          </a:effectRef>
+          <a:fontRef idx="minor">
+            <a:schemeClr val="lt1"/>
+          </a:fontRef>
+        </p:style>
+        <p:txBody>
+          <a:bodyPr rtlCol="0" anchor="ctr"/>
+          <a:lstStyle/>
+          <a:p>
+            <a:pPr algn="ctr"/>
+          </a:p>
+        </p:txBody>
+      </p:sp>
+      <p:sp>
+        <p:nvSpPr>
+          <p:cNvPr id="36" name="TextBox 35"/>
+          <p:cNvSpPr txBox="1"/>
+          <p:nvPr/>
+        </p:nvSpPr>
+        <p:spPr>
+          <a:xfrm>
+            <a:off x="658368" y="3547872"/>
+            <a:ext cx="1920240" cy="256032"/>
+          </a:xfrm>
+          <a:prstGeom prst="rect">
+            <a:avLst/>
+          </a:prstGeom>
+          <a:noFill/>
+        </p:spPr>
+        <p:txBody>
+          <a:bodyPr wrap="square">
+            <a:spAutoFit/>
+          </a:bodyPr>
+          <a:lstStyle/>
+          <a:p>
+            <a:pPr algn="l"/>
+            <a:r>
+              <a:rPr sz="1100" b="1" i="0">
+                <a:solidFill>
+                  <a:srgbClr val="C97B2E"/>
+                </a:solidFill>
+              </a:rPr>
+              <a:t>S3</a:t>
+            </a:r>
+          </a:p>
+        </p:txBody>
+      </p:sp>
+      <p:sp>
+        <p:nvSpPr>
+          <p:cNvPr id="37" name="TextBox 36"/>
+          <p:cNvSpPr txBox="1"/>
+          <p:nvPr/>
+        </p:nvSpPr>
+        <p:spPr>
+          <a:xfrm>
+            <a:off x="2743200" y="3547872"/>
+            <a:ext cx="3108960" cy="256032"/>
+          </a:xfrm>
+          <a:prstGeom prst="rect">
+            <a:avLst/>
+          </a:prstGeom>
+          <a:noFill/>
+        </p:spPr>
+        <p:txBody>
+          <a:bodyPr wrap="square">
+            <a:spAutoFit/>
+          </a:bodyPr>
+          <a:lstStyle/>
+          <a:p>
+            <a:pPr algn="l"/>
+            <a:r>
+              <a:rPr sz="1050" b="0" i="0">
+                <a:solidFill>
+                  <a:srgbClr val="5C5852"/>
+                </a:solidFill>
+              </a:rPr>
+              <a:t>150 uploads · 300MB</a:t>
+            </a:r>
+          </a:p>
+        </p:txBody>
+      </p:sp>
+      <p:sp>
+        <p:nvSpPr>
+          <p:cNvPr id="38" name="TextBox 37"/>
+          <p:cNvSpPr txBox="1"/>
+          <p:nvPr/>
+        </p:nvSpPr>
+        <p:spPr>
+          <a:xfrm>
+            <a:off x="6035040" y="3547872"/>
+            <a:ext cx="1463040" cy="256032"/>
+          </a:xfrm>
+          <a:prstGeom prst="rect">
+            <a:avLst/>
+          </a:prstGeom>
+          <a:noFill/>
+        </p:spPr>
+        <p:txBody>
+          <a:bodyPr wrap="square">
+            <a:spAutoFit/>
+          </a:bodyPr>
+          <a:lstStyle/>
+          <a:p>
+            <a:pPr algn="l"/>
+            <a:r>
+              <a:rPr sz="1150" b="1" i="0">
+                <a:solidFill>
+                  <a:srgbClr val="1C1A17"/>
+                </a:solidFill>
+              </a:rPr>
+              <a:t>$0.01</a:t>
+            </a:r>
+          </a:p>
+        </p:txBody>
+      </p:sp>
+      <p:sp>
+        <p:nvSpPr>
+          <p:cNvPr id="39" name="TextBox 38"/>
+          <p:cNvSpPr txBox="1"/>
+          <p:nvPr/>
+        </p:nvSpPr>
+        <p:spPr>
+          <a:xfrm>
+            <a:off x="7863840" y="3547872"/>
+            <a:ext cx="3566160" cy="256032"/>
+          </a:xfrm>
+          <a:prstGeom prst="rect">
+            <a:avLst/>
+          </a:prstGeom>
+          <a:noFill/>
+        </p:spPr>
+        <p:txBody>
+          <a:bodyPr wrap="square">
+            <a:spAutoFit/>
+          </a:bodyPr>
+          <a:lstStyle/>
+          <a:p>
+            <a:pPr algn="l"/>
+            <a:r>
+              <a:rPr sz="1000" b="0" i="0">
+                <a:solidFill>
+                  <a:srgbClr val="8C8880"/>
+                </a:solidFill>
+              </a:rPr>
+              <a:t>$0.025/GB · versioning on</a:t>
+            </a:r>
+          </a:p>
+        </p:txBody>
+      </p:sp>
+      <p:sp>
+        <p:nvSpPr>
+          <p:cNvPr id="40" name="Rectangle 39"/>
+          <p:cNvSpPr/>
+          <p:nvPr/>
+        </p:nvSpPr>
+        <p:spPr>
+          <a:xfrm>
+            <a:off x="502920" y="3895344"/>
+            <a:ext cx="11155680" cy="438912"/>
+          </a:xfrm>
+          <a:prstGeom prst="rect">
+            <a:avLst/>
+          </a:prstGeom>
+          <a:solidFill>
+            <a:srgbClr val="FFFFFF"/>
+          </a:solidFill>
+          <a:ln>
+            <a:noFill/>
+          </a:ln>
+        </p:spPr>
+        <p:style>
+          <a:lnRef idx="1">
+            <a:schemeClr val="accent1"/>
+          </a:lnRef>
+          <a:fillRef idx="3">
+            <a:schemeClr val="accent1"/>
+          </a:fillRef>
+          <a:effectRef idx="2">
+            <a:schemeClr val="accent1"/>
+          </a:effectRef>
+          <a:fontRef idx="minor">
+            <a:schemeClr val="lt1"/>
+          </a:fontRef>
+        </p:style>
+        <p:txBody>
+          <a:bodyPr rtlCol="0" anchor="ctr"/>
+          <a:lstStyle/>
+          <a:p>
+            <a:pPr algn="ctr"/>
+          </a:p>
+        </p:txBody>
+      </p:sp>
+      <p:sp>
+        <p:nvSpPr>
+          <p:cNvPr id="41" name="Rectangle 40"/>
+          <p:cNvSpPr/>
+          <p:nvPr/>
+        </p:nvSpPr>
+        <p:spPr>
+          <a:xfrm>
+            <a:off x="502920" y="3895344"/>
+            <a:ext cx="36576" cy="438912"/>
+          </a:xfrm>
+          <a:prstGeom prst="rect">
+            <a:avLst/>
+          </a:prstGeom>
+          <a:solidFill>
+            <a:srgbClr val="4A7C6B"/>
+          </a:solidFill>
+          <a:ln>
+            <a:noFill/>
+          </a:ln>
+        </p:spPr>
+        <p:style>
+          <a:lnRef idx="1">
+            <a:schemeClr val="accent1"/>
+          </a:lnRef>
+          <a:fillRef idx="3">
+            <a:schemeClr val="accent1"/>
+          </a:fillRef>
+          <a:effectRef idx="2">
+            <a:schemeClr val="accent1"/>
+          </a:effectRef>
+          <a:fontRef idx="minor">
+            <a:schemeClr val="lt1"/>
+          </a:fontRef>
+        </p:style>
+        <p:txBody>
+          <a:bodyPr rtlCol="0" anchor="ctr"/>
+          <a:lstStyle/>
+          <a:p>
+            <a:pPr algn="ctr"/>
+          </a:p>
+        </p:txBody>
+      </p:sp>
+      <p:sp>
+        <p:nvSpPr>
+          <p:cNvPr id="42" name="TextBox 41"/>
+          <p:cNvSpPr txBox="1"/>
+          <p:nvPr/>
+        </p:nvSpPr>
+        <p:spPr>
+          <a:xfrm>
+            <a:off x="658368" y="3986784"/>
+            <a:ext cx="1920240" cy="256032"/>
+          </a:xfrm>
+          <a:prstGeom prst="rect">
+            <a:avLst/>
+          </a:prstGeom>
+          <a:noFill/>
+        </p:spPr>
+        <p:txBody>
+          <a:bodyPr wrap="square">
+            <a:spAutoFit/>
+          </a:bodyPr>
+          <a:lstStyle/>
+          <a:p>
+            <a:pPr algn="l"/>
+            <a:r>
+              <a:rPr sz="1100" b="1" i="0">
+                <a:solidFill>
+                  <a:srgbClr val="4A7C6B"/>
+                </a:solidFill>
+              </a:rPr>
+              <a:t>SES</a:t>
+            </a:r>
+          </a:p>
+        </p:txBody>
+      </p:sp>
+      <p:sp>
+        <p:nvSpPr>
+          <p:cNvPr id="43" name="TextBox 42"/>
+          <p:cNvSpPr txBox="1"/>
+          <p:nvPr/>
+        </p:nvSpPr>
+        <p:spPr>
+          <a:xfrm>
+            <a:off x="2743200" y="3986784"/>
+            <a:ext cx="3108960" cy="256032"/>
+          </a:xfrm>
+          <a:prstGeom prst="rect">
+            <a:avLst/>
+          </a:prstGeom>
+          <a:noFill/>
+        </p:spPr>
+        <p:txBody>
+          <a:bodyPr wrap="square">
+            <a:spAutoFit/>
+          </a:bodyPr>
+          <a:lstStyle/>
+          <a:p>
+            <a:pPr algn="l"/>
+            <a:r>
+              <a:rPr sz="1050" b="0" i="0">
+                <a:solidFill>
+                  <a:srgbClr val="5C5852"/>
+                </a:solidFill>
+              </a:rPr>
+              <a:t>12,000 emails/mo</a:t>
+            </a:r>
+          </a:p>
+        </p:txBody>
+      </p:sp>
+      <p:sp>
+        <p:nvSpPr>
+          <p:cNvPr id="44" name="TextBox 43"/>
+          <p:cNvSpPr txBox="1"/>
+          <p:nvPr/>
+        </p:nvSpPr>
+        <p:spPr>
+          <a:xfrm>
+            <a:off x="6035040" y="3986784"/>
+            <a:ext cx="1463040" cy="256032"/>
+          </a:xfrm>
+          <a:prstGeom prst="rect">
+            <a:avLst/>
+          </a:prstGeom>
+          <a:noFill/>
+        </p:spPr>
+        <p:txBody>
+          <a:bodyPr wrap="square">
+            <a:spAutoFit/>
+          </a:bodyPr>
+          <a:lstStyle/>
+          <a:p>
+            <a:pPr algn="l"/>
+            <a:r>
+              <a:rPr sz="1150" b="1" i="0">
+                <a:solidFill>
+                  <a:srgbClr val="1C1A17"/>
+                </a:solidFill>
+              </a:rPr>
+              <a:t>$1.20</a:t>
+            </a:r>
+          </a:p>
+        </p:txBody>
+      </p:sp>
+      <p:sp>
+        <p:nvSpPr>
+          <p:cNvPr id="45" name="TextBox 44"/>
+          <p:cNvSpPr txBox="1"/>
+          <p:nvPr/>
+        </p:nvSpPr>
+        <p:spPr>
+          <a:xfrm>
+            <a:off x="7863840" y="3986784"/>
+            <a:ext cx="3566160" cy="256032"/>
+          </a:xfrm>
+          <a:prstGeom prst="rect">
+            <a:avLst/>
+          </a:prstGeom>
+          <a:noFill/>
+        </p:spPr>
+        <p:txBody>
+          <a:bodyPr wrap="square">
+            <a:spAutoFit/>
+          </a:bodyPr>
+          <a:lstStyle/>
+          <a:p>
+            <a:pPr algn="l"/>
+            <a:r>
+              <a:rPr sz="1000" b="0" i="0">
+                <a:solidFill>
+                  <a:srgbClr val="8C8880"/>
+                </a:solidFill>
+              </a:rPr>
+              <a:t>$0.10 per 1,000 emails</a:t>
+            </a:r>
+          </a:p>
+        </p:txBody>
+      </p:sp>
+      <p:sp>
+        <p:nvSpPr>
+          <p:cNvPr id="46" name="Rectangle 45"/>
+          <p:cNvSpPr/>
+          <p:nvPr/>
+        </p:nvSpPr>
+        <p:spPr>
+          <a:xfrm>
+            <a:off x="502920" y="4334256"/>
+            <a:ext cx="36576" cy="438912"/>
+          </a:xfrm>
+          <a:prstGeom prst="rect">
+            <a:avLst/>
+          </a:prstGeom>
+          <a:solidFill>
+            <a:srgbClr val="C25042"/>
+          </a:solidFill>
+          <a:ln>
+            <a:noFill/>
+          </a:ln>
+        </p:spPr>
+        <p:style>
+          <a:lnRef idx="1">
+            <a:schemeClr val="accent1"/>
+          </a:lnRef>
+          <a:fillRef idx="3">
+            <a:schemeClr val="accent1"/>
+          </a:fillRef>
+          <a:effectRef idx="2">
+            <a:schemeClr val="accent1"/>
+          </a:effectRef>
+          <a:fontRef idx="minor">
+            <a:schemeClr val="lt1"/>
+          </a:fontRef>
+        </p:style>
+        <p:txBody>
+          <a:bodyPr rtlCol="0" anchor="ctr"/>
+          <a:lstStyle/>
+          <a:p>
+            <a:pPr algn="ctr"/>
+          </a:p>
+        </p:txBody>
+      </p:sp>
+      <p:sp>
+        <p:nvSpPr>
+          <p:cNvPr id="47" name="TextBox 46"/>
+          <p:cNvSpPr txBox="1"/>
+          <p:nvPr/>
+        </p:nvSpPr>
+        <p:spPr>
+          <a:xfrm>
+            <a:off x="658368" y="4425696"/>
+            <a:ext cx="1920240" cy="256032"/>
+          </a:xfrm>
+          <a:prstGeom prst="rect">
+            <a:avLst/>
+          </a:prstGeom>
+          <a:noFill/>
+        </p:spPr>
+        <p:txBody>
+          <a:bodyPr wrap="square">
+            <a:spAutoFit/>
+          </a:bodyPr>
+          <a:lstStyle/>
+          <a:p>
+            <a:pPr algn="l"/>
+            <a:r>
+              <a:rPr sz="1100" b="1" i="0">
+                <a:solidFill>
+                  <a:srgbClr val="C25042"/>
+                </a:solidFill>
+              </a:rPr>
+              <a:t>Cognito</a:t>
+            </a:r>
+          </a:p>
+        </p:txBody>
+      </p:sp>
+      <p:sp>
+        <p:nvSpPr>
+          <p:cNvPr id="48" name="TextBox 47"/>
+          <p:cNvSpPr txBox="1"/>
+          <p:nvPr/>
+        </p:nvSpPr>
+        <p:spPr>
+          <a:xfrm>
+            <a:off x="2743200" y="4425696"/>
+            <a:ext cx="3108960" cy="256032"/>
+          </a:xfrm>
+          <a:prstGeom prst="rect">
+            <a:avLst/>
+          </a:prstGeom>
+          <a:noFill/>
+        </p:spPr>
+        <p:txBody>
+          <a:bodyPr wrap="square">
+            <a:spAutoFit/>
+          </a:bodyPr>
+          <a:lstStyle/>
+          <a:p>
+            <a:pPr algn="l"/>
+            <a:r>
+              <a:rPr sz="1050" b="0" i="0">
+                <a:solidFill>
+                  <a:srgbClr val="5C5852"/>
+                </a:solidFill>
+              </a:rPr>
+              <a:t>50 MAUs</a:t>
+            </a:r>
+          </a:p>
+        </p:txBody>
+      </p:sp>
+      <p:sp>
+        <p:nvSpPr>
+          <p:cNvPr id="49" name="TextBox 48"/>
+          <p:cNvSpPr txBox="1"/>
+          <p:nvPr/>
+        </p:nvSpPr>
+        <p:spPr>
+          <a:xfrm>
+            <a:off x="6035040" y="4425696"/>
+            <a:ext cx="1463040" cy="256032"/>
+          </a:xfrm>
+          <a:prstGeom prst="rect">
+            <a:avLst/>
+          </a:prstGeom>
+          <a:noFill/>
+        </p:spPr>
+        <p:txBody>
+          <a:bodyPr wrap="square">
+            <a:spAutoFit/>
+          </a:bodyPr>
+          <a:lstStyle/>
+          <a:p>
+            <a:pPr algn="l"/>
+            <a:r>
+              <a:rPr sz="1150" b="1" i="0">
+                <a:solidFill>
+                  <a:srgbClr val="2E5A4D"/>
+                </a:solidFill>
+              </a:rPr>
+              <a:t>$0.00</a:t>
+            </a:r>
+          </a:p>
+        </p:txBody>
+      </p:sp>
+      <p:sp>
+        <p:nvSpPr>
+          <p:cNvPr id="50" name="TextBox 49"/>
+          <p:cNvSpPr txBox="1"/>
+          <p:nvPr/>
+        </p:nvSpPr>
+        <p:spPr>
+          <a:xfrm>
+            <a:off x="7863840" y="4425696"/>
+            <a:ext cx="3566160" cy="256032"/>
+          </a:xfrm>
+          <a:prstGeom prst="rect">
+            <a:avLst/>
+          </a:prstGeom>
+          <a:noFill/>
+        </p:spPr>
+        <p:txBody>
+          <a:bodyPr wrap="square">
+            <a:spAutoFit/>
+          </a:bodyPr>
+          <a:lstStyle/>
+          <a:p>
+            <a:pPr algn="l"/>
+            <a:r>
+              <a:rPr sz="1000" b="0" i="0">
+                <a:solidFill>
+                  <a:srgbClr val="8C8880"/>
+                </a:solidFill>
+              </a:rPr>
+              <a:t>First 50,000 MAU free</a:t>
+            </a:r>
+          </a:p>
+        </p:txBody>
+      </p:sp>
+      <p:sp>
+        <p:nvSpPr>
+          <p:cNvPr id="51" name="Rectangle 50"/>
+          <p:cNvSpPr/>
+          <p:nvPr/>
+        </p:nvSpPr>
+        <p:spPr>
+          <a:xfrm>
+            <a:off x="502920" y="4773168"/>
+            <a:ext cx="11155680" cy="438912"/>
+          </a:xfrm>
+          <a:prstGeom prst="rect">
+            <a:avLst/>
+          </a:prstGeom>
+          <a:solidFill>
+            <a:srgbClr val="FFFFFF"/>
+          </a:solidFill>
+          <a:ln>
+            <a:noFill/>
+          </a:ln>
+        </p:spPr>
+        <p:style>
+          <a:lnRef idx="1">
+            <a:schemeClr val="accent1"/>
+          </a:lnRef>
+          <a:fillRef idx="3">
+            <a:schemeClr val="accent1"/>
+          </a:fillRef>
+          <a:effectRef idx="2">
+            <a:schemeClr val="accent1"/>
+          </a:effectRef>
+          <a:fontRef idx="minor">
+            <a:schemeClr val="lt1"/>
+          </a:fontRef>
+        </p:style>
+        <p:txBody>
+          <a:bodyPr rtlCol="0" anchor="ctr"/>
+          <a:lstStyle/>
+          <a:p>
+            <a:pPr algn="ctr"/>
+          </a:p>
+        </p:txBody>
+      </p:sp>
+      <p:sp>
+        <p:nvSpPr>
+          <p:cNvPr id="52" name="Rectangle 51"/>
+          <p:cNvSpPr/>
+          <p:nvPr/>
+        </p:nvSpPr>
+        <p:spPr>
+          <a:xfrm>
+            <a:off x="502920" y="4773168"/>
+            <a:ext cx="36576" cy="438912"/>
+          </a:xfrm>
+          <a:prstGeom prst="rect">
+            <a:avLst/>
+          </a:prstGeom>
+          <a:solidFill>
+            <a:srgbClr val="5C5852"/>
+          </a:solidFill>
+          <a:ln>
+            <a:noFill/>
+          </a:ln>
+        </p:spPr>
+        <p:style>
+          <a:lnRef idx="1">
+            <a:schemeClr val="accent1"/>
+          </a:lnRef>
+          <a:fillRef idx="3">
+            <a:schemeClr val="accent1"/>
+          </a:fillRef>
+          <a:effectRef idx="2">
+            <a:schemeClr val="accent1"/>
+          </a:effectRef>
+          <a:fontRef idx="minor">
+            <a:schemeClr val="lt1"/>
+          </a:fontRef>
+        </p:style>
+        <p:txBody>
+          <a:bodyPr rtlCol="0" anchor="ctr"/>
+          <a:lstStyle/>
+          <a:p>
+            <a:pPr algn="ctr"/>
+          </a:p>
+        </p:txBody>
+      </p:sp>
+      <p:sp>
+        <p:nvSpPr>
+          <p:cNvPr id="53" name="TextBox 52"/>
+          <p:cNvSpPr txBox="1"/>
+          <p:nvPr/>
+        </p:nvSpPr>
+        <p:spPr>
+          <a:xfrm>
+            <a:off x="658368" y="4864608"/>
+            <a:ext cx="1920240" cy="256032"/>
+          </a:xfrm>
+          <a:prstGeom prst="rect">
+            <a:avLst/>
+          </a:prstGeom>
+          <a:noFill/>
+        </p:spPr>
+        <p:txBody>
+          <a:bodyPr wrap="square">
+            <a:spAutoFit/>
+          </a:bodyPr>
+          <a:lstStyle/>
+          <a:p>
+            <a:pPr algn="l"/>
+            <a:r>
+              <a:rPr sz="1100" b="1" i="0">
+                <a:solidFill>
+                  <a:srgbClr val="5C5852"/>
+                </a:solidFill>
+              </a:rPr>
+              <a:t>Step Functions</a:t>
+            </a:r>
+          </a:p>
+        </p:txBody>
+      </p:sp>
+      <p:sp>
+        <p:nvSpPr>
+          <p:cNvPr id="54" name="TextBox 53"/>
+          <p:cNvSpPr txBox="1"/>
+          <p:nvPr/>
+        </p:nvSpPr>
+        <p:spPr>
+          <a:xfrm>
+            <a:off x="2743200" y="4864608"/>
+            <a:ext cx="3108960" cy="256032"/>
+          </a:xfrm>
+          <a:prstGeom prst="rect">
+            <a:avLst/>
+          </a:prstGeom>
+          <a:noFill/>
+        </p:spPr>
+        <p:txBody>
+          <a:bodyPr wrap="square">
+            <a:spAutoFit/>
+          </a:bodyPr>
+          <a:lstStyle/>
+          <a:p>
+            <a:pPr algn="l"/>
+            <a:r>
+              <a:rPr sz="1050" b="0" i="0">
+                <a:solidFill>
+                  <a:srgbClr val="5C5852"/>
+                </a:solidFill>
+              </a:rPr>
+              <a:t>30,000 transitions/mo</a:t>
+            </a:r>
+          </a:p>
+        </p:txBody>
+      </p:sp>
+      <p:sp>
+        <p:nvSpPr>
+          <p:cNvPr id="55" name="TextBox 54"/>
+          <p:cNvSpPr txBox="1"/>
+          <p:nvPr/>
+        </p:nvSpPr>
+        <p:spPr>
+          <a:xfrm>
+            <a:off x="6035040" y="4864608"/>
+            <a:ext cx="1463040" cy="256032"/>
+          </a:xfrm>
+          <a:prstGeom prst="rect">
+            <a:avLst/>
+          </a:prstGeom>
+          <a:noFill/>
+        </p:spPr>
+        <p:txBody>
+          <a:bodyPr wrap="square">
+            <a:spAutoFit/>
+          </a:bodyPr>
+          <a:lstStyle/>
+          <a:p>
+            <a:pPr algn="l"/>
+            <a:r>
+              <a:rPr sz="1150" b="1" i="0">
+                <a:solidFill>
+                  <a:srgbClr val="1C1A17"/>
+                </a:solidFill>
+              </a:rPr>
+              <a:t>$0.65</a:t>
+            </a:r>
+          </a:p>
+        </p:txBody>
+      </p:sp>
+      <p:sp>
+        <p:nvSpPr>
+          <p:cNvPr id="56" name="TextBox 55"/>
+          <p:cNvSpPr txBox="1"/>
+          <p:nvPr/>
+        </p:nvSpPr>
+        <p:spPr>
+          <a:xfrm>
+            <a:off x="7863840" y="4864608"/>
+            <a:ext cx="3566160" cy="256032"/>
+          </a:xfrm>
+          <a:prstGeom prst="rect">
+            <a:avLst/>
+          </a:prstGeom>
+          <a:noFill/>
+        </p:spPr>
+        <p:txBody>
+          <a:bodyPr wrap="square">
+            <a:spAutoFit/>
+          </a:bodyPr>
+          <a:lstStyle/>
+          <a:p>
+            <a:pPr algn="l"/>
+            <a:r>
+              <a:rPr sz="1000" b="0" i="0">
+                <a:solidFill>
+                  <a:srgbClr val="8C8880"/>
+                </a:solidFill>
+              </a:rPr>
+              <a:t>$0.000025 per transition</a:t>
+            </a:r>
+          </a:p>
+        </p:txBody>
+      </p:sp>
+      <p:sp>
+        <p:nvSpPr>
+          <p:cNvPr id="57" name="Rectangle 56"/>
+          <p:cNvSpPr/>
+          <p:nvPr/>
+        </p:nvSpPr>
+        <p:spPr>
+          <a:xfrm>
+            <a:off x="502920" y="5212080"/>
+            <a:ext cx="36576" cy="438912"/>
+          </a:xfrm>
+          <a:prstGeom prst="rect">
+            <a:avLst/>
+          </a:prstGeom>
+          <a:solidFill>
+            <a:srgbClr val="C97B2E"/>
+          </a:solidFill>
+          <a:ln>
+            <a:noFill/>
+          </a:ln>
+        </p:spPr>
+        <p:style>
+          <a:lnRef idx="1">
+            <a:schemeClr val="accent1"/>
+          </a:lnRef>
+          <a:fillRef idx="3">
+            <a:schemeClr val="accent1"/>
+          </a:fillRef>
+          <a:effectRef idx="2">
+            <a:schemeClr val="accent1"/>
+          </a:effectRef>
+          <a:fontRef idx="minor">
+            <a:schemeClr val="lt1"/>
+          </a:fontRef>
+        </p:style>
+        <p:txBody>
+          <a:bodyPr rtlCol="0" anchor="ctr"/>
+          <a:lstStyle/>
+          <a:p>
+            <a:pPr algn="ctr"/>
+          </a:p>
+        </p:txBody>
+      </p:sp>
+      <p:sp>
+        <p:nvSpPr>
+          <p:cNvPr id="58" name="TextBox 57"/>
+          <p:cNvSpPr txBox="1"/>
+          <p:nvPr/>
+        </p:nvSpPr>
+        <p:spPr>
+          <a:xfrm>
+            <a:off x="658368" y="5303520"/>
+            <a:ext cx="1920240" cy="256032"/>
+          </a:xfrm>
+          <a:prstGeom prst="rect">
+            <a:avLst/>
+          </a:prstGeom>
+          <a:noFill/>
+        </p:spPr>
+        <p:txBody>
+          <a:bodyPr wrap="square">
+            <a:spAutoFit/>
+          </a:bodyPr>
+          <a:lstStyle/>
+          <a:p>
+            <a:pPr algn="l"/>
+            <a:r>
+              <a:rPr sz="1100" b="1" i="0">
+                <a:solidFill>
+                  <a:srgbClr val="C97B2E"/>
+                </a:solidFill>
+              </a:rPr>
+              <a:t>CloudWatch</a:t>
+            </a:r>
+          </a:p>
+        </p:txBody>
+      </p:sp>
+      <p:sp>
+        <p:nvSpPr>
+          <p:cNvPr id="59" name="TextBox 58"/>
+          <p:cNvSpPr txBox="1"/>
+          <p:nvPr/>
+        </p:nvSpPr>
+        <p:spPr>
+          <a:xfrm>
+            <a:off x="2743200" y="5303520"/>
+            <a:ext cx="3108960" cy="256032"/>
+          </a:xfrm>
+          <a:prstGeom prst="rect">
+            <a:avLst/>
+          </a:prstGeom>
+          <a:noFill/>
+        </p:spPr>
+        <p:txBody>
+          <a:bodyPr wrap="square">
+            <a:spAutoFit/>
+          </a:bodyPr>
+          <a:lstStyle/>
+          <a:p>
+            <a:pPr algn="l"/>
+            <a:r>
+              <a:rPr sz="1050" b="0" i="0">
+                <a:solidFill>
+                  <a:srgbClr val="5C5852"/>
+                </a:solidFill>
+              </a:rPr>
+              <a:t>Logs + Dashboard + Alarms</a:t>
+            </a:r>
+          </a:p>
+        </p:txBody>
+      </p:sp>
+      <p:sp>
+        <p:nvSpPr>
+          <p:cNvPr id="60" name="TextBox 59"/>
+          <p:cNvSpPr txBox="1"/>
+          <p:nvPr/>
+        </p:nvSpPr>
+        <p:spPr>
+          <a:xfrm>
+            <a:off x="6035040" y="5303520"/>
+            <a:ext cx="1463040" cy="256032"/>
+          </a:xfrm>
+          <a:prstGeom prst="rect">
+            <a:avLst/>
+          </a:prstGeom>
+          <a:noFill/>
+        </p:spPr>
+        <p:txBody>
+          <a:bodyPr wrap="square">
+            <a:spAutoFit/>
+          </a:bodyPr>
+          <a:lstStyle/>
+          <a:p>
+            <a:pPr algn="l"/>
+            <a:r>
+              <a:rPr sz="1150" b="1" i="0">
+                <a:solidFill>
+                  <a:srgbClr val="1C1A17"/>
+                </a:solidFill>
+              </a:rPr>
+              <a:t>$4.45</a:t>
+            </a:r>
+          </a:p>
+        </p:txBody>
+      </p:sp>
+      <p:sp>
+        <p:nvSpPr>
+          <p:cNvPr id="61" name="TextBox 60"/>
+          <p:cNvSpPr txBox="1"/>
+          <p:nvPr/>
+        </p:nvSpPr>
+        <p:spPr>
+          <a:xfrm>
+            <a:off x="7863840" y="5303520"/>
+            <a:ext cx="3566160" cy="256032"/>
+          </a:xfrm>
+          <a:prstGeom prst="rect">
+            <a:avLst/>
+          </a:prstGeom>
+          <a:noFill/>
+        </p:spPr>
+        <p:txBody>
+          <a:bodyPr wrap="square">
+            <a:spAutoFit/>
+          </a:bodyPr>
+          <a:lstStyle/>
+          <a:p>
+            <a:pPr algn="l"/>
+            <a:r>
+              <a:rPr sz="1000" b="0" i="0">
+                <a:solidFill>
+                  <a:srgbClr val="8C8880"/>
+                </a:solidFill>
+              </a:rPr>
+              <a:t>1 dashboard $3 · 12 alarms $1.20</a:t>
+            </a:r>
+          </a:p>
+        </p:txBody>
+      </p:sp>
+      <p:sp>
+        <p:nvSpPr>
+          <p:cNvPr id="62" name="Rectangle 61"/>
+          <p:cNvSpPr/>
+          <p:nvPr/>
+        </p:nvSpPr>
+        <p:spPr>
+          <a:xfrm>
+            <a:off x="502920" y="5650992"/>
+            <a:ext cx="11155680" cy="438912"/>
+          </a:xfrm>
+          <a:prstGeom prst="rect">
+            <a:avLst/>
+          </a:prstGeom>
+          <a:solidFill>
+            <a:srgbClr val="FFFFFF"/>
+          </a:solidFill>
+          <a:ln>
+            <a:noFill/>
+          </a:ln>
+        </p:spPr>
+        <p:style>
+          <a:lnRef idx="1">
+            <a:schemeClr val="accent1"/>
+          </a:lnRef>
+          <a:fillRef idx="3">
+            <a:schemeClr val="accent1"/>
+          </a:fillRef>
+          <a:effectRef idx="2">
+            <a:schemeClr val="accent1"/>
+          </a:effectRef>
+          <a:fontRef idx="minor">
+            <a:schemeClr val="lt1"/>
+          </a:fontRef>
+        </p:style>
+        <p:txBody>
+          <a:bodyPr rtlCol="0" anchor="ctr"/>
+          <a:lstStyle/>
+          <a:p>
+            <a:pPr algn="ctr"/>
+          </a:p>
+        </p:txBody>
+      </p:sp>
+      <p:sp>
+        <p:nvSpPr>
+          <p:cNvPr id="63" name="Rectangle 62"/>
+          <p:cNvSpPr/>
+          <p:nvPr/>
+        </p:nvSpPr>
+        <p:spPr>
+          <a:xfrm>
+            <a:off x="502920" y="5650992"/>
+            <a:ext cx="36576" cy="438912"/>
+          </a:xfrm>
+          <a:prstGeom prst="rect">
+            <a:avLst/>
+          </a:prstGeom>
+          <a:solidFill>
+            <a:srgbClr val="4A7C6B"/>
+          </a:solidFill>
+          <a:ln>
+            <a:noFill/>
+          </a:ln>
+        </p:spPr>
+        <p:style>
+          <a:lnRef idx="1">
+            <a:schemeClr val="accent1"/>
+          </a:lnRef>
+          <a:fillRef idx="3">
+            <a:schemeClr val="accent1"/>
+          </a:fillRef>
+          <a:effectRef idx="2">
+            <a:schemeClr val="accent1"/>
+          </a:effectRef>
+          <a:fontRef idx="minor">
+            <a:schemeClr val="lt1"/>
+          </a:fontRef>
+        </p:style>
+        <p:txBody>
+          <a:bodyPr rtlCol="0" anchor="ctr"/>
+          <a:lstStyle/>
+          <a:p>
+            <a:pPr algn="ctr"/>
+          </a:p>
+        </p:txBody>
+      </p:sp>
+      <p:sp>
+        <p:nvSpPr>
+          <p:cNvPr id="64" name="TextBox 63"/>
+          <p:cNvSpPr txBox="1"/>
+          <p:nvPr/>
+        </p:nvSpPr>
+        <p:spPr>
+          <a:xfrm>
+            <a:off x="658368" y="5742432"/>
+            <a:ext cx="1920240" cy="256032"/>
+          </a:xfrm>
+          <a:prstGeom prst="rect">
+            <a:avLst/>
+          </a:prstGeom>
+          <a:noFill/>
+        </p:spPr>
+        <p:txBody>
+          <a:bodyPr wrap="square">
+            <a:spAutoFit/>
+          </a:bodyPr>
+          <a:lstStyle/>
+          <a:p>
+            <a:pPr algn="l"/>
+            <a:r>
+              <a:rPr sz="1100" b="1" i="0">
+                <a:solidFill>
+                  <a:srgbClr val="4A7C6B"/>
+                </a:solidFill>
+              </a:rPr>
+              <a:t>X-Ray</a:t>
+            </a:r>
+          </a:p>
+        </p:txBody>
+      </p:sp>
+      <p:sp>
+        <p:nvSpPr>
+          <p:cNvPr id="65" name="TextBox 64"/>
+          <p:cNvSpPr txBox="1"/>
+          <p:nvPr/>
+        </p:nvSpPr>
+        <p:spPr>
+          <a:xfrm>
+            <a:off x="2743200" y="5742432"/>
+            <a:ext cx="3108960" cy="256032"/>
+          </a:xfrm>
+          <a:prstGeom prst="rect">
+            <a:avLst/>
+          </a:prstGeom>
+          <a:noFill/>
+        </p:spPr>
+        <p:txBody>
+          <a:bodyPr wrap="square">
+            <a:spAutoFit/>
+          </a:bodyPr>
+          <a:lstStyle/>
+          <a:p>
+            <a:pPr algn="l"/>
+            <a:r>
+              <a:rPr sz="1050" b="0" i="0">
+                <a:solidFill>
+                  <a:srgbClr val="5C5852"/>
+                </a:solidFill>
+              </a:rPr>
+              <a:t>31,000 traces/mo</a:t>
+            </a:r>
+          </a:p>
+        </p:txBody>
+      </p:sp>
+      <p:sp>
+        <p:nvSpPr>
+          <p:cNvPr id="66" name="TextBox 65"/>
+          <p:cNvSpPr txBox="1"/>
+          <p:nvPr/>
+        </p:nvSpPr>
+        <p:spPr>
+          <a:xfrm>
+            <a:off x="6035040" y="5742432"/>
+            <a:ext cx="1463040" cy="256032"/>
+          </a:xfrm>
+          <a:prstGeom prst="rect">
+            <a:avLst/>
+          </a:prstGeom>
+          <a:noFill/>
+        </p:spPr>
+        <p:txBody>
+          <a:bodyPr wrap="square">
+            <a:spAutoFit/>
+          </a:bodyPr>
+          <a:lstStyle/>
+          <a:p>
+            <a:pPr algn="l"/>
+            <a:r>
+              <a:rPr sz="1150" b="1" i="0">
+                <a:solidFill>
+                  <a:srgbClr val="2E5A4D"/>
+                </a:solidFill>
+              </a:rPr>
+              <a:t>$0.00</a:t>
+            </a:r>
+          </a:p>
+        </p:txBody>
+      </p:sp>
+      <p:sp>
+        <p:nvSpPr>
+          <p:cNvPr id="67" name="TextBox 66"/>
+          <p:cNvSpPr txBox="1"/>
+          <p:nvPr/>
+        </p:nvSpPr>
+        <p:spPr>
+          <a:xfrm>
+            <a:off x="7863840" y="5742432"/>
+            <a:ext cx="3566160" cy="256032"/>
+          </a:xfrm>
+          <a:prstGeom prst="rect">
+            <a:avLst/>
+          </a:prstGeom>
+          <a:noFill/>
+        </p:spPr>
+        <p:txBody>
+          <a:bodyPr wrap="square">
+            <a:spAutoFit/>
+          </a:bodyPr>
+          <a:lstStyle/>
+          <a:p>
+            <a:pPr algn="l"/>
+            <a:r>
+              <a:rPr sz="1000" b="0" i="0">
+                <a:solidFill>
+                  <a:srgbClr val="8C8880"/>
+                </a:solidFill>
+              </a:rPr>
+              <a:t>Within 100K free-tier traces</a:t>
+            </a:r>
+          </a:p>
+        </p:txBody>
+      </p:sp>
+      <p:sp>
+        <p:nvSpPr>
+          <p:cNvPr id="68" name="Rectangle 67"/>
+          <p:cNvSpPr/>
+          <p:nvPr/>
+        </p:nvSpPr>
+        <p:spPr>
+          <a:xfrm>
+            <a:off x="502920" y="6089904"/>
+            <a:ext cx="36576" cy="438912"/>
+          </a:xfrm>
+          <a:prstGeom prst="rect">
+            <a:avLst/>
+          </a:prstGeom>
+          <a:solidFill>
+            <a:srgbClr val="5C5852"/>
+          </a:solidFill>
+          <a:ln>
+            <a:noFill/>
+          </a:ln>
+        </p:spPr>
+        <p:style>
+          <a:lnRef idx="1">
+            <a:schemeClr val="accent1"/>
+          </a:lnRef>
+          <a:fillRef idx="3">
+            <a:schemeClr val="accent1"/>
+          </a:fillRef>
+          <a:effectRef idx="2">
+            <a:schemeClr val="accent1"/>
+          </a:effectRef>
+          <a:fontRef idx="minor">
+            <a:schemeClr val="lt1"/>
+          </a:fontRef>
+        </p:style>
+        <p:txBody>
+          <a:bodyPr rtlCol="0" anchor="ctr"/>
+          <a:lstStyle/>
+          <a:p>
+            <a:pPr algn="ctr"/>
+          </a:p>
+        </p:txBody>
+      </p:sp>
+      <p:sp>
+        <p:nvSpPr>
+          <p:cNvPr id="69" name="TextBox 68"/>
+          <p:cNvSpPr txBox="1"/>
+          <p:nvPr/>
+        </p:nvSpPr>
+        <p:spPr>
+          <a:xfrm>
+            <a:off x="658368" y="6181344"/>
+            <a:ext cx="1920240" cy="256032"/>
+          </a:xfrm>
+          <a:prstGeom prst="rect">
+            <a:avLst/>
+          </a:prstGeom>
+          <a:noFill/>
+        </p:spPr>
+        <p:txBody>
+          <a:bodyPr wrap="square">
+            <a:spAutoFit/>
+          </a:bodyPr>
+          <a:lstStyle/>
+          <a:p>
+            <a:pPr algn="l"/>
+            <a:r>
+              <a:rPr sz="1100" b="1" i="0">
+                <a:solidFill>
+                  <a:srgbClr val="5C5852"/>
+                </a:solidFill>
+              </a:rPr>
+              <a:t>SNS</a:t>
+            </a:r>
+          </a:p>
+        </p:txBody>
+      </p:sp>
+      <p:sp>
+        <p:nvSpPr>
+          <p:cNvPr id="70" name="TextBox 69"/>
+          <p:cNvSpPr txBox="1"/>
+          <p:nvPr/>
+        </p:nvSpPr>
+        <p:spPr>
+          <a:xfrm>
+            <a:off x="2743200" y="6181344"/>
+            <a:ext cx="3108960" cy="256032"/>
+          </a:xfrm>
+          <a:prstGeom prst="rect">
+            <a:avLst/>
+          </a:prstGeom>
+          <a:noFill/>
+        </p:spPr>
+        <p:txBody>
+          <a:bodyPr wrap="square">
+            <a:spAutoFit/>
+          </a:bodyPr>
+          <a:lstStyle/>
+          <a:p>
+            <a:pPr algn="l"/>
+            <a:r>
+              <a:rPr sz="1050" b="0" i="0">
+                <a:solidFill>
+                  <a:srgbClr val="5C5852"/>
+                </a:solidFill>
+              </a:rPr>
+              <a:t>~200 notifications/mo</a:t>
+            </a:r>
+          </a:p>
+        </p:txBody>
+      </p:sp>
+      <p:sp>
+        <p:nvSpPr>
+          <p:cNvPr id="71" name="TextBox 70"/>
+          <p:cNvSpPr txBox="1"/>
+          <p:nvPr/>
+        </p:nvSpPr>
+        <p:spPr>
+          <a:xfrm>
+            <a:off x="6035040" y="6181344"/>
+            <a:ext cx="1463040" cy="256032"/>
+          </a:xfrm>
+          <a:prstGeom prst="rect">
+            <a:avLst/>
+          </a:prstGeom>
+          <a:noFill/>
+        </p:spPr>
+        <p:txBody>
+          <a:bodyPr wrap="square">
+            <a:spAutoFit/>
+          </a:bodyPr>
+          <a:lstStyle/>
+          <a:p>
+            <a:pPr algn="l"/>
+            <a:r>
+              <a:rPr sz="1150" b="1" i="0">
+                <a:solidFill>
+                  <a:srgbClr val="2E5A4D"/>
+                </a:solidFill>
+              </a:rPr>
+              <a:t>$0.00</a:t>
+            </a:r>
+          </a:p>
+        </p:txBody>
+      </p:sp>
+      <p:sp>
+        <p:nvSpPr>
+          <p:cNvPr id="72" name="TextBox 71"/>
+          <p:cNvSpPr txBox="1"/>
+          <p:nvPr/>
+        </p:nvSpPr>
+        <p:spPr>
+          <a:xfrm>
+            <a:off x="7863840" y="6181344"/>
+            <a:ext cx="3566160" cy="256032"/>
+          </a:xfrm>
+          <a:prstGeom prst="rect">
+            <a:avLst/>
+          </a:prstGeom>
+          <a:noFill/>
+        </p:spPr>
+        <p:txBody>
+          <a:bodyPr wrap="square">
+            <a:spAutoFit/>
+          </a:bodyPr>
+          <a:lstStyle/>
+          <a:p>
+            <a:pPr algn="l"/>
+            <a:r>
+              <a:rPr sz="1000" b="0" i="0">
+                <a:solidFill>
+                  <a:srgbClr val="8C8880"/>
+                </a:solidFill>
+              </a:rPr>
+              <a:t>First 1M free</a:t>
+            </a:r>
+          </a:p>
+        </p:txBody>
+      </p:sp>
+      <p:sp>
+        <p:nvSpPr>
+          <p:cNvPr id="73" name="Rectangle 72"/>
+          <p:cNvSpPr/>
+          <p:nvPr/>
+        </p:nvSpPr>
+        <p:spPr>
+          <a:xfrm>
+            <a:off x="502920" y="6437376"/>
+            <a:ext cx="11155680" cy="329184"/>
+          </a:xfrm>
+          <a:prstGeom prst="rect">
+            <a:avLst/>
+          </a:prstGeom>
+          <a:solidFill>
+            <a:srgbClr val="EBF3EF"/>
+          </a:solidFill>
+          <a:ln w="12700">
+            <a:solidFill>
+              <a:srgbClr val="4A7C6B"/>
+            </a:solidFill>
+          </a:ln>
+        </p:spPr>
+        <p:style>
+          <a:lnRef idx="1">
+            <a:schemeClr val="accent1"/>
+          </a:lnRef>
+          <a:fillRef idx="3">
+            <a:schemeClr val="accent1"/>
+          </a:fillRef>
+          <a:effectRef idx="2">
+            <a:schemeClr val="accent1"/>
+          </a:effectRef>
+          <a:fontRef idx="minor">
+            <a:schemeClr val="lt1"/>
+          </a:fontRef>
+        </p:style>
+        <p:txBody>
+          <a:bodyPr rtlCol="0" anchor="ctr"/>
+          <a:lstStyle/>
+          <a:p>
+            <a:pPr algn="ctr"/>
+          </a:p>
+        </p:txBody>
+      </p:sp>
+      <p:sp>
+        <p:nvSpPr>
+          <p:cNvPr id="74" name="TextBox 73"/>
+          <p:cNvSpPr txBox="1"/>
+          <p:nvPr/>
+        </p:nvSpPr>
+        <p:spPr>
+          <a:xfrm>
+            <a:off x="658368" y="6510528"/>
+            <a:ext cx="4572000" cy="237744"/>
+          </a:xfrm>
+          <a:prstGeom prst="rect">
+            <a:avLst/>
+          </a:prstGeom>
+          <a:noFill/>
+        </p:spPr>
+        <p:txBody>
+          <a:bodyPr wrap="square">
+            <a:spAutoFit/>
+          </a:bodyPr>
+          <a:lstStyle/>
+          <a:p>
+            <a:pPr algn="l"/>
+            <a:r>
+              <a:rPr sz="1100" b="1" i="0">
+                <a:solidFill>
+                  <a:srgbClr val="2E5A4D"/>
+                </a:solidFill>
+              </a:rPr>
+              <a:t>Total monthly cost at 50 users/day:</a:t>
+            </a:r>
+          </a:p>
+        </p:txBody>
+      </p:sp>
+      <p:sp>
+        <p:nvSpPr>
+          <p:cNvPr id="75" name="TextBox 74"/>
+          <p:cNvSpPr txBox="1"/>
+          <p:nvPr/>
+        </p:nvSpPr>
+        <p:spPr>
+          <a:xfrm>
+            <a:off x="5486400" y="6492240"/>
+            <a:ext cx="3657600" cy="256032"/>
+          </a:xfrm>
+          <a:prstGeom prst="rect">
+            <a:avLst/>
+          </a:prstGeom>
+          <a:noFill/>
+        </p:spPr>
+        <p:txBody>
+          <a:bodyPr wrap="square">
+            <a:spAutoFit/>
+          </a:bodyPr>
+          <a:lstStyle/>
+          <a:p>
+            <a:pPr algn="l"/>
+            <a:r>
+              <a:rPr sz="1400" b="1" i="0">
+                <a:solidFill>
+                  <a:srgbClr val="2E5A4D"/>
+                </a:solidFill>
+              </a:rPr>
+              <a:t>~$6.75 / month</a:t>
+            </a:r>
+          </a:p>
+        </p:txBody>
+      </p:sp>
+      <p:sp>
+        <p:nvSpPr>
+          <p:cNvPr id="76" name="TextBox 75"/>
+          <p:cNvSpPr txBox="1"/>
+          <p:nvPr/>
+        </p:nvSpPr>
+        <p:spPr>
+          <a:xfrm>
+            <a:off x="9144000" y="6528816"/>
+            <a:ext cx="2377440" cy="201168"/>
+          </a:xfrm>
+          <a:prstGeom prst="rect">
+            <a:avLst/>
+          </a:prstGeom>
+          <a:noFill/>
+        </p:spPr>
+        <p:txBody>
+          <a:bodyPr wrap="square">
+            <a:spAutoFit/>
+          </a:bodyPr>
+          <a:lstStyle/>
+          <a:p>
+            <a:pPr algn="l"/>
+            <a:r>
+              <a:rPr sz="950" b="0" i="1">
+                <a:solidFill>
+                  <a:srgbClr val="8C8880"/>
+                </a:solidFill>
+              </a:rPr>
+              <a:t>X-Ray + CloudWatch observability included</a:t>
             </a:r>
           </a:p>
         </p:txBody>
